--- a/output/wordlabs-govern-3day.pptx
+++ b/output/wordlabs-govern-3day.pptx
@@ -5622,7 +5622,7 @@
                 <a:ea typeface="Trebuchet MS" pitchFamily="34" charset="-122"/>
                 <a:cs typeface="Trebuchet MS" pitchFamily="34" charset="-120"/>
               </a:rPr>
-              <a:t>0</a:t>
+              <a:t>1</a:t>
             </a:r>
             <a:pPr algn="ctr" indent="0" marL="0">
               <a:buNone/>
@@ -6057,7 +6057,7 @@
                 <a:ea typeface="Calibri" pitchFamily="34" charset="-122"/>
                 <a:cs typeface="Calibri" pitchFamily="34" charset="-120"/>
               </a:rPr>
-              <a:t>government</a:t>
+              <a:t>governor</a:t>
             </a:r>
             <a:pPr algn="l" indent="0" marL="0">
               <a:buNone/>
@@ -6071,7 +6071,7 @@
                 <a:ea typeface="Calibri" pitchFamily="34" charset="-122"/>
                 <a:cs typeface="Calibri" pitchFamily="34" charset="-120"/>
               </a:rPr>
-              <a:t> explained how </a:t>
+              <a:t> announced new plans, and the </a:t>
             </a:r>
             <a:pPr algn="l" indent="0" marL="0">
               <a:buNone/>
@@ -6102,7 +6102,7 @@
                 <a:ea typeface="Calibri" pitchFamily="34" charset="-122"/>
                 <a:cs typeface="Calibri" pitchFamily="34" charset="-120"/>
               </a:rPr>
-              <a:t> a large country requires many difficult decisions.</a:t>
+              <a:t> body voted to support them.</a:t>
             </a:r>
             <a:endParaRPr lang="en-US" sz="1800" dirty="0"/>
           </a:p>
@@ -6257,7 +6257,7 @@
                 <a:ea typeface="Trebuchet MS" pitchFamily="34" charset="-122"/>
                 <a:cs typeface="Trebuchet MS" pitchFamily="34" charset="-120"/>
               </a:rPr>
-              <a:t>government</a:t>
+              <a:t>governor</a:t>
             </a:r>
             <a:endParaRPr lang="en-US" sz="1400" dirty="0"/>
           </a:p>
@@ -6855,7 +6855,7 @@
                 <a:ea typeface="Trebuchet MS" pitchFamily="34" charset="-122"/>
                 <a:cs typeface="Trebuchet MS" pitchFamily="34" charset="-120"/>
               </a:rPr>
-              <a:t>government</a:t>
+              <a:t>governor</a:t>
             </a:r>
             <a:endParaRPr lang="en-US" sz="2800" dirty="0"/>
           </a:p>
@@ -7682,7 +7682,7 @@
                 <a:ea typeface="Trebuchet MS" pitchFamily="34" charset="-122"/>
                 <a:cs typeface="Trebuchet MS" pitchFamily="34" charset="-120"/>
               </a:rPr>
-              <a:t>government</a:t>
+              <a:t>governor</a:t>
             </a:r>
             <a:endParaRPr lang="en-US" sz="2800" dirty="0"/>
           </a:p>
@@ -7933,7 +7933,7 @@
                 <a:ea typeface="Trebuchet MS" pitchFamily="34" charset="-122"/>
                 <a:cs typeface="Trebuchet MS" pitchFamily="34" charset="-120"/>
               </a:rPr>
-              <a:t>ment</a:t>
+              <a:t>or</a:t>
             </a:r>
             <a:endParaRPr lang="en-US" sz="1300" dirty="0"/>
           </a:p>
@@ -7972,7 +7972,7 @@
                 <a:ea typeface="Calibri" pitchFamily="34" charset="-122"/>
                 <a:cs typeface="Calibri" pitchFamily="34" charset="-120"/>
               </a:rPr>
-              <a:t>result or state of</a:t>
+              <a:t>a person who does something</a:t>
             </a:r>
             <a:endParaRPr lang="en-US" sz="850" dirty="0"/>
           </a:p>
@@ -8667,7 +8667,7 @@
                 <a:ea typeface="Trebuchet MS" pitchFamily="34" charset="-122"/>
                 <a:cs typeface="Trebuchet MS" pitchFamily="34" charset="-120"/>
               </a:rPr>
-              <a:t>government</a:t>
+              <a:t>governor</a:t>
             </a:r>
             <a:endParaRPr lang="en-US" sz="2800" dirty="0"/>
           </a:p>
@@ -8918,7 +8918,7 @@
                 <a:ea typeface="Trebuchet MS" pitchFamily="34" charset="-122"/>
                 <a:cs typeface="Trebuchet MS" pitchFamily="34" charset="-120"/>
               </a:rPr>
-              <a:t>ment</a:t>
+              <a:t>or</a:t>
             </a:r>
             <a:endParaRPr lang="en-US" sz="1300" dirty="0"/>
           </a:p>
@@ -8957,7 +8957,7 @@
                 <a:ea typeface="Calibri" pitchFamily="34" charset="-122"/>
                 <a:cs typeface="Calibri" pitchFamily="34" charset="-120"/>
               </a:rPr>
-              <a:t>result or state of</a:t>
+              <a:t>a person who does something</a:t>
             </a:r>
             <a:endParaRPr lang="en-US" sz="850" dirty="0"/>
           </a:p>
@@ -9221,7 +9221,7 @@
                 <a:ea typeface="Trebuchet MS" pitchFamily="34" charset="-122"/>
                 <a:cs typeface="Trebuchet MS" pitchFamily="34" charset="-120"/>
               </a:rPr>
-              <a:t>ern</a:t>
+              <a:t>er</a:t>
             </a:r>
             <a:endParaRPr lang="en-US" sz="1400" dirty="0"/>
           </a:p>
@@ -9326,7 +9326,7 @@
                 <a:ea typeface="Trebuchet MS" pitchFamily="34" charset="-122"/>
                 <a:cs typeface="Trebuchet MS" pitchFamily="34" charset="-120"/>
               </a:rPr>
-              <a:t>ment</a:t>
+              <a:t>nor</a:t>
             </a:r>
             <a:endParaRPr lang="en-US" sz="1400" dirty="0"/>
           </a:p>
@@ -9889,7 +9889,7 @@
                 <a:ea typeface="Trebuchet MS" pitchFamily="34" charset="-122"/>
                 <a:cs typeface="Trebuchet MS" pitchFamily="34" charset="-120"/>
               </a:rPr>
-              <a:t>government</a:t>
+              <a:t>governor</a:t>
             </a:r>
             <a:endParaRPr lang="en-US" sz="2800" dirty="0"/>
           </a:p>
@@ -10140,7 +10140,7 @@
                 <a:ea typeface="Trebuchet MS" pitchFamily="34" charset="-122"/>
                 <a:cs typeface="Trebuchet MS" pitchFamily="34" charset="-120"/>
               </a:rPr>
-              <a:t>ment</a:t>
+              <a:t>or</a:t>
             </a:r>
             <a:endParaRPr lang="en-US" sz="1300" dirty="0"/>
           </a:p>
@@ -10179,7 +10179,7 @@
                 <a:ea typeface="Calibri" pitchFamily="34" charset="-122"/>
                 <a:cs typeface="Calibri" pitchFamily="34" charset="-120"/>
               </a:rPr>
-              <a:t>result or state of</a:t>
+              <a:t>a person who does something</a:t>
             </a:r>
             <a:endParaRPr lang="en-US" sz="850" dirty="0"/>
           </a:p>
@@ -10443,7 +10443,7 @@
                 <a:ea typeface="Trebuchet MS" pitchFamily="34" charset="-122"/>
                 <a:cs typeface="Trebuchet MS" pitchFamily="34" charset="-120"/>
               </a:rPr>
-              <a:t>ern</a:t>
+              <a:t>er</a:t>
             </a:r>
             <a:endParaRPr lang="en-US" sz="1400" dirty="0"/>
           </a:p>
@@ -10548,7 +10548,7 @@
                 <a:ea typeface="Trebuchet MS" pitchFamily="34" charset="-122"/>
                 <a:cs typeface="Trebuchet MS" pitchFamily="34" charset="-120"/>
               </a:rPr>
-              <a:t>ment</a:t>
+              <a:t>nor</a:t>
             </a:r>
             <a:endParaRPr lang="en-US" sz="1400" dirty="0"/>
           </a:p>
@@ -10655,8 +10655,8 @@
         </p:nvSpPr>
         <p:spPr>
           <a:xfrm>
-            <a:off x="1951330" y="4169664"/>
-            <a:ext cx="676656" cy="475488"/>
+            <a:off x="2254649" y="4169664"/>
+            <a:ext cx="685800" cy="475488"/>
           </a:xfrm>
           <a:prstGeom prst="rect">
             <a:avLst>
@@ -10682,8 +10682,8 @@
         </p:nvSpPr>
         <p:spPr>
           <a:xfrm>
-            <a:off x="1951330" y="4169664"/>
-            <a:ext cx="676656" cy="475488"/>
+            <a:off x="2254649" y="4169664"/>
+            <a:ext cx="685800" cy="475488"/>
           </a:xfrm>
           <a:prstGeom prst="rect">
             <a:avLst/>
@@ -10721,8 +10721,8 @@
         </p:nvSpPr>
         <p:spPr>
           <a:xfrm>
-            <a:off x="2677363" y="4169664"/>
-            <a:ext cx="676656" cy="475488"/>
+            <a:off x="3293146" y="4169664"/>
+            <a:ext cx="685800" cy="475488"/>
           </a:xfrm>
           <a:prstGeom prst="rect">
             <a:avLst>
@@ -10748,8 +10748,8 @@
         </p:nvSpPr>
         <p:spPr>
           <a:xfrm>
-            <a:off x="2677363" y="4169664"/>
-            <a:ext cx="676656" cy="475488"/>
+            <a:off x="3293146" y="4169664"/>
+            <a:ext cx="685800" cy="475488"/>
           </a:xfrm>
           <a:prstGeom prst="rect">
             <a:avLst/>
@@ -10787,8 +10787,8 @@
         </p:nvSpPr>
         <p:spPr>
           <a:xfrm>
-            <a:off x="3403397" y="4169664"/>
-            <a:ext cx="676656" cy="475488"/>
+            <a:off x="4331643" y="4169664"/>
+            <a:ext cx="685800" cy="475488"/>
           </a:xfrm>
           <a:prstGeom prst="rect">
             <a:avLst>
@@ -10814,8 +10814,8 @@
         </p:nvSpPr>
         <p:spPr>
           <a:xfrm>
-            <a:off x="3403397" y="4169664"/>
-            <a:ext cx="676656" cy="475488"/>
+            <a:off x="4331643" y="4169664"/>
+            <a:ext cx="685800" cy="475488"/>
           </a:xfrm>
           <a:prstGeom prst="rect">
             <a:avLst/>
@@ -10853,8 +10853,8 @@
         </p:nvSpPr>
         <p:spPr>
           <a:xfrm>
-            <a:off x="4129430" y="4169664"/>
-            <a:ext cx="676656" cy="475488"/>
+            <a:off x="5370141" y="4169664"/>
+            <a:ext cx="685800" cy="475488"/>
           </a:xfrm>
           <a:prstGeom prst="rect">
             <a:avLst>
@@ -10880,8 +10880,8 @@
         </p:nvSpPr>
         <p:spPr>
           <a:xfrm>
-            <a:off x="4129430" y="4169664"/>
-            <a:ext cx="676656" cy="475488"/>
+            <a:off x="5370141" y="4169664"/>
+            <a:ext cx="685800" cy="475488"/>
           </a:xfrm>
           <a:prstGeom prst="rect">
             <a:avLst/>
@@ -10919,8 +10919,8 @@
         </p:nvSpPr>
         <p:spPr>
           <a:xfrm>
-            <a:off x="4855464" y="4169664"/>
-            <a:ext cx="676656" cy="475488"/>
+            <a:off x="6408638" y="4169664"/>
+            <a:ext cx="685800" cy="475488"/>
           </a:xfrm>
           <a:prstGeom prst="rect">
             <a:avLst>
@@ -10946,8 +10946,8 @@
         </p:nvSpPr>
         <p:spPr>
           <a:xfrm>
-            <a:off x="4855464" y="4169664"/>
-            <a:ext cx="676656" cy="475488"/>
+            <a:off x="6408638" y="4169664"/>
+            <a:ext cx="685800" cy="475488"/>
           </a:xfrm>
           <a:prstGeom prst="rect">
             <a:avLst/>
@@ -10985,8 +10985,8 @@
         </p:nvSpPr>
         <p:spPr>
           <a:xfrm>
-            <a:off x="5581498" y="4169664"/>
-            <a:ext cx="676656" cy="475488"/>
+            <a:off x="7447135" y="4169664"/>
+            <a:ext cx="685800" cy="475488"/>
           </a:xfrm>
           <a:prstGeom prst="rect">
             <a:avLst>
@@ -11012,8 +11012,8 @@
         </p:nvSpPr>
         <p:spPr>
           <a:xfrm>
-            <a:off x="5581498" y="4169664"/>
-            <a:ext cx="676656" cy="475488"/>
+            <a:off x="7447135" y="4169664"/>
+            <a:ext cx="685800" cy="475488"/>
           </a:xfrm>
           <a:prstGeom prst="rect">
             <a:avLst/>
@@ -11037,205 +11037,7 @@
                 <a:ea typeface="Trebuchet MS" pitchFamily="34" charset="-122"/>
                 <a:cs typeface="Trebuchet MS" pitchFamily="34" charset="-120"/>
               </a:rPr>
-              <a:t>m</a:t>
-            </a:r>
-            <a:endParaRPr lang="en-US" sz="900" dirty="0"/>
-          </a:p>
-        </p:txBody>
-      </p:sp>
-      <p:sp>
-        <p:nvSpPr>
-          <p:cNvPr id="48" name="Shape 46"/>
-          <p:cNvSpPr/>
-          <p:nvPr/>
-        </p:nvSpPr>
-        <p:spPr>
-          <a:xfrm>
-            <a:off x="6307531" y="4169664"/>
-            <a:ext cx="676656" cy="475488"/>
-          </a:xfrm>
-          <a:prstGeom prst="rect">
-            <a:avLst>
-              <a:gd name="adj" fmla="val 7692"/>
-            </a:avLst>
-          </a:prstGeom>
-          <a:solidFill>
-            <a:srgbClr val="FFFFFF"/>
-          </a:solidFill>
-          <a:ln w="12700">
-            <a:solidFill>
-              <a:srgbClr val="DB2777"/>
-            </a:solidFill>
-            <a:prstDash val="solid"/>
-          </a:ln>
-        </p:spPr>
-      </p:sp>
-      <p:sp>
-        <p:nvSpPr>
-          <p:cNvPr id="49" name="Text 47"/>
-          <p:cNvSpPr/>
-          <p:nvPr/>
-        </p:nvSpPr>
-        <p:spPr>
-          <a:xfrm>
-            <a:off x="6307531" y="4169664"/>
-            <a:ext cx="676656" cy="475488"/>
-          </a:xfrm>
-          <a:prstGeom prst="rect">
-            <a:avLst/>
-          </a:prstGeom>
-          <a:noFill/>
-          <a:ln/>
-        </p:spPr>
-        <p:txBody>
-          <a:bodyPr wrap="square" lIns="0" tIns="0" rIns="0" bIns="0" rtlCol="0" anchor="ctr"/>
-          <a:lstStyle/>
-          <a:p>
-            <a:pPr algn="ctr" indent="0" marL="0">
-              <a:buNone/>
-            </a:pPr>
-            <a:r>
-              <a:rPr lang="en-US" sz="900" b="1" dirty="0">
-                <a:solidFill>
-                  <a:srgbClr val="9D174D"/>
-                </a:solidFill>
-                <a:latin typeface="Trebuchet MS" pitchFamily="34" charset="0"/>
-                <a:ea typeface="Trebuchet MS" pitchFamily="34" charset="-122"/>
-                <a:cs typeface="Trebuchet MS" pitchFamily="34" charset="-120"/>
-              </a:rPr>
-              <a:t>e</a:t>
-            </a:r>
-            <a:endParaRPr lang="en-US" sz="900" dirty="0"/>
-          </a:p>
-        </p:txBody>
-      </p:sp>
-      <p:sp>
-        <p:nvSpPr>
-          <p:cNvPr id="50" name="Shape 48"/>
-          <p:cNvSpPr/>
-          <p:nvPr/>
-        </p:nvSpPr>
-        <p:spPr>
-          <a:xfrm>
-            <a:off x="7033565" y="4169664"/>
-            <a:ext cx="676656" cy="475488"/>
-          </a:xfrm>
-          <a:prstGeom prst="rect">
-            <a:avLst>
-              <a:gd name="adj" fmla="val 7692"/>
-            </a:avLst>
-          </a:prstGeom>
-          <a:solidFill>
-            <a:srgbClr val="FFFFFF"/>
-          </a:solidFill>
-          <a:ln w="12700">
-            <a:solidFill>
-              <a:srgbClr val="DB2777"/>
-            </a:solidFill>
-            <a:prstDash val="solid"/>
-          </a:ln>
-        </p:spPr>
-      </p:sp>
-      <p:sp>
-        <p:nvSpPr>
-          <p:cNvPr id="51" name="Text 49"/>
-          <p:cNvSpPr/>
-          <p:nvPr/>
-        </p:nvSpPr>
-        <p:spPr>
-          <a:xfrm>
-            <a:off x="7033565" y="4169664"/>
-            <a:ext cx="676656" cy="475488"/>
-          </a:xfrm>
-          <a:prstGeom prst="rect">
-            <a:avLst/>
-          </a:prstGeom>
-          <a:noFill/>
-          <a:ln/>
-        </p:spPr>
-        <p:txBody>
-          <a:bodyPr wrap="square" lIns="0" tIns="0" rIns="0" bIns="0" rtlCol="0" anchor="ctr"/>
-          <a:lstStyle/>
-          <a:p>
-            <a:pPr algn="ctr" indent="0" marL="0">
-              <a:buNone/>
-            </a:pPr>
-            <a:r>
-              <a:rPr lang="en-US" sz="900" b="1" dirty="0">
-                <a:solidFill>
-                  <a:srgbClr val="9D174D"/>
-                </a:solidFill>
-                <a:latin typeface="Trebuchet MS" pitchFamily="34" charset="0"/>
-                <a:ea typeface="Trebuchet MS" pitchFamily="34" charset="-122"/>
-                <a:cs typeface="Trebuchet MS" pitchFamily="34" charset="-120"/>
-              </a:rPr>
-              <a:t>n</a:t>
-            </a:r>
-            <a:endParaRPr lang="en-US" sz="900" dirty="0"/>
-          </a:p>
-        </p:txBody>
-      </p:sp>
-      <p:sp>
-        <p:nvSpPr>
-          <p:cNvPr id="52" name="Shape 50"/>
-          <p:cNvSpPr/>
-          <p:nvPr/>
-        </p:nvSpPr>
-        <p:spPr>
-          <a:xfrm>
-            <a:off x="7759598" y="4169664"/>
-            <a:ext cx="676656" cy="475488"/>
-          </a:xfrm>
-          <a:prstGeom prst="rect">
-            <a:avLst>
-              <a:gd name="adj" fmla="val 7692"/>
-            </a:avLst>
-          </a:prstGeom>
-          <a:solidFill>
-            <a:srgbClr val="FFFFFF"/>
-          </a:solidFill>
-          <a:ln w="12700">
-            <a:solidFill>
-              <a:srgbClr val="DB2777"/>
-            </a:solidFill>
-            <a:prstDash val="solid"/>
-          </a:ln>
-        </p:spPr>
-      </p:sp>
-      <p:sp>
-        <p:nvSpPr>
-          <p:cNvPr id="53" name="Text 51"/>
-          <p:cNvSpPr/>
-          <p:nvPr/>
-        </p:nvSpPr>
-        <p:spPr>
-          <a:xfrm>
-            <a:off x="7759598" y="4169664"/>
-            <a:ext cx="676656" cy="475488"/>
-          </a:xfrm>
-          <a:prstGeom prst="rect">
-            <a:avLst/>
-          </a:prstGeom>
-          <a:noFill/>
-          <a:ln/>
-        </p:spPr>
-        <p:txBody>
-          <a:bodyPr wrap="square" lIns="0" tIns="0" rIns="0" bIns="0" rtlCol="0" anchor="ctr"/>
-          <a:lstStyle/>
-          <a:p>
-            <a:pPr algn="ctr" indent="0" marL="0">
-              <a:buNone/>
-            </a:pPr>
-            <a:r>
-              <a:rPr lang="en-US" sz="900" b="1" dirty="0">
-                <a:solidFill>
-                  <a:srgbClr val="9D174D"/>
-                </a:solidFill>
-                <a:latin typeface="Trebuchet MS" pitchFamily="34" charset="0"/>
-                <a:ea typeface="Trebuchet MS" pitchFamily="34" charset="-122"/>
-                <a:cs typeface="Trebuchet MS" pitchFamily="34" charset="-120"/>
-              </a:rPr>
-              <a:t>t</a:t>
+              <a:t>or</a:t>
             </a:r>
             <a:endParaRPr lang="en-US" sz="900" dirty="0"/>
           </a:p>
@@ -12783,7 +12585,7 @@
                 <a:ea typeface="Calibri" pitchFamily="34" charset="-122"/>
                 <a:cs typeface="Calibri" pitchFamily="34" charset="-120"/>
               </a:rPr>
-              <a:t>ongoing action</a:t>
+              <a:t>ongoing action or state</a:t>
             </a:r>
             <a:endParaRPr lang="en-US" sz="850" dirty="0"/>
           </a:p>
@@ -13768,7 +13570,7 @@
                 <a:ea typeface="Calibri" pitchFamily="34" charset="-122"/>
                 <a:cs typeface="Calibri" pitchFamily="34" charset="-120"/>
               </a:rPr>
-              <a:t>ongoing action</a:t>
+              <a:t>ongoing action or state</a:t>
             </a:r>
             <a:endParaRPr lang="en-US" sz="850" dirty="0"/>
           </a:p>
@@ -15255,7 +15057,7 @@
                 <a:ea typeface="Calibri" pitchFamily="34" charset="-122"/>
                 <a:cs typeface="Calibri" pitchFamily="34" charset="-120"/>
               </a:rPr>
-              <a:t>ongoing action</a:t>
+              <a:t>ongoing action or state</a:t>
             </a:r>
             <a:endParaRPr lang="en-US" sz="850" dirty="0"/>
           </a:p>
@@ -17505,7 +17307,7 @@
                 <a:ea typeface="Calibri" pitchFamily="34" charset="-122"/>
                 <a:cs typeface="Calibri" pitchFamily="34" charset="-120"/>
               </a:rPr>
-              <a:t>The </a:t>
+              <a:t>Good </a:t>
             </a:r>
             <a:pPr algn="l" indent="0" marL="0">
               <a:buNone/>
@@ -17522,7 +17324,7 @@
                 <a:ea typeface="Calibri" pitchFamily="34" charset="-122"/>
                 <a:cs typeface="Calibri" pitchFamily="34" charset="-120"/>
               </a:rPr>
-              <a:t>governor</a:t>
+              <a:t>governance</a:t>
             </a:r>
             <a:pPr algn="l" indent="0" marL="0">
               <a:buNone/>
@@ -17536,7 +17338,7 @@
                 <a:ea typeface="Calibri" pitchFamily="34" charset="-122"/>
                 <a:cs typeface="Calibri" pitchFamily="34" charset="-120"/>
               </a:rPr>
-              <a:t> announced that </a:t>
+              <a:t> is essential; the </a:t>
             </a:r>
             <a:pPr algn="l" indent="0" marL="0">
               <a:buNone/>
@@ -17553,7 +17355,7 @@
                 <a:ea typeface="Calibri" pitchFamily="34" charset="-122"/>
                 <a:cs typeface="Calibri" pitchFamily="34" charset="-120"/>
               </a:rPr>
-              <a:t>misgovernment</a:t>
+              <a:t>government</a:t>
             </a:r>
             <a:pPr algn="l" indent="0" marL="0">
               <a:buNone/>
@@ -17567,7 +17369,7 @@
                 <a:ea typeface="Calibri" pitchFamily="34" charset="-122"/>
                 <a:cs typeface="Calibri" pitchFamily="34" charset="-120"/>
               </a:rPr>
-              <a:t> had caused problems, so a new system of </a:t>
+              <a:t> must never </a:t>
             </a:r>
             <a:pPr algn="l" indent="0" marL="0">
               <a:buNone/>
@@ -17584,7 +17386,7 @@
                 <a:ea typeface="Calibri" pitchFamily="34" charset="-122"/>
                 <a:cs typeface="Calibri" pitchFamily="34" charset="-120"/>
               </a:rPr>
-              <a:t>governance</a:t>
+              <a:t>misgovern</a:t>
             </a:r>
             <a:pPr algn="l" indent="0" marL="0">
               <a:buNone/>
@@ -17598,7 +17400,7 @@
                 <a:ea typeface="Calibri" pitchFamily="34" charset="-122"/>
                 <a:cs typeface="Calibri" pitchFamily="34" charset="-120"/>
               </a:rPr>
-              <a:t> would begin.</a:t>
+              <a:t> the people it serves.</a:t>
             </a:r>
             <a:endParaRPr lang="en-US" sz="1800" dirty="0"/>
           </a:p>
@@ -17753,7 +17555,7 @@
                 <a:ea typeface="Trebuchet MS" pitchFamily="34" charset="-122"/>
                 <a:cs typeface="Trebuchet MS" pitchFamily="34" charset="-120"/>
               </a:rPr>
-              <a:t>governor</a:t>
+              <a:t>governance</a:t>
             </a:r>
             <a:endParaRPr lang="en-US" sz="1400" dirty="0"/>
           </a:p>
@@ -17881,7 +17683,7 @@
                 <a:ea typeface="Trebuchet MS" pitchFamily="34" charset="-122"/>
                 <a:cs typeface="Trebuchet MS" pitchFamily="34" charset="-120"/>
               </a:rPr>
-              <a:t>misgovernment</a:t>
+              <a:t>government</a:t>
             </a:r>
             <a:endParaRPr lang="en-US" sz="1400" dirty="0"/>
           </a:p>
@@ -18009,7 +17811,7 @@
                 <a:ea typeface="Trebuchet MS" pitchFamily="34" charset="-122"/>
                 <a:cs typeface="Trebuchet MS" pitchFamily="34" charset="-120"/>
               </a:rPr>
-              <a:t>governance</a:t>
+              <a:t>misgovern</a:t>
             </a:r>
             <a:endParaRPr lang="en-US" sz="1400" dirty="0"/>
           </a:p>
@@ -18479,7 +18281,7 @@
                 <a:ea typeface="Trebuchet MS" pitchFamily="34" charset="-122"/>
                 <a:cs typeface="Trebuchet MS" pitchFamily="34" charset="-120"/>
               </a:rPr>
-              <a:t>governor</a:t>
+              <a:t>governance</a:t>
             </a:r>
             <a:endParaRPr lang="en-US" sz="2800" dirty="0"/>
           </a:p>
@@ -19306,7 +19108,7 @@
                 <a:ea typeface="Trebuchet MS" pitchFamily="34" charset="-122"/>
                 <a:cs typeface="Trebuchet MS" pitchFamily="34" charset="-120"/>
               </a:rPr>
-              <a:t>governor</a:t>
+              <a:t>governance</a:t>
             </a:r>
             <a:endParaRPr lang="en-US" sz="2800" dirty="0"/>
           </a:p>
@@ -19557,7 +19359,7 @@
                 <a:ea typeface="Trebuchet MS" pitchFamily="34" charset="-122"/>
                 <a:cs typeface="Trebuchet MS" pitchFamily="34" charset="-120"/>
               </a:rPr>
-              <a:t>or</a:t>
+              <a:t>ance</a:t>
             </a:r>
             <a:endParaRPr lang="en-US" sz="1300" dirty="0"/>
           </a:p>
@@ -19596,7 +19398,7 @@
                 <a:ea typeface="Calibri" pitchFamily="34" charset="-122"/>
                 <a:cs typeface="Calibri" pitchFamily="34" charset="-120"/>
               </a:rPr>
-              <a:t>person who does</a:t>
+              <a:t>state or quality of</a:t>
             </a:r>
             <a:endParaRPr lang="en-US" sz="850" dirty="0"/>
           </a:p>
@@ -20291,7 +20093,7 @@
                 <a:ea typeface="Trebuchet MS" pitchFamily="34" charset="-122"/>
                 <a:cs typeface="Trebuchet MS" pitchFamily="34" charset="-120"/>
               </a:rPr>
-              <a:t>governor</a:t>
+              <a:t>governance</a:t>
             </a:r>
             <a:endParaRPr lang="en-US" sz="2800" dirty="0"/>
           </a:p>
@@ -20542,7 +20344,7 @@
                 <a:ea typeface="Trebuchet MS" pitchFamily="34" charset="-122"/>
                 <a:cs typeface="Trebuchet MS" pitchFamily="34" charset="-120"/>
               </a:rPr>
-              <a:t>or</a:t>
+              <a:t>ance</a:t>
             </a:r>
             <a:endParaRPr lang="en-US" sz="1300" dirty="0"/>
           </a:p>
@@ -20581,7 +20383,7 @@
                 <a:ea typeface="Calibri" pitchFamily="34" charset="-122"/>
                 <a:cs typeface="Calibri" pitchFamily="34" charset="-120"/>
               </a:rPr>
-              <a:t>person who does</a:t>
+              <a:t>state or quality of</a:t>
             </a:r>
             <a:endParaRPr lang="en-US" sz="850" dirty="0"/>
           </a:p>
@@ -20950,7 +20752,7 @@
                 <a:ea typeface="Trebuchet MS" pitchFamily="34" charset="-122"/>
                 <a:cs typeface="Trebuchet MS" pitchFamily="34" charset="-120"/>
               </a:rPr>
-              <a:t>or</a:t>
+              <a:t>ance</a:t>
             </a:r>
             <a:endParaRPr lang="en-US" sz="1400" dirty="0"/>
           </a:p>
@@ -21513,7 +21315,7 @@
                 <a:ea typeface="Trebuchet MS" pitchFamily="34" charset="-122"/>
                 <a:cs typeface="Trebuchet MS" pitchFamily="34" charset="-120"/>
               </a:rPr>
-              <a:t>governor</a:t>
+              <a:t>governance</a:t>
             </a:r>
             <a:endParaRPr lang="en-US" sz="2800" dirty="0"/>
           </a:p>
@@ -21764,7 +21566,7 @@
                 <a:ea typeface="Trebuchet MS" pitchFamily="34" charset="-122"/>
                 <a:cs typeface="Trebuchet MS" pitchFamily="34" charset="-120"/>
               </a:rPr>
-              <a:t>or</a:t>
+              <a:t>ance</a:t>
             </a:r>
             <a:endParaRPr lang="en-US" sz="1300" dirty="0"/>
           </a:p>
@@ -21803,7 +21605,7 @@
                 <a:ea typeface="Calibri" pitchFamily="34" charset="-122"/>
                 <a:cs typeface="Calibri" pitchFamily="34" charset="-120"/>
               </a:rPr>
-              <a:t>person who does</a:t>
+              <a:t>state or quality of</a:t>
             </a:r>
             <a:endParaRPr lang="en-US" sz="850" dirty="0"/>
           </a:p>
@@ -22172,7 +21974,7 @@
                 <a:ea typeface="Trebuchet MS" pitchFamily="34" charset="-122"/>
                 <a:cs typeface="Trebuchet MS" pitchFamily="34" charset="-120"/>
               </a:rPr>
-              <a:t>or</a:t>
+              <a:t>ance</a:t>
             </a:r>
             <a:endParaRPr lang="en-US" sz="1400" dirty="0"/>
           </a:p>
@@ -22253,11 +22055,11 @@
         <p:spPr>
           <a:xfrm>
             <a:off x="1874520" y="4096512"/>
-            <a:ext cx="6903720" cy="658368"/>
+            <a:ext cx="6903720" cy="804672"/>
           </a:xfrm>
           <a:prstGeom prst="rect">
             <a:avLst>
-              <a:gd name="adj" fmla="val 8333"/>
+              <a:gd name="adj" fmla="val 6818"/>
             </a:avLst>
           </a:prstGeom>
           <a:solidFill>
@@ -22279,12 +22081,12 @@
         </p:nvSpPr>
         <p:spPr>
           <a:xfrm>
-            <a:off x="2254649" y="4169664"/>
-            <a:ext cx="685800" cy="475488"/>
+            <a:off x="2023872" y="4169664"/>
+            <a:ext cx="685800" cy="384048"/>
           </a:xfrm>
           <a:prstGeom prst="rect">
             <a:avLst>
-              <a:gd name="adj" fmla="val 7692"/>
+              <a:gd name="adj" fmla="val 9524"/>
             </a:avLst>
           </a:prstGeom>
           <a:solidFill>
@@ -22306,8 +22108,8 @@
         </p:nvSpPr>
         <p:spPr>
           <a:xfrm>
-            <a:off x="2254649" y="4169664"/>
-            <a:ext cx="685800" cy="475488"/>
+            <a:off x="2023872" y="4169664"/>
+            <a:ext cx="685800" cy="384048"/>
           </a:xfrm>
           <a:prstGeom prst="rect">
             <a:avLst/>
@@ -22345,12 +22147,12 @@
         </p:nvSpPr>
         <p:spPr>
           <a:xfrm>
-            <a:off x="3293146" y="4169664"/>
-            <a:ext cx="685800" cy="475488"/>
+            <a:off x="2831592" y="4169664"/>
+            <a:ext cx="685800" cy="384048"/>
           </a:xfrm>
           <a:prstGeom prst="rect">
             <a:avLst>
-              <a:gd name="adj" fmla="val 7692"/>
+              <a:gd name="adj" fmla="val 9524"/>
             </a:avLst>
           </a:prstGeom>
           <a:solidFill>
@@ -22372,8 +22174,8 @@
         </p:nvSpPr>
         <p:spPr>
           <a:xfrm>
-            <a:off x="3293146" y="4169664"/>
-            <a:ext cx="685800" cy="475488"/>
+            <a:off x="2831592" y="4169664"/>
+            <a:ext cx="685800" cy="384048"/>
           </a:xfrm>
           <a:prstGeom prst="rect">
             <a:avLst/>
@@ -22411,12 +22213,12 @@
         </p:nvSpPr>
         <p:spPr>
           <a:xfrm>
-            <a:off x="4331643" y="4169664"/>
-            <a:ext cx="685800" cy="475488"/>
+            <a:off x="3639312" y="4169664"/>
+            <a:ext cx="685800" cy="384048"/>
           </a:xfrm>
           <a:prstGeom prst="rect">
             <a:avLst>
-              <a:gd name="adj" fmla="val 7692"/>
+              <a:gd name="adj" fmla="val 9524"/>
             </a:avLst>
           </a:prstGeom>
           <a:solidFill>
@@ -22438,8 +22240,8 @@
         </p:nvSpPr>
         <p:spPr>
           <a:xfrm>
-            <a:off x="4331643" y="4169664"/>
-            <a:ext cx="685800" cy="475488"/>
+            <a:off x="3639312" y="4169664"/>
+            <a:ext cx="685800" cy="384048"/>
           </a:xfrm>
           <a:prstGeom prst="rect">
             <a:avLst/>
@@ -22477,12 +22279,12 @@
         </p:nvSpPr>
         <p:spPr>
           <a:xfrm>
-            <a:off x="5370141" y="4169664"/>
-            <a:ext cx="685800" cy="475488"/>
+            <a:off x="4447032" y="4169664"/>
+            <a:ext cx="685800" cy="384048"/>
           </a:xfrm>
           <a:prstGeom prst="rect">
             <a:avLst>
-              <a:gd name="adj" fmla="val 7692"/>
+              <a:gd name="adj" fmla="val 9524"/>
             </a:avLst>
           </a:prstGeom>
           <a:solidFill>
@@ -22504,8 +22306,8 @@
         </p:nvSpPr>
         <p:spPr>
           <a:xfrm>
-            <a:off x="5370141" y="4169664"/>
-            <a:ext cx="685800" cy="475488"/>
+            <a:off x="4447032" y="4169664"/>
+            <a:ext cx="685800" cy="384048"/>
           </a:xfrm>
           <a:prstGeom prst="rect">
             <a:avLst/>
@@ -22543,12 +22345,12 @@
         </p:nvSpPr>
         <p:spPr>
           <a:xfrm>
-            <a:off x="6408638" y="4169664"/>
-            <a:ext cx="685800" cy="475488"/>
+            <a:off x="5254752" y="4169664"/>
+            <a:ext cx="685800" cy="384048"/>
           </a:xfrm>
           <a:prstGeom prst="rect">
             <a:avLst>
-              <a:gd name="adj" fmla="val 7692"/>
+              <a:gd name="adj" fmla="val 9524"/>
             </a:avLst>
           </a:prstGeom>
           <a:solidFill>
@@ -22570,8 +22372,8 @@
         </p:nvSpPr>
         <p:spPr>
           <a:xfrm>
-            <a:off x="6408638" y="4169664"/>
-            <a:ext cx="685800" cy="475488"/>
+            <a:off x="5254752" y="4169664"/>
+            <a:ext cx="685800" cy="384048"/>
           </a:xfrm>
           <a:prstGeom prst="rect">
             <a:avLst/>
@@ -22609,12 +22411,12 @@
         </p:nvSpPr>
         <p:spPr>
           <a:xfrm>
-            <a:off x="7447135" y="4169664"/>
-            <a:ext cx="685800" cy="475488"/>
+            <a:off x="6062472" y="4169664"/>
+            <a:ext cx="685800" cy="384048"/>
           </a:xfrm>
           <a:prstGeom prst="rect">
             <a:avLst>
-              <a:gd name="adj" fmla="val 7692"/>
+              <a:gd name="adj" fmla="val 9524"/>
             </a:avLst>
           </a:prstGeom>
           <a:solidFill>
@@ -22636,8 +22438,8 @@
         </p:nvSpPr>
         <p:spPr>
           <a:xfrm>
-            <a:off x="7447135" y="4169664"/>
-            <a:ext cx="685800" cy="475488"/>
+            <a:off x="6062472" y="4169664"/>
+            <a:ext cx="685800" cy="384048"/>
           </a:xfrm>
           <a:prstGeom prst="rect">
             <a:avLst/>
@@ -22661,9 +22463,180 @@
                 <a:ea typeface="Trebuchet MS" pitchFamily="34" charset="-122"/>
                 <a:cs typeface="Trebuchet MS" pitchFamily="34" charset="-120"/>
               </a:rPr>
-              <a:t>or</a:t>
+              <a:t>a</a:t>
             </a:r>
             <a:endParaRPr lang="en-US" sz="900" dirty="0"/>
+          </a:p>
+        </p:txBody>
+      </p:sp>
+      <p:sp>
+        <p:nvSpPr>
+          <p:cNvPr id="48" name="Shape 46"/>
+          <p:cNvSpPr/>
+          <p:nvPr/>
+        </p:nvSpPr>
+        <p:spPr>
+          <a:xfrm>
+            <a:off x="6870192" y="4169664"/>
+            <a:ext cx="685800" cy="384048"/>
+          </a:xfrm>
+          <a:prstGeom prst="rect">
+            <a:avLst>
+              <a:gd name="adj" fmla="val 9524"/>
+            </a:avLst>
+          </a:prstGeom>
+          <a:solidFill>
+            <a:srgbClr val="FFFFFF"/>
+          </a:solidFill>
+          <a:ln w="12700">
+            <a:solidFill>
+              <a:srgbClr val="DB2777"/>
+            </a:solidFill>
+            <a:prstDash val="solid"/>
+          </a:ln>
+        </p:spPr>
+      </p:sp>
+      <p:sp>
+        <p:nvSpPr>
+          <p:cNvPr id="49" name="Text 47"/>
+          <p:cNvSpPr/>
+          <p:nvPr/>
+        </p:nvSpPr>
+        <p:spPr>
+          <a:xfrm>
+            <a:off x="6870192" y="4169664"/>
+            <a:ext cx="685800" cy="384048"/>
+          </a:xfrm>
+          <a:prstGeom prst="rect">
+            <a:avLst/>
+          </a:prstGeom>
+          <a:noFill/>
+          <a:ln/>
+        </p:spPr>
+        <p:txBody>
+          <a:bodyPr wrap="square" lIns="0" tIns="0" rIns="0" bIns="0" rtlCol="0" anchor="ctr"/>
+          <a:lstStyle/>
+          <a:p>
+            <a:pPr algn="ctr" indent="0" marL="0">
+              <a:buNone/>
+            </a:pPr>
+            <a:r>
+              <a:rPr lang="en-US" sz="900" b="1" dirty="0">
+                <a:solidFill>
+                  <a:srgbClr val="9D174D"/>
+                </a:solidFill>
+                <a:latin typeface="Trebuchet MS" pitchFamily="34" charset="0"/>
+                <a:ea typeface="Trebuchet MS" pitchFamily="34" charset="-122"/>
+                <a:cs typeface="Trebuchet MS" pitchFamily="34" charset="-120"/>
+              </a:rPr>
+              <a:t>n</a:t>
+            </a:r>
+            <a:endParaRPr lang="en-US" sz="900" dirty="0"/>
+          </a:p>
+        </p:txBody>
+      </p:sp>
+      <p:sp>
+        <p:nvSpPr>
+          <p:cNvPr id="50" name="Shape 48"/>
+          <p:cNvSpPr/>
+          <p:nvPr/>
+        </p:nvSpPr>
+        <p:spPr>
+          <a:xfrm>
+            <a:off x="7677912" y="4169664"/>
+            <a:ext cx="685800" cy="384048"/>
+          </a:xfrm>
+          <a:prstGeom prst="rect">
+            <a:avLst>
+              <a:gd name="adj" fmla="val 9524"/>
+            </a:avLst>
+          </a:prstGeom>
+          <a:solidFill>
+            <a:srgbClr val="FFFFFF"/>
+          </a:solidFill>
+          <a:ln w="12700">
+            <a:solidFill>
+              <a:srgbClr val="DB2777"/>
+            </a:solidFill>
+            <a:prstDash val="solid"/>
+          </a:ln>
+        </p:spPr>
+      </p:sp>
+      <p:sp>
+        <p:nvSpPr>
+          <p:cNvPr id="51" name="Text 49"/>
+          <p:cNvSpPr/>
+          <p:nvPr/>
+        </p:nvSpPr>
+        <p:spPr>
+          <a:xfrm>
+            <a:off x="7677912" y="4169664"/>
+            <a:ext cx="685800" cy="384048"/>
+          </a:xfrm>
+          <a:prstGeom prst="rect">
+            <a:avLst/>
+          </a:prstGeom>
+          <a:noFill/>
+          <a:ln/>
+        </p:spPr>
+        <p:txBody>
+          <a:bodyPr wrap="square" lIns="0" tIns="0" rIns="0" bIns="0" rtlCol="0" anchor="ctr"/>
+          <a:lstStyle/>
+          <a:p>
+            <a:pPr algn="ctr" indent="0" marL="0">
+              <a:buNone/>
+            </a:pPr>
+            <a:r>
+              <a:rPr lang="en-US" sz="900" b="1" dirty="0">
+                <a:solidFill>
+                  <a:srgbClr val="9D174D"/>
+                </a:solidFill>
+                <a:latin typeface="Trebuchet MS" pitchFamily="34" charset="0"/>
+                <a:ea typeface="Trebuchet MS" pitchFamily="34" charset="-122"/>
+                <a:cs typeface="Trebuchet MS" pitchFamily="34" charset="-120"/>
+              </a:rPr>
+              <a:t>ce</a:t>
+            </a:r>
+            <a:endParaRPr lang="en-US" sz="900" dirty="0"/>
+          </a:p>
+        </p:txBody>
+      </p:sp>
+      <p:sp>
+        <p:nvSpPr>
+          <p:cNvPr id="52" name="Text 50"/>
+          <p:cNvSpPr/>
+          <p:nvPr/>
+        </p:nvSpPr>
+        <p:spPr>
+          <a:xfrm>
+            <a:off x="7677912" y="4572000"/>
+            <a:ext cx="685800" cy="219456"/>
+          </a:xfrm>
+          <a:prstGeom prst="rect">
+            <a:avLst/>
+          </a:prstGeom>
+          <a:noFill/>
+          <a:ln/>
+        </p:spPr>
+        <p:txBody>
+          <a:bodyPr wrap="square" lIns="0" tIns="0" rIns="0" bIns="0" rtlCol="0" anchor="t"/>
+          <a:lstStyle/>
+          <a:p>
+            <a:pPr algn="ctr" indent="0" marL="0">
+              <a:buNone/>
+            </a:pPr>
+            <a:r>
+              <a:rPr lang="en-US" sz="750" i="1" dirty="0">
+                <a:solidFill>
+                  <a:srgbClr val="94A3B8"/>
+                </a:solidFill>
+                <a:latin typeface="Calibri" pitchFamily="34" charset="0"/>
+                <a:ea typeface="Calibri" pitchFamily="34" charset="-122"/>
+                <a:cs typeface="Calibri" pitchFamily="34" charset="-120"/>
+              </a:rPr>
+              <a:t>/s/</a:t>
+            </a:r>
+            <a:endParaRPr lang="en-US" sz="750" dirty="0"/>
           </a:p>
         </p:txBody>
       </p:sp>
@@ -23092,7 +23065,7 @@
                 <a:ea typeface="Trebuchet MS" pitchFamily="34" charset="-122"/>
                 <a:cs typeface="Trebuchet MS" pitchFamily="34" charset="-120"/>
               </a:rPr>
-              <a:t>misgovernment</a:t>
+              <a:t>government</a:t>
             </a:r>
             <a:endParaRPr lang="en-US" sz="2800" dirty="0"/>
           </a:p>
@@ -23919,7 +23892,7 @@
                 <a:ea typeface="Trebuchet MS" pitchFamily="34" charset="-122"/>
                 <a:cs typeface="Trebuchet MS" pitchFamily="34" charset="-120"/>
               </a:rPr>
-              <a:t>misgovernment</a:t>
+              <a:t>government</a:t>
             </a:r>
             <a:endParaRPr lang="en-US" sz="2800" dirty="0"/>
           </a:p>
@@ -23999,7 +23972,7 @@
         </p:nvSpPr>
         <p:spPr>
           <a:xfrm>
-            <a:off x="2221992" y="2258568"/>
+            <a:off x="2938272" y="2258568"/>
             <a:ext cx="1828800" cy="292608"/>
           </a:xfrm>
           <a:prstGeom prst="rect">
@@ -24008,11 +23981,11 @@
             </a:avLst>
           </a:prstGeom>
           <a:solidFill>
-            <a:srgbClr val="DDD6FE"/>
+            <a:srgbClr val="CCFBF1"/>
           </a:solidFill>
           <a:ln w="19050">
             <a:solidFill>
-              <a:srgbClr val="7C3AED"/>
+              <a:srgbClr val="0D9488"/>
             </a:solidFill>
             <a:prstDash val="solid"/>
           </a:ln>
@@ -24033,7 +24006,7 @@
         </p:nvSpPr>
         <p:spPr>
           <a:xfrm>
-            <a:off x="2221992" y="2258568"/>
+            <a:off x="2938272" y="2258568"/>
             <a:ext cx="1828800" cy="292608"/>
           </a:xfrm>
           <a:prstGeom prst="rect">
@@ -24052,13 +24025,13 @@
             <a:r>
               <a:rPr lang="en-US" sz="1300" b="1" dirty="0">
                 <a:solidFill>
-                  <a:srgbClr val="4C1D95"/>
+                  <a:srgbClr val="0F766E"/>
                 </a:solidFill>
                 <a:latin typeface="Trebuchet MS" pitchFamily="34" charset="0"/>
                 <a:ea typeface="Trebuchet MS" pitchFamily="34" charset="-122"/>
                 <a:cs typeface="Trebuchet MS" pitchFamily="34" charset="-120"/>
               </a:rPr>
-              <a:t>mis</a:t>
+              <a:t>govern</a:t>
             </a:r>
             <a:endParaRPr lang="en-US" sz="1300" dirty="0"/>
           </a:p>
@@ -24072,7 +24045,7 @@
         </p:nvSpPr>
         <p:spPr>
           <a:xfrm>
-            <a:off x="2221992" y="2569464"/>
+            <a:off x="2938272" y="2569464"/>
             <a:ext cx="1828800" cy="201168"/>
           </a:xfrm>
           <a:prstGeom prst="rect">
@@ -24097,7 +24070,7 @@
                 <a:ea typeface="Calibri" pitchFamily="34" charset="-122"/>
                 <a:cs typeface="Calibri" pitchFamily="34" charset="-120"/>
               </a:rPr>
-              <a:t>badly or wrongly</a:t>
+              <a:t>to rule or control</a:t>
             </a:r>
             <a:endParaRPr lang="en-US" sz="850" dirty="0"/>
           </a:p>
@@ -24111,7 +24084,7 @@
         </p:nvSpPr>
         <p:spPr>
           <a:xfrm>
-            <a:off x="4370832" y="2258568"/>
+            <a:off x="5803392" y="2258568"/>
             <a:ext cx="1828800" cy="292608"/>
           </a:xfrm>
           <a:prstGeom prst="rect">
@@ -24120,11 +24093,11 @@
             </a:avLst>
           </a:prstGeom>
           <a:solidFill>
-            <a:srgbClr val="CCFBF1"/>
+            <a:srgbClr val="FCE7F3"/>
           </a:solidFill>
           <a:ln w="19050">
             <a:solidFill>
-              <a:srgbClr val="0D9488"/>
+              <a:srgbClr val="DB2777"/>
             </a:solidFill>
             <a:prstDash val="solid"/>
           </a:ln>
@@ -24145,7 +24118,7 @@
         </p:nvSpPr>
         <p:spPr>
           <a:xfrm>
-            <a:off x="4370832" y="2258568"/>
+            <a:off x="5803392" y="2258568"/>
             <a:ext cx="1828800" cy="292608"/>
           </a:xfrm>
           <a:prstGeom prst="rect">
@@ -24164,13 +24137,13 @@
             <a:r>
               <a:rPr lang="en-US" sz="1300" b="1" dirty="0">
                 <a:solidFill>
-                  <a:srgbClr val="0F766E"/>
+                  <a:srgbClr val="9D174D"/>
                 </a:solidFill>
                 <a:latin typeface="Trebuchet MS" pitchFamily="34" charset="0"/>
                 <a:ea typeface="Trebuchet MS" pitchFamily="34" charset="-122"/>
                 <a:cs typeface="Trebuchet MS" pitchFamily="34" charset="-120"/>
               </a:rPr>
-              <a:t>govern</a:t>
+              <a:t>ment</a:t>
             </a:r>
             <a:endParaRPr lang="en-US" sz="1300" dirty="0"/>
           </a:p>
@@ -24184,7 +24157,7 @@
         </p:nvSpPr>
         <p:spPr>
           <a:xfrm>
-            <a:off x="4370832" y="2569464"/>
+            <a:off x="5803392" y="2569464"/>
             <a:ext cx="1828800" cy="201168"/>
           </a:xfrm>
           <a:prstGeom prst="rect">
@@ -24209,7 +24182,7 @@
                 <a:ea typeface="Calibri" pitchFamily="34" charset="-122"/>
                 <a:cs typeface="Calibri" pitchFamily="34" charset="-120"/>
               </a:rPr>
-              <a:t>to rule or control</a:t>
+              <a:t>result or system of an action</a:t>
             </a:r>
             <a:endParaRPr lang="en-US" sz="850" dirty="0"/>
           </a:p>
@@ -24223,30 +24196,23 @@
         </p:nvSpPr>
         <p:spPr>
           <a:xfrm>
-            <a:off x="6519672" y="2258568"/>
-            <a:ext cx="1828800" cy="292608"/>
+            <a:off x="365760" y="3273552"/>
+            <a:ext cx="1371600" cy="658368"/>
           </a:xfrm>
           <a:prstGeom prst="rect">
             <a:avLst>
-              <a:gd name="adj" fmla="val 25000"/>
+              <a:gd name="adj" fmla="val 8333"/>
             </a:avLst>
           </a:prstGeom>
           <a:solidFill>
-            <a:srgbClr val="FCE7F3"/>
-          </a:solidFill>
-          <a:ln w="19050">
-            <a:solidFill>
-              <a:srgbClr val="DB2777"/>
-            </a:solidFill>
-            <a:prstDash val="solid"/>
-          </a:ln>
-          <a:effectLst>
-            <a:outerShdw sx="100000" sy="100000" kx="0" ky="0" algn="bl" rotWithShape="0" blurRad="101600" dist="38100" dir="8100000">
-              <a:srgbClr val="000000">
-                <a:alpha val="12000"/>
-              </a:srgbClr>
-            </a:outerShdw>
-          </a:effectLst>
+            <a:srgbClr val="E2E8F0"/>
+          </a:solidFill>
+          <a:ln w="12700">
+            <a:solidFill>
+              <a:srgbClr val="E2E8F0"/>
+            </a:solidFill>
+            <a:prstDash val="solid"/>
+          </a:ln>
         </p:spPr>
       </p:sp>
       <p:sp>
@@ -24257,90 +24223,117 @@
         </p:nvSpPr>
         <p:spPr>
           <a:xfrm>
-            <a:off x="6519672" y="2258568"/>
-            <a:ext cx="1828800" cy="292608"/>
-          </a:xfrm>
-          <a:prstGeom prst="rect">
-            <a:avLst/>
-          </a:prstGeom>
-          <a:noFill/>
-          <a:ln/>
-        </p:spPr>
-        <p:txBody>
-          <a:bodyPr wrap="square" lIns="0" tIns="0" rIns="0" bIns="0" rtlCol="0" anchor="ctr"/>
-          <a:lstStyle/>
-          <a:p>
-            <a:pPr algn="ctr" indent="0" marL="0">
-              <a:buNone/>
-            </a:pPr>
-            <a:r>
-              <a:rPr lang="en-US" sz="1300" b="1" dirty="0">
-                <a:solidFill>
-                  <a:srgbClr val="9D174D"/>
+            <a:off x="365760" y="3273552"/>
+            <a:ext cx="1371600" cy="658368"/>
+          </a:xfrm>
+          <a:prstGeom prst="rect">
+            <a:avLst/>
+          </a:prstGeom>
+          <a:noFill/>
+          <a:ln/>
+        </p:spPr>
+        <p:txBody>
+          <a:bodyPr wrap="square" lIns="0" tIns="0" rIns="0" bIns="0" rtlCol="0" anchor="ctr"/>
+          <a:lstStyle/>
+          <a:p>
+            <a:pPr algn="ctr" indent="0" marL="0">
+              <a:buNone/>
+            </a:pPr>
+            <a:r>
+              <a:rPr lang="en-US" sz="1100" b="1" dirty="0">
+                <a:solidFill>
+                  <a:srgbClr val="475569"/>
                 </a:solidFill>
                 <a:latin typeface="Trebuchet MS" pitchFamily="34" charset="0"/>
                 <a:ea typeface="Trebuchet MS" pitchFamily="34" charset="-122"/>
                 <a:cs typeface="Trebuchet MS" pitchFamily="34" charset="-120"/>
               </a:rPr>
-              <a:t>ment</a:t>
-            </a:r>
-            <a:endParaRPr lang="en-US" sz="1300" dirty="0"/>
-          </a:p>
-        </p:txBody>
-      </p:sp>
-      <p:sp>
-        <p:nvSpPr>
-          <p:cNvPr id="24" name="Text 22"/>
-          <p:cNvSpPr/>
-          <p:nvPr/>
-        </p:nvSpPr>
-        <p:spPr>
-          <a:xfrm>
-            <a:off x="6519672" y="2569464"/>
-            <a:ext cx="1828800" cy="201168"/>
-          </a:xfrm>
-          <a:prstGeom prst="rect">
-            <a:avLst/>
-          </a:prstGeom>
-          <a:noFill/>
-          <a:ln/>
-        </p:spPr>
-        <p:txBody>
-          <a:bodyPr wrap="square" lIns="0" tIns="0" rIns="0" bIns="0" rtlCol="0" anchor="t"/>
-          <a:lstStyle/>
-          <a:p>
-            <a:pPr algn="ctr" indent="0" marL="0">
-              <a:buNone/>
-            </a:pPr>
-            <a:r>
-              <a:rPr lang="en-US" sz="850" dirty="0">
-                <a:solidFill>
-                  <a:srgbClr val="475569"/>
+              <a:t>Syllables</a:t>
+            </a:r>
+            <a:endParaRPr lang="en-US" sz="1100" dirty="0"/>
+          </a:p>
+        </p:txBody>
+      </p:sp>
+      <p:sp>
+        <p:nvSpPr>
+          <p:cNvPr id="24" name="Shape 22"/>
+          <p:cNvSpPr/>
+          <p:nvPr/>
+        </p:nvSpPr>
+        <p:spPr>
+          <a:xfrm>
+            <a:off x="1874520" y="3273552"/>
+            <a:ext cx="6903720" cy="658368"/>
+          </a:xfrm>
+          <a:prstGeom prst="rect">
+            <a:avLst>
+              <a:gd name="adj" fmla="val 8333"/>
+            </a:avLst>
+          </a:prstGeom>
+          <a:solidFill>
+            <a:srgbClr val="F8FAFC"/>
+          </a:solidFill>
+          <a:ln w="12700">
+            <a:solidFill>
+              <a:srgbClr val="E2E8F0"/>
+            </a:solidFill>
+            <a:prstDash val="dash"/>
+          </a:ln>
+        </p:spPr>
+      </p:sp>
+      <p:sp>
+        <p:nvSpPr>
+          <p:cNvPr id="25" name="Text 23"/>
+          <p:cNvSpPr/>
+          <p:nvPr/>
+        </p:nvSpPr>
+        <p:spPr>
+          <a:xfrm>
+            <a:off x="1874520" y="3273552"/>
+            <a:ext cx="6903720" cy="658368"/>
+          </a:xfrm>
+          <a:prstGeom prst="rect">
+            <a:avLst/>
+          </a:prstGeom>
+          <a:noFill/>
+          <a:ln/>
+        </p:spPr>
+        <p:txBody>
+          <a:bodyPr wrap="square" rtlCol="0" anchor="ctr"/>
+          <a:lstStyle/>
+          <a:p>
+            <a:pPr algn="ctr" indent="0" marL="0">
+              <a:buNone/>
+            </a:pPr>
+            <a:r>
+              <a:rPr lang="en-US" sz="1100" i="1" dirty="0">
+                <a:solidFill>
+                  <a:srgbClr val="CBD5E1"/>
                 </a:solidFill>
                 <a:latin typeface="Calibri" pitchFamily="34" charset="0"/>
                 <a:ea typeface="Calibri" pitchFamily="34" charset="-122"/>
                 <a:cs typeface="Calibri" pitchFamily="34" charset="-120"/>
               </a:rPr>
-              <a:t>result or state of</a:t>
-            </a:r>
-            <a:endParaRPr lang="en-US" sz="850" dirty="0"/>
-          </a:p>
-        </p:txBody>
-      </p:sp>
-      <p:sp>
-        <p:nvSpPr>
-          <p:cNvPr id="25" name="Shape 23"/>
-          <p:cNvSpPr/>
-          <p:nvPr/>
-        </p:nvSpPr>
-        <p:spPr>
-          <a:xfrm>
-            <a:off x="365760" y="3273552"/>
-            <a:ext cx="1371600" cy="658368"/>
+              <a:t>Write here...</a:t>
+            </a:r>
+            <a:endParaRPr lang="en-US" sz="1100" dirty="0"/>
+          </a:p>
+        </p:txBody>
+      </p:sp>
+      <p:sp>
+        <p:nvSpPr>
+          <p:cNvPr id="26" name="Shape 24"/>
+          <p:cNvSpPr/>
+          <p:nvPr/>
+        </p:nvSpPr>
+        <p:spPr>
+          <a:xfrm>
+            <a:off x="365760" y="4096512"/>
+            <a:ext cx="1371600" cy="804672"/>
           </a:xfrm>
           <a:prstGeom prst="rect">
             <a:avLst>
-              <a:gd name="adj" fmla="val 8333"/>
+              <a:gd name="adj" fmla="val 6818"/>
             </a:avLst>
           </a:prstGeom>
           <a:solidFill>
@@ -24356,14 +24349,14 @@
       </p:sp>
       <p:sp>
         <p:nvSpPr>
-          <p:cNvPr id="26" name="Text 24"/>
-          <p:cNvSpPr/>
-          <p:nvPr/>
-        </p:nvSpPr>
-        <p:spPr>
-          <a:xfrm>
-            <a:off x="365760" y="3273552"/>
-            <a:ext cx="1371600" cy="658368"/>
+          <p:cNvPr id="27" name="Text 25"/>
+          <p:cNvSpPr/>
+          <p:nvPr/>
+        </p:nvSpPr>
+        <p:spPr>
+          <a:xfrm>
+            <a:off x="365760" y="4096512"/>
+            <a:ext cx="1371600" cy="804672"/>
           </a:xfrm>
           <a:prstGeom prst="rect">
             <a:avLst/>
@@ -24387,7 +24380,7 @@
                 <a:ea typeface="Trebuchet MS" pitchFamily="34" charset="-122"/>
                 <a:cs typeface="Trebuchet MS" pitchFamily="34" charset="-120"/>
               </a:rPr>
-              <a:t>Syllables</a:t>
+              <a:t>Phonemes</a:t>
             </a:r>
             <a:endParaRPr lang="en-US" sz="1100" dirty="0"/>
           </a:p>
@@ -24395,80 +24388,14 @@
       </p:sp>
       <p:sp>
         <p:nvSpPr>
-          <p:cNvPr id="27" name="Shape 25"/>
-          <p:cNvSpPr/>
-          <p:nvPr/>
-        </p:nvSpPr>
-        <p:spPr>
-          <a:xfrm>
-            <a:off x="1874520" y="3273552"/>
-            <a:ext cx="6903720" cy="658368"/>
-          </a:xfrm>
-          <a:prstGeom prst="rect">
-            <a:avLst>
-              <a:gd name="adj" fmla="val 8333"/>
-            </a:avLst>
-          </a:prstGeom>
-          <a:solidFill>
-            <a:srgbClr val="F8FAFC"/>
-          </a:solidFill>
-          <a:ln w="12700">
-            <a:solidFill>
-              <a:srgbClr val="E2E8F0"/>
-            </a:solidFill>
-            <a:prstDash val="dash"/>
-          </a:ln>
-        </p:spPr>
-      </p:sp>
-      <p:sp>
-        <p:nvSpPr>
-          <p:cNvPr id="28" name="Text 26"/>
-          <p:cNvSpPr/>
-          <p:nvPr/>
-        </p:nvSpPr>
-        <p:spPr>
-          <a:xfrm>
-            <a:off x="1874520" y="3273552"/>
-            <a:ext cx="6903720" cy="658368"/>
-          </a:xfrm>
-          <a:prstGeom prst="rect">
-            <a:avLst/>
-          </a:prstGeom>
-          <a:noFill/>
-          <a:ln/>
-        </p:spPr>
-        <p:txBody>
-          <a:bodyPr wrap="square" rtlCol="0" anchor="ctr"/>
-          <a:lstStyle/>
-          <a:p>
-            <a:pPr algn="ctr" indent="0" marL="0">
-              <a:buNone/>
-            </a:pPr>
-            <a:r>
-              <a:rPr lang="en-US" sz="1100" i="1" dirty="0">
-                <a:solidFill>
-                  <a:srgbClr val="CBD5E1"/>
-                </a:solidFill>
-                <a:latin typeface="Calibri" pitchFamily="34" charset="0"/>
-                <a:ea typeface="Calibri" pitchFamily="34" charset="-122"/>
-                <a:cs typeface="Calibri" pitchFamily="34" charset="-120"/>
-              </a:rPr>
-              <a:t>Write here...</a:t>
-            </a:r>
-            <a:endParaRPr lang="en-US" sz="1100" dirty="0"/>
-          </a:p>
-        </p:txBody>
-      </p:sp>
-      <p:sp>
-        <p:nvSpPr>
-          <p:cNvPr id="29" name="Shape 27"/>
-          <p:cNvSpPr/>
-          <p:nvPr/>
-        </p:nvSpPr>
-        <p:spPr>
-          <a:xfrm>
-            <a:off x="365760" y="4096512"/>
-            <a:ext cx="1371600" cy="804672"/>
+          <p:cNvPr id="28" name="Shape 26"/>
+          <p:cNvSpPr/>
+          <p:nvPr/>
+        </p:nvSpPr>
+        <p:spPr>
+          <a:xfrm>
+            <a:off x="1874520" y="4096512"/>
+            <a:ext cx="6903720" cy="804672"/>
           </a:xfrm>
           <a:prstGeom prst="rect">
             <a:avLst>
@@ -24476,85 +24403,19 @@
             </a:avLst>
           </a:prstGeom>
           <a:solidFill>
-            <a:srgbClr val="E2E8F0"/>
+            <a:srgbClr val="F8FAFC"/>
           </a:solidFill>
           <a:ln w="12700">
             <a:solidFill>
               <a:srgbClr val="E2E8F0"/>
             </a:solidFill>
-            <a:prstDash val="solid"/>
-          </a:ln>
-        </p:spPr>
-      </p:sp>
-      <p:sp>
-        <p:nvSpPr>
-          <p:cNvPr id="30" name="Text 28"/>
-          <p:cNvSpPr/>
-          <p:nvPr/>
-        </p:nvSpPr>
-        <p:spPr>
-          <a:xfrm>
-            <a:off x="365760" y="4096512"/>
-            <a:ext cx="1371600" cy="804672"/>
-          </a:xfrm>
-          <a:prstGeom prst="rect">
-            <a:avLst/>
-          </a:prstGeom>
-          <a:noFill/>
-          <a:ln/>
-        </p:spPr>
-        <p:txBody>
-          <a:bodyPr wrap="square" lIns="0" tIns="0" rIns="0" bIns="0" rtlCol="0" anchor="ctr"/>
-          <a:lstStyle/>
-          <a:p>
-            <a:pPr algn="ctr" indent="0" marL="0">
-              <a:buNone/>
-            </a:pPr>
-            <a:r>
-              <a:rPr lang="en-US" sz="1100" b="1" dirty="0">
-                <a:solidFill>
-                  <a:srgbClr val="475569"/>
-                </a:solidFill>
-                <a:latin typeface="Trebuchet MS" pitchFamily="34" charset="0"/>
-                <a:ea typeface="Trebuchet MS" pitchFamily="34" charset="-122"/>
-                <a:cs typeface="Trebuchet MS" pitchFamily="34" charset="-120"/>
-              </a:rPr>
-              <a:t>Phonemes</a:t>
-            </a:r>
-            <a:endParaRPr lang="en-US" sz="1100" dirty="0"/>
-          </a:p>
-        </p:txBody>
-      </p:sp>
-      <p:sp>
-        <p:nvSpPr>
-          <p:cNvPr id="31" name="Shape 29"/>
-          <p:cNvSpPr/>
-          <p:nvPr/>
-        </p:nvSpPr>
-        <p:spPr>
-          <a:xfrm>
-            <a:off x="1874520" y="4096512"/>
-            <a:ext cx="6903720" cy="804672"/>
-          </a:xfrm>
-          <a:prstGeom prst="rect">
-            <a:avLst>
-              <a:gd name="adj" fmla="val 6818"/>
-            </a:avLst>
-          </a:prstGeom>
-          <a:solidFill>
-            <a:srgbClr val="F8FAFC"/>
-          </a:solidFill>
-          <a:ln w="12700">
-            <a:solidFill>
-              <a:srgbClr val="E2E8F0"/>
-            </a:solidFill>
             <a:prstDash val="dash"/>
           </a:ln>
         </p:spPr>
       </p:sp>
       <p:sp>
         <p:nvSpPr>
-          <p:cNvPr id="32" name="Text 30"/>
+          <p:cNvPr id="29" name="Text 27"/>
           <p:cNvSpPr/>
           <p:nvPr/>
         </p:nvSpPr>
@@ -25735,7 +25596,7 @@
                 <a:ea typeface="Trebuchet MS" pitchFamily="34" charset="-122"/>
                 <a:cs typeface="Trebuchet MS" pitchFamily="34" charset="-120"/>
               </a:rPr>
-              <a:t>misgovernment</a:t>
+              <a:t>government</a:t>
             </a:r>
             <a:endParaRPr lang="en-US" sz="2800" dirty="0"/>
           </a:p>
@@ -25815,7 +25676,7 @@
         </p:nvSpPr>
         <p:spPr>
           <a:xfrm>
-            <a:off x="2221992" y="2258568"/>
+            <a:off x="2938272" y="2258568"/>
             <a:ext cx="1828800" cy="292608"/>
           </a:xfrm>
           <a:prstGeom prst="rect">
@@ -25824,11 +25685,11 @@
             </a:avLst>
           </a:prstGeom>
           <a:solidFill>
-            <a:srgbClr val="DDD6FE"/>
+            <a:srgbClr val="CCFBF1"/>
           </a:solidFill>
           <a:ln w="19050">
             <a:solidFill>
-              <a:srgbClr val="7C3AED"/>
+              <a:srgbClr val="0D9488"/>
             </a:solidFill>
             <a:prstDash val="solid"/>
           </a:ln>
@@ -25849,7 +25710,7 @@
         </p:nvSpPr>
         <p:spPr>
           <a:xfrm>
-            <a:off x="2221992" y="2258568"/>
+            <a:off x="2938272" y="2258568"/>
             <a:ext cx="1828800" cy="292608"/>
           </a:xfrm>
           <a:prstGeom prst="rect">
@@ -25868,13 +25729,13 @@
             <a:r>
               <a:rPr lang="en-US" sz="1300" b="1" dirty="0">
                 <a:solidFill>
-                  <a:srgbClr val="4C1D95"/>
+                  <a:srgbClr val="0F766E"/>
                 </a:solidFill>
                 <a:latin typeface="Trebuchet MS" pitchFamily="34" charset="0"/>
                 <a:ea typeface="Trebuchet MS" pitchFamily="34" charset="-122"/>
                 <a:cs typeface="Trebuchet MS" pitchFamily="34" charset="-120"/>
               </a:rPr>
-              <a:t>mis</a:t>
+              <a:t>govern</a:t>
             </a:r>
             <a:endParaRPr lang="en-US" sz="1300" dirty="0"/>
           </a:p>
@@ -25888,7 +25749,7 @@
         </p:nvSpPr>
         <p:spPr>
           <a:xfrm>
-            <a:off x="2221992" y="2569464"/>
+            <a:off x="2938272" y="2569464"/>
             <a:ext cx="1828800" cy="201168"/>
           </a:xfrm>
           <a:prstGeom prst="rect">
@@ -25913,7 +25774,7 @@
                 <a:ea typeface="Calibri" pitchFamily="34" charset="-122"/>
                 <a:cs typeface="Calibri" pitchFamily="34" charset="-120"/>
               </a:rPr>
-              <a:t>badly or wrongly</a:t>
+              <a:t>to rule or control</a:t>
             </a:r>
             <a:endParaRPr lang="en-US" sz="850" dirty="0"/>
           </a:p>
@@ -25927,7 +25788,7 @@
         </p:nvSpPr>
         <p:spPr>
           <a:xfrm>
-            <a:off x="4370832" y="2258568"/>
+            <a:off x="5803392" y="2258568"/>
             <a:ext cx="1828800" cy="292608"/>
           </a:xfrm>
           <a:prstGeom prst="rect">
@@ -25936,11 +25797,11 @@
             </a:avLst>
           </a:prstGeom>
           <a:solidFill>
-            <a:srgbClr val="CCFBF1"/>
+            <a:srgbClr val="FCE7F3"/>
           </a:solidFill>
           <a:ln w="19050">
             <a:solidFill>
-              <a:srgbClr val="0D9488"/>
+              <a:srgbClr val="DB2777"/>
             </a:solidFill>
             <a:prstDash val="solid"/>
           </a:ln>
@@ -25961,7 +25822,7 @@
         </p:nvSpPr>
         <p:spPr>
           <a:xfrm>
-            <a:off x="4370832" y="2258568"/>
+            <a:off x="5803392" y="2258568"/>
             <a:ext cx="1828800" cy="292608"/>
           </a:xfrm>
           <a:prstGeom prst="rect">
@@ -25980,13 +25841,13 @@
             <a:r>
               <a:rPr lang="en-US" sz="1300" b="1" dirty="0">
                 <a:solidFill>
-                  <a:srgbClr val="0F766E"/>
+                  <a:srgbClr val="9D174D"/>
                 </a:solidFill>
                 <a:latin typeface="Trebuchet MS" pitchFamily="34" charset="0"/>
                 <a:ea typeface="Trebuchet MS" pitchFamily="34" charset="-122"/>
                 <a:cs typeface="Trebuchet MS" pitchFamily="34" charset="-120"/>
               </a:rPr>
-              <a:t>govern</a:t>
+              <a:t>ment</a:t>
             </a:r>
             <a:endParaRPr lang="en-US" sz="1300" dirty="0"/>
           </a:p>
@@ -26000,7 +25861,7 @@
         </p:nvSpPr>
         <p:spPr>
           <a:xfrm>
-            <a:off x="4370832" y="2569464"/>
+            <a:off x="5803392" y="2569464"/>
             <a:ext cx="1828800" cy="201168"/>
           </a:xfrm>
           <a:prstGeom prst="rect">
@@ -26025,7 +25886,7 @@
                 <a:ea typeface="Calibri" pitchFamily="34" charset="-122"/>
                 <a:cs typeface="Calibri" pitchFamily="34" charset="-120"/>
               </a:rPr>
-              <a:t>to rule or control</a:t>
+              <a:t>result or system of an action</a:t>
             </a:r>
             <a:endParaRPr lang="en-US" sz="850" dirty="0"/>
           </a:p>
@@ -26039,30 +25900,23 @@
         </p:nvSpPr>
         <p:spPr>
           <a:xfrm>
-            <a:off x="6519672" y="2258568"/>
-            <a:ext cx="1828800" cy="292608"/>
+            <a:off x="365760" y="3273552"/>
+            <a:ext cx="1371600" cy="658368"/>
           </a:xfrm>
           <a:prstGeom prst="rect">
             <a:avLst>
-              <a:gd name="adj" fmla="val 25000"/>
+              <a:gd name="adj" fmla="val 8333"/>
             </a:avLst>
           </a:prstGeom>
           <a:solidFill>
-            <a:srgbClr val="FCE7F3"/>
-          </a:solidFill>
-          <a:ln w="19050">
-            <a:solidFill>
-              <a:srgbClr val="DB2777"/>
-            </a:solidFill>
-            <a:prstDash val="solid"/>
-          </a:ln>
-          <a:effectLst>
-            <a:outerShdw sx="100000" sy="100000" kx="0" ky="0" algn="bl" rotWithShape="0" blurRad="101600" dist="38100" dir="8100000">
-              <a:srgbClr val="000000">
-                <a:alpha val="12000"/>
-              </a:srgbClr>
-            </a:outerShdw>
-          </a:effectLst>
+            <a:srgbClr val="E2E8F0"/>
+          </a:solidFill>
+          <a:ln w="12700">
+            <a:solidFill>
+              <a:srgbClr val="E2E8F0"/>
+            </a:solidFill>
+            <a:prstDash val="solid"/>
+          </a:ln>
         </p:spPr>
       </p:sp>
       <p:sp>
@@ -26073,86 +25927,47 @@
         </p:nvSpPr>
         <p:spPr>
           <a:xfrm>
-            <a:off x="6519672" y="2258568"/>
-            <a:ext cx="1828800" cy="292608"/>
-          </a:xfrm>
-          <a:prstGeom prst="rect">
-            <a:avLst/>
-          </a:prstGeom>
-          <a:noFill/>
-          <a:ln/>
-        </p:spPr>
-        <p:txBody>
-          <a:bodyPr wrap="square" lIns="0" tIns="0" rIns="0" bIns="0" rtlCol="0" anchor="ctr"/>
-          <a:lstStyle/>
-          <a:p>
-            <a:pPr algn="ctr" indent="0" marL="0">
-              <a:buNone/>
-            </a:pPr>
-            <a:r>
-              <a:rPr lang="en-US" sz="1300" b="1" dirty="0">
-                <a:solidFill>
-                  <a:srgbClr val="9D174D"/>
+            <a:off x="365760" y="3273552"/>
+            <a:ext cx="1371600" cy="658368"/>
+          </a:xfrm>
+          <a:prstGeom prst="rect">
+            <a:avLst/>
+          </a:prstGeom>
+          <a:noFill/>
+          <a:ln/>
+        </p:spPr>
+        <p:txBody>
+          <a:bodyPr wrap="square" lIns="0" tIns="0" rIns="0" bIns="0" rtlCol="0" anchor="ctr"/>
+          <a:lstStyle/>
+          <a:p>
+            <a:pPr algn="ctr" indent="0" marL="0">
+              <a:buNone/>
+            </a:pPr>
+            <a:r>
+              <a:rPr lang="en-US" sz="1100" b="1" dirty="0">
+                <a:solidFill>
+                  <a:srgbClr val="475569"/>
                 </a:solidFill>
                 <a:latin typeface="Trebuchet MS" pitchFamily="34" charset="0"/>
                 <a:ea typeface="Trebuchet MS" pitchFamily="34" charset="-122"/>
                 <a:cs typeface="Trebuchet MS" pitchFamily="34" charset="-120"/>
               </a:rPr>
-              <a:t>ment</a:t>
-            </a:r>
-            <a:endParaRPr lang="en-US" sz="1300" dirty="0"/>
-          </a:p>
-        </p:txBody>
-      </p:sp>
-      <p:sp>
-        <p:nvSpPr>
-          <p:cNvPr id="24" name="Text 22"/>
-          <p:cNvSpPr/>
-          <p:nvPr/>
-        </p:nvSpPr>
-        <p:spPr>
-          <a:xfrm>
-            <a:off x="6519672" y="2569464"/>
-            <a:ext cx="1828800" cy="201168"/>
-          </a:xfrm>
-          <a:prstGeom prst="rect">
-            <a:avLst/>
-          </a:prstGeom>
-          <a:noFill/>
-          <a:ln/>
-        </p:spPr>
-        <p:txBody>
-          <a:bodyPr wrap="square" lIns="0" tIns="0" rIns="0" bIns="0" rtlCol="0" anchor="t"/>
-          <a:lstStyle/>
-          <a:p>
-            <a:pPr algn="ctr" indent="0" marL="0">
-              <a:buNone/>
-            </a:pPr>
-            <a:r>
-              <a:rPr lang="en-US" sz="850" dirty="0">
-                <a:solidFill>
-                  <a:srgbClr val="475569"/>
-                </a:solidFill>
-                <a:latin typeface="Calibri" pitchFamily="34" charset="0"/>
-                <a:ea typeface="Calibri" pitchFamily="34" charset="-122"/>
-                <a:cs typeface="Calibri" pitchFamily="34" charset="-120"/>
-              </a:rPr>
-              <a:t>result or state of</a:t>
-            </a:r>
-            <a:endParaRPr lang="en-US" sz="850" dirty="0"/>
-          </a:p>
-        </p:txBody>
-      </p:sp>
-      <p:sp>
-        <p:nvSpPr>
-          <p:cNvPr id="25" name="Shape 23"/>
-          <p:cNvSpPr/>
-          <p:nvPr/>
-        </p:nvSpPr>
-        <p:spPr>
-          <a:xfrm>
-            <a:off x="365760" y="3273552"/>
-            <a:ext cx="1371600" cy="658368"/>
+              <a:t>Syllables</a:t>
+            </a:r>
+            <a:endParaRPr lang="en-US" sz="1100" dirty="0"/>
+          </a:p>
+        </p:txBody>
+      </p:sp>
+      <p:sp>
+        <p:nvSpPr>
+          <p:cNvPr id="24" name="Shape 22"/>
+          <p:cNvSpPr/>
+          <p:nvPr/>
+        </p:nvSpPr>
+        <p:spPr>
+          <a:xfrm>
+            <a:off x="1874520" y="3273552"/>
+            <a:ext cx="6903720" cy="658368"/>
           </a:xfrm>
           <a:prstGeom prst="rect">
             <a:avLst>
@@ -26160,11 +25975,38 @@
             </a:avLst>
           </a:prstGeom>
           <a:solidFill>
-            <a:srgbClr val="E2E8F0"/>
-          </a:solidFill>
-          <a:ln w="12700">
-            <a:solidFill>
-              <a:srgbClr val="E2E8F0"/>
+            <a:srgbClr val="CCFBF1"/>
+          </a:solidFill>
+          <a:ln w="12700">
+            <a:solidFill>
+              <a:srgbClr val="0D9488"/>
+            </a:solidFill>
+            <a:prstDash val="solid"/>
+          </a:ln>
+        </p:spPr>
+      </p:sp>
+      <p:sp>
+        <p:nvSpPr>
+          <p:cNvPr id="25" name="Shape 23"/>
+          <p:cNvSpPr/>
+          <p:nvPr/>
+        </p:nvSpPr>
+        <p:spPr>
+          <a:xfrm>
+            <a:off x="2313432" y="3364992"/>
+            <a:ext cx="1645920" cy="475488"/>
+          </a:xfrm>
+          <a:prstGeom prst="rect">
+            <a:avLst>
+              <a:gd name="adj" fmla="val 9615"/>
+            </a:avLst>
+          </a:prstGeom>
+          <a:solidFill>
+            <a:srgbClr val="FFFFFF"/>
+          </a:solidFill>
+          <a:ln w="12700">
+            <a:solidFill>
+              <a:srgbClr val="0D9488"/>
             </a:solidFill>
             <a:prstDash val="solid"/>
           </a:ln>
@@ -26178,63 +26020,75 @@
         </p:nvSpPr>
         <p:spPr>
           <a:xfrm>
-            <a:off x="365760" y="3273552"/>
-            <a:ext cx="1371600" cy="658368"/>
-          </a:xfrm>
-          <a:prstGeom prst="rect">
-            <a:avLst/>
-          </a:prstGeom>
-          <a:noFill/>
-          <a:ln/>
-        </p:spPr>
-        <p:txBody>
-          <a:bodyPr wrap="square" lIns="0" tIns="0" rIns="0" bIns="0" rtlCol="0" anchor="ctr"/>
-          <a:lstStyle/>
-          <a:p>
-            <a:pPr algn="ctr" indent="0" marL="0">
-              <a:buNone/>
-            </a:pPr>
-            <a:r>
-              <a:rPr lang="en-US" sz="1100" b="1" dirty="0">
-                <a:solidFill>
-                  <a:srgbClr val="475569"/>
+            <a:off x="2313432" y="3364992"/>
+            <a:ext cx="1645920" cy="475488"/>
+          </a:xfrm>
+          <a:prstGeom prst="rect">
+            <a:avLst/>
+          </a:prstGeom>
+          <a:noFill/>
+          <a:ln/>
+        </p:spPr>
+        <p:txBody>
+          <a:bodyPr wrap="square" lIns="0" tIns="0" rIns="0" bIns="0" rtlCol="0" anchor="ctr"/>
+          <a:lstStyle/>
+          <a:p>
+            <a:pPr algn="ctr" indent="0" marL="0">
+              <a:buNone/>
+            </a:pPr>
+            <a:r>
+              <a:rPr lang="en-US" sz="1400" b="1" dirty="0">
+                <a:solidFill>
+                  <a:srgbClr val="0D9488"/>
                 </a:solidFill>
                 <a:latin typeface="Trebuchet MS" pitchFamily="34" charset="0"/>
                 <a:ea typeface="Trebuchet MS" pitchFamily="34" charset="-122"/>
                 <a:cs typeface="Trebuchet MS" pitchFamily="34" charset="-120"/>
               </a:rPr>
-              <a:t>Syllables</a:t>
-            </a:r>
-            <a:endParaRPr lang="en-US" sz="1100" dirty="0"/>
-          </a:p>
-        </p:txBody>
-      </p:sp>
-      <p:sp>
-        <p:nvSpPr>
-          <p:cNvPr id="27" name="Shape 25"/>
-          <p:cNvSpPr/>
-          <p:nvPr/>
-        </p:nvSpPr>
-        <p:spPr>
-          <a:xfrm>
-            <a:off x="1874520" y="3273552"/>
-            <a:ext cx="6903720" cy="658368"/>
-          </a:xfrm>
-          <a:prstGeom prst="rect">
-            <a:avLst>
-              <a:gd name="adj" fmla="val 8333"/>
-            </a:avLst>
-          </a:prstGeom>
-          <a:solidFill>
-            <a:srgbClr val="CCFBF1"/>
-          </a:solidFill>
-          <a:ln w="12700">
-            <a:solidFill>
-              <a:srgbClr val="0D9488"/>
-            </a:solidFill>
-            <a:prstDash val="solid"/>
-          </a:ln>
-        </p:spPr>
+              <a:t>gov</a:t>
+            </a:r>
+            <a:endParaRPr lang="en-US" sz="1400" dirty="0"/>
+          </a:p>
+        </p:txBody>
+      </p:sp>
+      <p:sp>
+        <p:nvSpPr>
+          <p:cNvPr id="27" name="Text 25"/>
+          <p:cNvSpPr/>
+          <p:nvPr/>
+        </p:nvSpPr>
+        <p:spPr>
+          <a:xfrm>
+            <a:off x="3959352" y="3364992"/>
+            <a:ext cx="411480" cy="475488"/>
+          </a:xfrm>
+          <a:prstGeom prst="rect">
+            <a:avLst/>
+          </a:prstGeom>
+          <a:noFill/>
+          <a:ln/>
+        </p:spPr>
+        <p:txBody>
+          <a:bodyPr wrap="square" lIns="0" tIns="0" rIns="0" bIns="0" rtlCol="0" anchor="ctr"/>
+          <a:lstStyle/>
+          <a:p>
+            <a:pPr algn="ctr" indent="0" marL="0">
+              <a:buNone/>
+            </a:pPr>
+            <a:r>
+              <a:rPr lang="en-US" sz="1600" b="1" dirty="0">
+                <a:solidFill>
+                  <a:srgbClr val="0D9488"/>
+                </a:solidFill>
+                <a:latin typeface="Trebuchet MS" pitchFamily="34" charset="0"/>
+                <a:ea typeface="Trebuchet MS" pitchFamily="34" charset="-122"/>
+                <a:cs typeface="Trebuchet MS" pitchFamily="34" charset="-120"/>
+              </a:rPr>
+              <a:t>·</a:t>
+            </a:r>
+            <a:endParaRPr lang="en-US" sz="1600" dirty="0"/>
+          </a:p>
+        </p:txBody>
       </p:sp>
       <p:sp>
         <p:nvSpPr>
@@ -26244,8 +26098,8 @@
         </p:nvSpPr>
         <p:spPr>
           <a:xfrm>
-            <a:off x="1975104" y="3364992"/>
-            <a:ext cx="1554480" cy="475488"/>
+            <a:off x="4370832" y="3364992"/>
+            <a:ext cx="1645920" cy="475488"/>
           </a:xfrm>
           <a:prstGeom prst="rect">
             <a:avLst>
@@ -26271,8 +26125,8 @@
         </p:nvSpPr>
         <p:spPr>
           <a:xfrm>
-            <a:off x="1975104" y="3364992"/>
-            <a:ext cx="1554480" cy="475488"/>
+            <a:off x="4370832" y="3364992"/>
+            <a:ext cx="1645920" cy="475488"/>
           </a:xfrm>
           <a:prstGeom prst="rect">
             <a:avLst/>
@@ -26296,7 +26150,7 @@
                 <a:ea typeface="Trebuchet MS" pitchFamily="34" charset="-122"/>
                 <a:cs typeface="Trebuchet MS" pitchFamily="34" charset="-120"/>
               </a:rPr>
-              <a:t>mis</a:t>
+              <a:t>ern</a:t>
             </a:r>
             <a:endParaRPr lang="en-US" sz="1400" dirty="0"/>
           </a:p>
@@ -26310,8 +26164,8 @@
         </p:nvSpPr>
         <p:spPr>
           <a:xfrm>
-            <a:off x="3529584" y="3364992"/>
-            <a:ext cx="73152" cy="475488"/>
+            <a:off x="6016752" y="3364992"/>
+            <a:ext cx="411480" cy="475488"/>
           </a:xfrm>
           <a:prstGeom prst="rect">
             <a:avLst/>
@@ -26349,8 +26203,8 @@
         </p:nvSpPr>
         <p:spPr>
           <a:xfrm>
-            <a:off x="3602736" y="3364992"/>
-            <a:ext cx="1554480" cy="475488"/>
+            <a:off x="6428232" y="3364992"/>
+            <a:ext cx="1645920" cy="475488"/>
           </a:xfrm>
           <a:prstGeom prst="rect">
             <a:avLst>
@@ -26376,8 +26230,8 @@
         </p:nvSpPr>
         <p:spPr>
           <a:xfrm>
-            <a:off x="3602736" y="3364992"/>
-            <a:ext cx="1554480" cy="475488"/>
+            <a:off x="6428232" y="3364992"/>
+            <a:ext cx="1645920" cy="475488"/>
           </a:xfrm>
           <a:prstGeom prst="rect">
             <a:avLst/>
@@ -26401,7 +26255,7 @@
                 <a:ea typeface="Trebuchet MS" pitchFamily="34" charset="-122"/>
                 <a:cs typeface="Trebuchet MS" pitchFamily="34" charset="-120"/>
               </a:rPr>
-              <a:t>gov</a:t>
+              <a:t>ment</a:t>
             </a:r>
             <a:endParaRPr lang="en-US" sz="1400" dirty="0"/>
           </a:p>
@@ -26409,224 +26263,80 @@
       </p:sp>
       <p:sp>
         <p:nvSpPr>
-          <p:cNvPr id="33" name="Text 31"/>
-          <p:cNvSpPr/>
-          <p:nvPr/>
-        </p:nvSpPr>
-        <p:spPr>
-          <a:xfrm>
-            <a:off x="5157216" y="3364992"/>
-            <a:ext cx="73152" cy="475488"/>
-          </a:xfrm>
-          <a:prstGeom prst="rect">
-            <a:avLst/>
-          </a:prstGeom>
-          <a:noFill/>
-          <a:ln/>
-        </p:spPr>
-        <p:txBody>
-          <a:bodyPr wrap="square" lIns="0" tIns="0" rIns="0" bIns="0" rtlCol="0" anchor="ctr"/>
-          <a:lstStyle/>
-          <a:p>
-            <a:pPr algn="ctr" indent="0" marL="0">
-              <a:buNone/>
-            </a:pPr>
-            <a:r>
-              <a:rPr lang="en-US" sz="1600" b="1" dirty="0">
-                <a:solidFill>
-                  <a:srgbClr val="0D9488"/>
+          <p:cNvPr id="33" name="Shape 31"/>
+          <p:cNvSpPr/>
+          <p:nvPr/>
+        </p:nvSpPr>
+        <p:spPr>
+          <a:xfrm>
+            <a:off x="365760" y="4096512"/>
+            <a:ext cx="1371600" cy="804672"/>
+          </a:xfrm>
+          <a:prstGeom prst="rect">
+            <a:avLst>
+              <a:gd name="adj" fmla="val 6818"/>
+            </a:avLst>
+          </a:prstGeom>
+          <a:solidFill>
+            <a:srgbClr val="E2E8F0"/>
+          </a:solidFill>
+          <a:ln w="12700">
+            <a:solidFill>
+              <a:srgbClr val="E2E8F0"/>
+            </a:solidFill>
+            <a:prstDash val="solid"/>
+          </a:ln>
+        </p:spPr>
+      </p:sp>
+      <p:sp>
+        <p:nvSpPr>
+          <p:cNvPr id="34" name="Text 32"/>
+          <p:cNvSpPr/>
+          <p:nvPr/>
+        </p:nvSpPr>
+        <p:spPr>
+          <a:xfrm>
+            <a:off x="365760" y="4096512"/>
+            <a:ext cx="1371600" cy="804672"/>
+          </a:xfrm>
+          <a:prstGeom prst="rect">
+            <a:avLst/>
+          </a:prstGeom>
+          <a:noFill/>
+          <a:ln/>
+        </p:spPr>
+        <p:txBody>
+          <a:bodyPr wrap="square" lIns="0" tIns="0" rIns="0" bIns="0" rtlCol="0" anchor="ctr"/>
+          <a:lstStyle/>
+          <a:p>
+            <a:pPr algn="ctr" indent="0" marL="0">
+              <a:buNone/>
+            </a:pPr>
+            <a:r>
+              <a:rPr lang="en-US" sz="1100" b="1" dirty="0">
+                <a:solidFill>
+                  <a:srgbClr val="475569"/>
                 </a:solidFill>
                 <a:latin typeface="Trebuchet MS" pitchFamily="34" charset="0"/>
                 <a:ea typeface="Trebuchet MS" pitchFamily="34" charset="-122"/>
                 <a:cs typeface="Trebuchet MS" pitchFamily="34" charset="-120"/>
               </a:rPr>
-              <a:t>·</a:t>
-            </a:r>
-            <a:endParaRPr lang="en-US" sz="1600" dirty="0"/>
-          </a:p>
-        </p:txBody>
-      </p:sp>
-      <p:sp>
-        <p:nvSpPr>
-          <p:cNvPr id="34" name="Shape 32"/>
-          <p:cNvSpPr/>
-          <p:nvPr/>
-        </p:nvSpPr>
-        <p:spPr>
-          <a:xfrm>
-            <a:off x="5230368" y="3364992"/>
-            <a:ext cx="1554480" cy="475488"/>
-          </a:xfrm>
-          <a:prstGeom prst="rect">
-            <a:avLst>
-              <a:gd name="adj" fmla="val 9615"/>
-            </a:avLst>
-          </a:prstGeom>
-          <a:solidFill>
-            <a:srgbClr val="FFFFFF"/>
-          </a:solidFill>
-          <a:ln w="12700">
-            <a:solidFill>
-              <a:srgbClr val="0D9488"/>
-            </a:solidFill>
-            <a:prstDash val="solid"/>
-          </a:ln>
-        </p:spPr>
-      </p:sp>
-      <p:sp>
-        <p:nvSpPr>
-          <p:cNvPr id="35" name="Text 33"/>
-          <p:cNvSpPr/>
-          <p:nvPr/>
-        </p:nvSpPr>
-        <p:spPr>
-          <a:xfrm>
-            <a:off x="5230368" y="3364992"/>
-            <a:ext cx="1554480" cy="475488"/>
-          </a:xfrm>
-          <a:prstGeom prst="rect">
-            <a:avLst/>
-          </a:prstGeom>
-          <a:noFill/>
-          <a:ln/>
-        </p:spPr>
-        <p:txBody>
-          <a:bodyPr wrap="square" lIns="0" tIns="0" rIns="0" bIns="0" rtlCol="0" anchor="ctr"/>
-          <a:lstStyle/>
-          <a:p>
-            <a:pPr algn="ctr" indent="0" marL="0">
-              <a:buNone/>
-            </a:pPr>
-            <a:r>
-              <a:rPr lang="en-US" sz="1400" b="1" dirty="0">
-                <a:solidFill>
-                  <a:srgbClr val="0D9488"/>
-                </a:solidFill>
-                <a:latin typeface="Trebuchet MS" pitchFamily="34" charset="0"/>
-                <a:ea typeface="Trebuchet MS" pitchFamily="34" charset="-122"/>
-                <a:cs typeface="Trebuchet MS" pitchFamily="34" charset="-120"/>
-              </a:rPr>
-              <a:t>ern</a:t>
-            </a:r>
-            <a:endParaRPr lang="en-US" sz="1400" dirty="0"/>
-          </a:p>
-        </p:txBody>
-      </p:sp>
-      <p:sp>
-        <p:nvSpPr>
-          <p:cNvPr id="36" name="Text 34"/>
-          <p:cNvSpPr/>
-          <p:nvPr/>
-        </p:nvSpPr>
-        <p:spPr>
-          <a:xfrm>
-            <a:off x="6784848" y="3364992"/>
-            <a:ext cx="73152" cy="475488"/>
-          </a:xfrm>
-          <a:prstGeom prst="rect">
-            <a:avLst/>
-          </a:prstGeom>
-          <a:noFill/>
-          <a:ln/>
-        </p:spPr>
-        <p:txBody>
-          <a:bodyPr wrap="square" lIns="0" tIns="0" rIns="0" bIns="0" rtlCol="0" anchor="ctr"/>
-          <a:lstStyle/>
-          <a:p>
-            <a:pPr algn="ctr" indent="0" marL="0">
-              <a:buNone/>
-            </a:pPr>
-            <a:r>
-              <a:rPr lang="en-US" sz="1600" b="1" dirty="0">
-                <a:solidFill>
-                  <a:srgbClr val="0D9488"/>
-                </a:solidFill>
-                <a:latin typeface="Trebuchet MS" pitchFamily="34" charset="0"/>
-                <a:ea typeface="Trebuchet MS" pitchFamily="34" charset="-122"/>
-                <a:cs typeface="Trebuchet MS" pitchFamily="34" charset="-120"/>
-              </a:rPr>
-              <a:t>·</a:t>
-            </a:r>
-            <a:endParaRPr lang="en-US" sz="1600" dirty="0"/>
-          </a:p>
-        </p:txBody>
-      </p:sp>
-      <p:sp>
-        <p:nvSpPr>
-          <p:cNvPr id="37" name="Shape 35"/>
-          <p:cNvSpPr/>
-          <p:nvPr/>
-        </p:nvSpPr>
-        <p:spPr>
-          <a:xfrm>
-            <a:off x="6858000" y="3364992"/>
-            <a:ext cx="1554480" cy="475488"/>
-          </a:xfrm>
-          <a:prstGeom prst="rect">
-            <a:avLst>
-              <a:gd name="adj" fmla="val 9615"/>
-            </a:avLst>
-          </a:prstGeom>
-          <a:solidFill>
-            <a:srgbClr val="FFFFFF"/>
-          </a:solidFill>
-          <a:ln w="12700">
-            <a:solidFill>
-              <a:srgbClr val="0D9488"/>
-            </a:solidFill>
-            <a:prstDash val="solid"/>
-          </a:ln>
-        </p:spPr>
-      </p:sp>
-      <p:sp>
-        <p:nvSpPr>
-          <p:cNvPr id="38" name="Text 36"/>
-          <p:cNvSpPr/>
-          <p:nvPr/>
-        </p:nvSpPr>
-        <p:spPr>
-          <a:xfrm>
-            <a:off x="6858000" y="3364992"/>
-            <a:ext cx="1554480" cy="475488"/>
-          </a:xfrm>
-          <a:prstGeom prst="rect">
-            <a:avLst/>
-          </a:prstGeom>
-          <a:noFill/>
-          <a:ln/>
-        </p:spPr>
-        <p:txBody>
-          <a:bodyPr wrap="square" lIns="0" tIns="0" rIns="0" bIns="0" rtlCol="0" anchor="ctr"/>
-          <a:lstStyle/>
-          <a:p>
-            <a:pPr algn="ctr" indent="0" marL="0">
-              <a:buNone/>
-            </a:pPr>
-            <a:r>
-              <a:rPr lang="en-US" sz="1400" b="1" dirty="0">
-                <a:solidFill>
-                  <a:srgbClr val="0D9488"/>
-                </a:solidFill>
-                <a:latin typeface="Trebuchet MS" pitchFamily="34" charset="0"/>
-                <a:ea typeface="Trebuchet MS" pitchFamily="34" charset="-122"/>
-                <a:cs typeface="Trebuchet MS" pitchFamily="34" charset="-120"/>
-              </a:rPr>
-              <a:t>ment</a:t>
-            </a:r>
-            <a:endParaRPr lang="en-US" sz="1400" dirty="0"/>
-          </a:p>
-        </p:txBody>
-      </p:sp>
-      <p:sp>
-        <p:nvSpPr>
-          <p:cNvPr id="39" name="Shape 37"/>
-          <p:cNvSpPr/>
-          <p:nvPr/>
-        </p:nvSpPr>
-        <p:spPr>
-          <a:xfrm>
-            <a:off x="365760" y="4096512"/>
-            <a:ext cx="1371600" cy="804672"/>
+              <a:t>Phonemes</a:t>
+            </a:r>
+            <a:endParaRPr lang="en-US" sz="1100" dirty="0"/>
+          </a:p>
+        </p:txBody>
+      </p:sp>
+      <p:sp>
+        <p:nvSpPr>
+          <p:cNvPr id="35" name="Shape 33"/>
+          <p:cNvSpPr/>
+          <p:nvPr/>
+        </p:nvSpPr>
+        <p:spPr>
+          <a:xfrm>
+            <a:off x="1874520" y="4096512"/>
+            <a:ext cx="6903720" cy="804672"/>
           </a:xfrm>
           <a:prstGeom prst="rect">
             <a:avLst>
@@ -26634,85 +26344,19 @@
             </a:avLst>
           </a:prstGeom>
           <a:solidFill>
-            <a:srgbClr val="E2E8F0"/>
+            <a:srgbClr val="F8FAFC"/>
           </a:solidFill>
           <a:ln w="12700">
             <a:solidFill>
               <a:srgbClr val="E2E8F0"/>
             </a:solidFill>
-            <a:prstDash val="solid"/>
-          </a:ln>
-        </p:spPr>
-      </p:sp>
-      <p:sp>
-        <p:nvSpPr>
-          <p:cNvPr id="40" name="Text 38"/>
-          <p:cNvSpPr/>
-          <p:nvPr/>
-        </p:nvSpPr>
-        <p:spPr>
-          <a:xfrm>
-            <a:off x="365760" y="4096512"/>
-            <a:ext cx="1371600" cy="804672"/>
-          </a:xfrm>
-          <a:prstGeom prst="rect">
-            <a:avLst/>
-          </a:prstGeom>
-          <a:noFill/>
-          <a:ln/>
-        </p:spPr>
-        <p:txBody>
-          <a:bodyPr wrap="square" lIns="0" tIns="0" rIns="0" bIns="0" rtlCol="0" anchor="ctr"/>
-          <a:lstStyle/>
-          <a:p>
-            <a:pPr algn="ctr" indent="0" marL="0">
-              <a:buNone/>
-            </a:pPr>
-            <a:r>
-              <a:rPr lang="en-US" sz="1100" b="1" dirty="0">
-                <a:solidFill>
-                  <a:srgbClr val="475569"/>
-                </a:solidFill>
-                <a:latin typeface="Trebuchet MS" pitchFamily="34" charset="0"/>
-                <a:ea typeface="Trebuchet MS" pitchFamily="34" charset="-122"/>
-                <a:cs typeface="Trebuchet MS" pitchFamily="34" charset="-120"/>
-              </a:rPr>
-              <a:t>Phonemes</a:t>
-            </a:r>
-            <a:endParaRPr lang="en-US" sz="1100" dirty="0"/>
-          </a:p>
-        </p:txBody>
-      </p:sp>
-      <p:sp>
-        <p:nvSpPr>
-          <p:cNvPr id="41" name="Shape 39"/>
-          <p:cNvSpPr/>
-          <p:nvPr/>
-        </p:nvSpPr>
-        <p:spPr>
-          <a:xfrm>
-            <a:off x="1874520" y="4096512"/>
-            <a:ext cx="6903720" cy="804672"/>
-          </a:xfrm>
-          <a:prstGeom prst="rect">
-            <a:avLst>
-              <a:gd name="adj" fmla="val 6818"/>
-            </a:avLst>
-          </a:prstGeom>
-          <a:solidFill>
-            <a:srgbClr val="F8FAFC"/>
-          </a:solidFill>
-          <a:ln w="12700">
-            <a:solidFill>
-              <a:srgbClr val="E2E8F0"/>
-            </a:solidFill>
             <a:prstDash val="dash"/>
           </a:ln>
         </p:spPr>
       </p:sp>
       <p:sp>
         <p:nvSpPr>
-          <p:cNvPr id="42" name="Text 40"/>
+          <p:cNvPr id="36" name="Text 34"/>
           <p:cNvSpPr/>
           <p:nvPr/>
         </p:nvSpPr>
@@ -27174,7 +26818,7 @@
                 <a:ea typeface="Trebuchet MS" pitchFamily="34" charset="-122"/>
                 <a:cs typeface="Trebuchet MS" pitchFamily="34" charset="-120"/>
               </a:rPr>
-              <a:t>misgovernment</a:t>
+              <a:t>government</a:t>
             </a:r>
             <a:endParaRPr lang="en-US" sz="2800" dirty="0"/>
           </a:p>
@@ -27254,7 +26898,7 @@
         </p:nvSpPr>
         <p:spPr>
           <a:xfrm>
-            <a:off x="2221992" y="2258568"/>
+            <a:off x="2938272" y="2258568"/>
             <a:ext cx="1828800" cy="292608"/>
           </a:xfrm>
           <a:prstGeom prst="rect">
@@ -27263,11 +26907,11 @@
             </a:avLst>
           </a:prstGeom>
           <a:solidFill>
-            <a:srgbClr val="DDD6FE"/>
+            <a:srgbClr val="CCFBF1"/>
           </a:solidFill>
           <a:ln w="19050">
             <a:solidFill>
-              <a:srgbClr val="7C3AED"/>
+              <a:srgbClr val="0D9488"/>
             </a:solidFill>
             <a:prstDash val="solid"/>
           </a:ln>
@@ -27288,7 +26932,7 @@
         </p:nvSpPr>
         <p:spPr>
           <a:xfrm>
-            <a:off x="2221992" y="2258568"/>
+            <a:off x="2938272" y="2258568"/>
             <a:ext cx="1828800" cy="292608"/>
           </a:xfrm>
           <a:prstGeom prst="rect">
@@ -27307,13 +26951,13 @@
             <a:r>
               <a:rPr lang="en-US" sz="1300" b="1" dirty="0">
                 <a:solidFill>
-                  <a:srgbClr val="4C1D95"/>
+                  <a:srgbClr val="0F766E"/>
                 </a:solidFill>
                 <a:latin typeface="Trebuchet MS" pitchFamily="34" charset="0"/>
                 <a:ea typeface="Trebuchet MS" pitchFamily="34" charset="-122"/>
                 <a:cs typeface="Trebuchet MS" pitchFamily="34" charset="-120"/>
               </a:rPr>
-              <a:t>mis</a:t>
+              <a:t>govern</a:t>
             </a:r>
             <a:endParaRPr lang="en-US" sz="1300" dirty="0"/>
           </a:p>
@@ -27327,7 +26971,7 @@
         </p:nvSpPr>
         <p:spPr>
           <a:xfrm>
-            <a:off x="2221992" y="2569464"/>
+            <a:off x="2938272" y="2569464"/>
             <a:ext cx="1828800" cy="201168"/>
           </a:xfrm>
           <a:prstGeom prst="rect">
@@ -27352,7 +26996,7 @@
                 <a:ea typeface="Calibri" pitchFamily="34" charset="-122"/>
                 <a:cs typeface="Calibri" pitchFamily="34" charset="-120"/>
               </a:rPr>
-              <a:t>badly or wrongly</a:t>
+              <a:t>to rule or control</a:t>
             </a:r>
             <a:endParaRPr lang="en-US" sz="850" dirty="0"/>
           </a:p>
@@ -27366,7 +27010,7 @@
         </p:nvSpPr>
         <p:spPr>
           <a:xfrm>
-            <a:off x="4370832" y="2258568"/>
+            <a:off x="5803392" y="2258568"/>
             <a:ext cx="1828800" cy="292608"/>
           </a:xfrm>
           <a:prstGeom prst="rect">
@@ -27375,11 +27019,11 @@
             </a:avLst>
           </a:prstGeom>
           <a:solidFill>
-            <a:srgbClr val="CCFBF1"/>
+            <a:srgbClr val="FCE7F3"/>
           </a:solidFill>
           <a:ln w="19050">
             <a:solidFill>
-              <a:srgbClr val="0D9488"/>
+              <a:srgbClr val="DB2777"/>
             </a:solidFill>
             <a:prstDash val="solid"/>
           </a:ln>
@@ -27400,7 +27044,7 @@
         </p:nvSpPr>
         <p:spPr>
           <a:xfrm>
-            <a:off x="4370832" y="2258568"/>
+            <a:off x="5803392" y="2258568"/>
             <a:ext cx="1828800" cy="292608"/>
           </a:xfrm>
           <a:prstGeom prst="rect">
@@ -27419,13 +27063,13 @@
             <a:r>
               <a:rPr lang="en-US" sz="1300" b="1" dirty="0">
                 <a:solidFill>
-                  <a:srgbClr val="0F766E"/>
+                  <a:srgbClr val="9D174D"/>
                 </a:solidFill>
                 <a:latin typeface="Trebuchet MS" pitchFamily="34" charset="0"/>
                 <a:ea typeface="Trebuchet MS" pitchFamily="34" charset="-122"/>
                 <a:cs typeface="Trebuchet MS" pitchFamily="34" charset="-120"/>
               </a:rPr>
-              <a:t>govern</a:t>
+              <a:t>ment</a:t>
             </a:r>
             <a:endParaRPr lang="en-US" sz="1300" dirty="0"/>
           </a:p>
@@ -27439,7 +27083,7 @@
         </p:nvSpPr>
         <p:spPr>
           <a:xfrm>
-            <a:off x="4370832" y="2569464"/>
+            <a:off x="5803392" y="2569464"/>
             <a:ext cx="1828800" cy="201168"/>
           </a:xfrm>
           <a:prstGeom prst="rect">
@@ -27464,7 +27108,7 @@
                 <a:ea typeface="Calibri" pitchFamily="34" charset="-122"/>
                 <a:cs typeface="Calibri" pitchFamily="34" charset="-120"/>
               </a:rPr>
-              <a:t>to rule or control</a:t>
+              <a:t>result or system of an action</a:t>
             </a:r>
             <a:endParaRPr lang="en-US" sz="850" dirty="0"/>
           </a:p>
@@ -27478,30 +27122,23 @@
         </p:nvSpPr>
         <p:spPr>
           <a:xfrm>
-            <a:off x="6519672" y="2258568"/>
-            <a:ext cx="1828800" cy="292608"/>
+            <a:off x="365760" y="3273552"/>
+            <a:ext cx="1371600" cy="658368"/>
           </a:xfrm>
           <a:prstGeom prst="rect">
             <a:avLst>
-              <a:gd name="adj" fmla="val 25000"/>
+              <a:gd name="adj" fmla="val 8333"/>
             </a:avLst>
           </a:prstGeom>
           <a:solidFill>
-            <a:srgbClr val="FCE7F3"/>
-          </a:solidFill>
-          <a:ln w="19050">
-            <a:solidFill>
-              <a:srgbClr val="DB2777"/>
-            </a:solidFill>
-            <a:prstDash val="solid"/>
-          </a:ln>
-          <a:effectLst>
-            <a:outerShdw sx="100000" sy="100000" kx="0" ky="0" algn="bl" rotWithShape="0" blurRad="101600" dist="38100" dir="8100000">
-              <a:srgbClr val="000000">
-                <a:alpha val="12000"/>
-              </a:srgbClr>
-            </a:outerShdw>
-          </a:effectLst>
+            <a:srgbClr val="E2E8F0"/>
+          </a:solidFill>
+          <a:ln w="12700">
+            <a:solidFill>
+              <a:srgbClr val="E2E8F0"/>
+            </a:solidFill>
+            <a:prstDash val="solid"/>
+          </a:ln>
         </p:spPr>
       </p:sp>
       <p:sp>
@@ -27512,86 +27149,47 @@
         </p:nvSpPr>
         <p:spPr>
           <a:xfrm>
-            <a:off x="6519672" y="2258568"/>
-            <a:ext cx="1828800" cy="292608"/>
-          </a:xfrm>
-          <a:prstGeom prst="rect">
-            <a:avLst/>
-          </a:prstGeom>
-          <a:noFill/>
-          <a:ln/>
-        </p:spPr>
-        <p:txBody>
-          <a:bodyPr wrap="square" lIns="0" tIns="0" rIns="0" bIns="0" rtlCol="0" anchor="ctr"/>
-          <a:lstStyle/>
-          <a:p>
-            <a:pPr algn="ctr" indent="0" marL="0">
-              <a:buNone/>
-            </a:pPr>
-            <a:r>
-              <a:rPr lang="en-US" sz="1300" b="1" dirty="0">
-                <a:solidFill>
-                  <a:srgbClr val="9D174D"/>
+            <a:off x="365760" y="3273552"/>
+            <a:ext cx="1371600" cy="658368"/>
+          </a:xfrm>
+          <a:prstGeom prst="rect">
+            <a:avLst/>
+          </a:prstGeom>
+          <a:noFill/>
+          <a:ln/>
+        </p:spPr>
+        <p:txBody>
+          <a:bodyPr wrap="square" lIns="0" tIns="0" rIns="0" bIns="0" rtlCol="0" anchor="ctr"/>
+          <a:lstStyle/>
+          <a:p>
+            <a:pPr algn="ctr" indent="0" marL="0">
+              <a:buNone/>
+            </a:pPr>
+            <a:r>
+              <a:rPr lang="en-US" sz="1100" b="1" dirty="0">
+                <a:solidFill>
+                  <a:srgbClr val="475569"/>
                 </a:solidFill>
                 <a:latin typeface="Trebuchet MS" pitchFamily="34" charset="0"/>
                 <a:ea typeface="Trebuchet MS" pitchFamily="34" charset="-122"/>
                 <a:cs typeface="Trebuchet MS" pitchFamily="34" charset="-120"/>
               </a:rPr>
-              <a:t>ment</a:t>
-            </a:r>
-            <a:endParaRPr lang="en-US" sz="1300" dirty="0"/>
-          </a:p>
-        </p:txBody>
-      </p:sp>
-      <p:sp>
-        <p:nvSpPr>
-          <p:cNvPr id="24" name="Text 22"/>
-          <p:cNvSpPr/>
-          <p:nvPr/>
-        </p:nvSpPr>
-        <p:spPr>
-          <a:xfrm>
-            <a:off x="6519672" y="2569464"/>
-            <a:ext cx="1828800" cy="201168"/>
-          </a:xfrm>
-          <a:prstGeom prst="rect">
-            <a:avLst/>
-          </a:prstGeom>
-          <a:noFill/>
-          <a:ln/>
-        </p:spPr>
-        <p:txBody>
-          <a:bodyPr wrap="square" lIns="0" tIns="0" rIns="0" bIns="0" rtlCol="0" anchor="t"/>
-          <a:lstStyle/>
-          <a:p>
-            <a:pPr algn="ctr" indent="0" marL="0">
-              <a:buNone/>
-            </a:pPr>
-            <a:r>
-              <a:rPr lang="en-US" sz="850" dirty="0">
-                <a:solidFill>
-                  <a:srgbClr val="475569"/>
-                </a:solidFill>
-                <a:latin typeface="Calibri" pitchFamily="34" charset="0"/>
-                <a:ea typeface="Calibri" pitchFamily="34" charset="-122"/>
-                <a:cs typeface="Calibri" pitchFamily="34" charset="-120"/>
-              </a:rPr>
-              <a:t>result or state of</a:t>
-            </a:r>
-            <a:endParaRPr lang="en-US" sz="850" dirty="0"/>
-          </a:p>
-        </p:txBody>
-      </p:sp>
-      <p:sp>
-        <p:nvSpPr>
-          <p:cNvPr id="25" name="Shape 23"/>
-          <p:cNvSpPr/>
-          <p:nvPr/>
-        </p:nvSpPr>
-        <p:spPr>
-          <a:xfrm>
-            <a:off x="365760" y="3273552"/>
-            <a:ext cx="1371600" cy="658368"/>
+              <a:t>Syllables</a:t>
+            </a:r>
+            <a:endParaRPr lang="en-US" sz="1100" dirty="0"/>
+          </a:p>
+        </p:txBody>
+      </p:sp>
+      <p:sp>
+        <p:nvSpPr>
+          <p:cNvPr id="24" name="Shape 22"/>
+          <p:cNvSpPr/>
+          <p:nvPr/>
+        </p:nvSpPr>
+        <p:spPr>
+          <a:xfrm>
+            <a:off x="1874520" y="3273552"/>
+            <a:ext cx="6903720" cy="658368"/>
           </a:xfrm>
           <a:prstGeom prst="rect">
             <a:avLst>
@@ -27599,11 +27197,38 @@
             </a:avLst>
           </a:prstGeom>
           <a:solidFill>
-            <a:srgbClr val="E2E8F0"/>
-          </a:solidFill>
-          <a:ln w="12700">
-            <a:solidFill>
-              <a:srgbClr val="E2E8F0"/>
+            <a:srgbClr val="CCFBF1"/>
+          </a:solidFill>
+          <a:ln w="12700">
+            <a:solidFill>
+              <a:srgbClr val="0D9488"/>
+            </a:solidFill>
+            <a:prstDash val="solid"/>
+          </a:ln>
+        </p:spPr>
+      </p:sp>
+      <p:sp>
+        <p:nvSpPr>
+          <p:cNvPr id="25" name="Shape 23"/>
+          <p:cNvSpPr/>
+          <p:nvPr/>
+        </p:nvSpPr>
+        <p:spPr>
+          <a:xfrm>
+            <a:off x="2313432" y="3364992"/>
+            <a:ext cx="1645920" cy="475488"/>
+          </a:xfrm>
+          <a:prstGeom prst="rect">
+            <a:avLst>
+              <a:gd name="adj" fmla="val 9615"/>
+            </a:avLst>
+          </a:prstGeom>
+          <a:solidFill>
+            <a:srgbClr val="FFFFFF"/>
+          </a:solidFill>
+          <a:ln w="12700">
+            <a:solidFill>
+              <a:srgbClr val="0D9488"/>
             </a:solidFill>
             <a:prstDash val="solid"/>
           </a:ln>
@@ -27617,32 +27242,308 @@
         </p:nvSpPr>
         <p:spPr>
           <a:xfrm>
-            <a:off x="365760" y="3273552"/>
-            <a:ext cx="1371600" cy="658368"/>
-          </a:xfrm>
-          <a:prstGeom prst="rect">
-            <a:avLst/>
-          </a:prstGeom>
-          <a:noFill/>
-          <a:ln/>
-        </p:spPr>
-        <p:txBody>
-          <a:bodyPr wrap="square" lIns="0" tIns="0" rIns="0" bIns="0" rtlCol="0" anchor="ctr"/>
-          <a:lstStyle/>
-          <a:p>
-            <a:pPr algn="ctr" indent="0" marL="0">
-              <a:buNone/>
-            </a:pPr>
-            <a:r>
-              <a:rPr lang="en-US" sz="1100" b="1" dirty="0">
-                <a:solidFill>
-                  <a:srgbClr val="475569"/>
+            <a:off x="2313432" y="3364992"/>
+            <a:ext cx="1645920" cy="475488"/>
+          </a:xfrm>
+          <a:prstGeom prst="rect">
+            <a:avLst/>
+          </a:prstGeom>
+          <a:noFill/>
+          <a:ln/>
+        </p:spPr>
+        <p:txBody>
+          <a:bodyPr wrap="square" lIns="0" tIns="0" rIns="0" bIns="0" rtlCol="0" anchor="ctr"/>
+          <a:lstStyle/>
+          <a:p>
+            <a:pPr algn="ctr" indent="0" marL="0">
+              <a:buNone/>
+            </a:pPr>
+            <a:r>
+              <a:rPr lang="en-US" sz="1400" b="1" dirty="0">
+                <a:solidFill>
+                  <a:srgbClr val="0D9488"/>
                 </a:solidFill>
                 <a:latin typeface="Trebuchet MS" pitchFamily="34" charset="0"/>
                 <a:ea typeface="Trebuchet MS" pitchFamily="34" charset="-122"/>
                 <a:cs typeface="Trebuchet MS" pitchFamily="34" charset="-120"/>
               </a:rPr>
-              <a:t>Syllables</a:t>
+              <a:t>gov</a:t>
+            </a:r>
+            <a:endParaRPr lang="en-US" sz="1400" dirty="0"/>
+          </a:p>
+        </p:txBody>
+      </p:sp>
+      <p:sp>
+        <p:nvSpPr>
+          <p:cNvPr id="27" name="Text 25"/>
+          <p:cNvSpPr/>
+          <p:nvPr/>
+        </p:nvSpPr>
+        <p:spPr>
+          <a:xfrm>
+            <a:off x="3959352" y="3364992"/>
+            <a:ext cx="411480" cy="475488"/>
+          </a:xfrm>
+          <a:prstGeom prst="rect">
+            <a:avLst/>
+          </a:prstGeom>
+          <a:noFill/>
+          <a:ln/>
+        </p:spPr>
+        <p:txBody>
+          <a:bodyPr wrap="square" lIns="0" tIns="0" rIns="0" bIns="0" rtlCol="0" anchor="ctr"/>
+          <a:lstStyle/>
+          <a:p>
+            <a:pPr algn="ctr" indent="0" marL="0">
+              <a:buNone/>
+            </a:pPr>
+            <a:r>
+              <a:rPr lang="en-US" sz="1600" b="1" dirty="0">
+                <a:solidFill>
+                  <a:srgbClr val="0D9488"/>
+                </a:solidFill>
+                <a:latin typeface="Trebuchet MS" pitchFamily="34" charset="0"/>
+                <a:ea typeface="Trebuchet MS" pitchFamily="34" charset="-122"/>
+                <a:cs typeface="Trebuchet MS" pitchFamily="34" charset="-120"/>
+              </a:rPr>
+              <a:t>·</a:t>
+            </a:r>
+            <a:endParaRPr lang="en-US" sz="1600" dirty="0"/>
+          </a:p>
+        </p:txBody>
+      </p:sp>
+      <p:sp>
+        <p:nvSpPr>
+          <p:cNvPr id="28" name="Shape 26"/>
+          <p:cNvSpPr/>
+          <p:nvPr/>
+        </p:nvSpPr>
+        <p:spPr>
+          <a:xfrm>
+            <a:off x="4370832" y="3364992"/>
+            <a:ext cx="1645920" cy="475488"/>
+          </a:xfrm>
+          <a:prstGeom prst="rect">
+            <a:avLst>
+              <a:gd name="adj" fmla="val 9615"/>
+            </a:avLst>
+          </a:prstGeom>
+          <a:solidFill>
+            <a:srgbClr val="FFFFFF"/>
+          </a:solidFill>
+          <a:ln w="12700">
+            <a:solidFill>
+              <a:srgbClr val="0D9488"/>
+            </a:solidFill>
+            <a:prstDash val="solid"/>
+          </a:ln>
+        </p:spPr>
+      </p:sp>
+      <p:sp>
+        <p:nvSpPr>
+          <p:cNvPr id="29" name="Text 27"/>
+          <p:cNvSpPr/>
+          <p:nvPr/>
+        </p:nvSpPr>
+        <p:spPr>
+          <a:xfrm>
+            <a:off x="4370832" y="3364992"/>
+            <a:ext cx="1645920" cy="475488"/>
+          </a:xfrm>
+          <a:prstGeom prst="rect">
+            <a:avLst/>
+          </a:prstGeom>
+          <a:noFill/>
+          <a:ln/>
+        </p:spPr>
+        <p:txBody>
+          <a:bodyPr wrap="square" lIns="0" tIns="0" rIns="0" bIns="0" rtlCol="0" anchor="ctr"/>
+          <a:lstStyle/>
+          <a:p>
+            <a:pPr algn="ctr" indent="0" marL="0">
+              <a:buNone/>
+            </a:pPr>
+            <a:r>
+              <a:rPr lang="en-US" sz="1400" b="1" dirty="0">
+                <a:solidFill>
+                  <a:srgbClr val="0D9488"/>
+                </a:solidFill>
+                <a:latin typeface="Trebuchet MS" pitchFamily="34" charset="0"/>
+                <a:ea typeface="Trebuchet MS" pitchFamily="34" charset="-122"/>
+                <a:cs typeface="Trebuchet MS" pitchFamily="34" charset="-120"/>
+              </a:rPr>
+              <a:t>ern</a:t>
+            </a:r>
+            <a:endParaRPr lang="en-US" sz="1400" dirty="0"/>
+          </a:p>
+        </p:txBody>
+      </p:sp>
+      <p:sp>
+        <p:nvSpPr>
+          <p:cNvPr id="30" name="Text 28"/>
+          <p:cNvSpPr/>
+          <p:nvPr/>
+        </p:nvSpPr>
+        <p:spPr>
+          <a:xfrm>
+            <a:off x="6016752" y="3364992"/>
+            <a:ext cx="411480" cy="475488"/>
+          </a:xfrm>
+          <a:prstGeom prst="rect">
+            <a:avLst/>
+          </a:prstGeom>
+          <a:noFill/>
+          <a:ln/>
+        </p:spPr>
+        <p:txBody>
+          <a:bodyPr wrap="square" lIns="0" tIns="0" rIns="0" bIns="0" rtlCol="0" anchor="ctr"/>
+          <a:lstStyle/>
+          <a:p>
+            <a:pPr algn="ctr" indent="0" marL="0">
+              <a:buNone/>
+            </a:pPr>
+            <a:r>
+              <a:rPr lang="en-US" sz="1600" b="1" dirty="0">
+                <a:solidFill>
+                  <a:srgbClr val="0D9488"/>
+                </a:solidFill>
+                <a:latin typeface="Trebuchet MS" pitchFamily="34" charset="0"/>
+                <a:ea typeface="Trebuchet MS" pitchFamily="34" charset="-122"/>
+                <a:cs typeface="Trebuchet MS" pitchFamily="34" charset="-120"/>
+              </a:rPr>
+              <a:t>·</a:t>
+            </a:r>
+            <a:endParaRPr lang="en-US" sz="1600" dirty="0"/>
+          </a:p>
+        </p:txBody>
+      </p:sp>
+      <p:sp>
+        <p:nvSpPr>
+          <p:cNvPr id="31" name="Shape 29"/>
+          <p:cNvSpPr/>
+          <p:nvPr/>
+        </p:nvSpPr>
+        <p:spPr>
+          <a:xfrm>
+            <a:off x="6428232" y="3364992"/>
+            <a:ext cx="1645920" cy="475488"/>
+          </a:xfrm>
+          <a:prstGeom prst="rect">
+            <a:avLst>
+              <a:gd name="adj" fmla="val 9615"/>
+            </a:avLst>
+          </a:prstGeom>
+          <a:solidFill>
+            <a:srgbClr val="FFFFFF"/>
+          </a:solidFill>
+          <a:ln w="12700">
+            <a:solidFill>
+              <a:srgbClr val="0D9488"/>
+            </a:solidFill>
+            <a:prstDash val="solid"/>
+          </a:ln>
+        </p:spPr>
+      </p:sp>
+      <p:sp>
+        <p:nvSpPr>
+          <p:cNvPr id="32" name="Text 30"/>
+          <p:cNvSpPr/>
+          <p:nvPr/>
+        </p:nvSpPr>
+        <p:spPr>
+          <a:xfrm>
+            <a:off x="6428232" y="3364992"/>
+            <a:ext cx="1645920" cy="475488"/>
+          </a:xfrm>
+          <a:prstGeom prst="rect">
+            <a:avLst/>
+          </a:prstGeom>
+          <a:noFill/>
+          <a:ln/>
+        </p:spPr>
+        <p:txBody>
+          <a:bodyPr wrap="square" lIns="0" tIns="0" rIns="0" bIns="0" rtlCol="0" anchor="ctr"/>
+          <a:lstStyle/>
+          <a:p>
+            <a:pPr algn="ctr" indent="0" marL="0">
+              <a:buNone/>
+            </a:pPr>
+            <a:r>
+              <a:rPr lang="en-US" sz="1400" b="1" dirty="0">
+                <a:solidFill>
+                  <a:srgbClr val="0D9488"/>
+                </a:solidFill>
+                <a:latin typeface="Trebuchet MS" pitchFamily="34" charset="0"/>
+                <a:ea typeface="Trebuchet MS" pitchFamily="34" charset="-122"/>
+                <a:cs typeface="Trebuchet MS" pitchFamily="34" charset="-120"/>
+              </a:rPr>
+              <a:t>ment</a:t>
+            </a:r>
+            <a:endParaRPr lang="en-US" sz="1400" dirty="0"/>
+          </a:p>
+        </p:txBody>
+      </p:sp>
+      <p:sp>
+        <p:nvSpPr>
+          <p:cNvPr id="33" name="Shape 31"/>
+          <p:cNvSpPr/>
+          <p:nvPr/>
+        </p:nvSpPr>
+        <p:spPr>
+          <a:xfrm>
+            <a:off x="365760" y="4096512"/>
+            <a:ext cx="1371600" cy="804672"/>
+          </a:xfrm>
+          <a:prstGeom prst="rect">
+            <a:avLst>
+              <a:gd name="adj" fmla="val 6818"/>
+            </a:avLst>
+          </a:prstGeom>
+          <a:solidFill>
+            <a:srgbClr val="E2E8F0"/>
+          </a:solidFill>
+          <a:ln w="12700">
+            <a:solidFill>
+              <a:srgbClr val="E2E8F0"/>
+            </a:solidFill>
+            <a:prstDash val="solid"/>
+          </a:ln>
+        </p:spPr>
+      </p:sp>
+      <p:sp>
+        <p:nvSpPr>
+          <p:cNvPr id="34" name="Text 32"/>
+          <p:cNvSpPr/>
+          <p:nvPr/>
+        </p:nvSpPr>
+        <p:spPr>
+          <a:xfrm>
+            <a:off x="365760" y="4096512"/>
+            <a:ext cx="1371600" cy="804672"/>
+          </a:xfrm>
+          <a:prstGeom prst="rect">
+            <a:avLst/>
+          </a:prstGeom>
+          <a:noFill/>
+          <a:ln/>
+        </p:spPr>
+        <p:txBody>
+          <a:bodyPr wrap="square" lIns="0" tIns="0" rIns="0" bIns="0" rtlCol="0" anchor="ctr"/>
+          <a:lstStyle/>
+          <a:p>
+            <a:pPr algn="ctr" indent="0" marL="0">
+              <a:buNone/>
+            </a:pPr>
+            <a:r>
+              <a:rPr lang="en-US" sz="1100" b="1" dirty="0">
+                <a:solidFill>
+                  <a:srgbClr val="475569"/>
+                </a:solidFill>
+                <a:latin typeface="Trebuchet MS" pitchFamily="34" charset="0"/>
+                <a:ea typeface="Trebuchet MS" pitchFamily="34" charset="-122"/>
+                <a:cs typeface="Trebuchet MS" pitchFamily="34" charset="-120"/>
+              </a:rPr>
+              <a:t>Phonemes</a:t>
             </a:r>
             <a:endParaRPr lang="en-US" sz="1100" dirty="0"/>
           </a:p>
@@ -27650,13 +27551,13 @@
       </p:sp>
       <p:sp>
         <p:nvSpPr>
-          <p:cNvPr id="27" name="Shape 25"/>
-          <p:cNvSpPr/>
-          <p:nvPr/>
-        </p:nvSpPr>
-        <p:spPr>
-          <a:xfrm>
-            <a:off x="1874520" y="3273552"/>
+          <p:cNvPr id="35" name="Shape 33"/>
+          <p:cNvSpPr/>
+          <p:nvPr/>
+        </p:nvSpPr>
+        <p:spPr>
+          <a:xfrm>
+            <a:off x="1874520" y="4096512"/>
             <a:ext cx="6903720" cy="658368"/>
           </a:xfrm>
           <a:prstGeom prst="rect">
@@ -27665,30 +27566,30 @@
             </a:avLst>
           </a:prstGeom>
           <a:solidFill>
-            <a:srgbClr val="CCFBF1"/>
-          </a:solidFill>
-          <a:ln w="12700">
-            <a:solidFill>
-              <a:srgbClr val="0D9488"/>
-            </a:solidFill>
-            <a:prstDash val="solid"/>
-          </a:ln>
-        </p:spPr>
-      </p:sp>
-      <p:sp>
-        <p:nvSpPr>
-          <p:cNvPr id="28" name="Shape 26"/>
-          <p:cNvSpPr/>
-          <p:nvPr/>
-        </p:nvSpPr>
-        <p:spPr>
-          <a:xfrm>
-            <a:off x="1975104" y="3364992"/>
-            <a:ext cx="1554480" cy="475488"/>
+            <a:srgbClr val="FCE7F3"/>
+          </a:solidFill>
+          <a:ln w="12700">
+            <a:solidFill>
+              <a:srgbClr val="DB2777"/>
+            </a:solidFill>
+            <a:prstDash val="solid"/>
+          </a:ln>
+        </p:spPr>
+      </p:sp>
+      <p:sp>
+        <p:nvSpPr>
+          <p:cNvPr id="36" name="Shape 34"/>
+          <p:cNvSpPr/>
+          <p:nvPr/>
+        </p:nvSpPr>
+        <p:spPr>
+          <a:xfrm>
+            <a:off x="1951330" y="4169664"/>
+            <a:ext cx="676656" cy="475488"/>
           </a:xfrm>
           <a:prstGeom prst="rect">
             <a:avLst>
-              <a:gd name="adj" fmla="val 9615"/>
+              <a:gd name="adj" fmla="val 7692"/>
             </a:avLst>
           </a:prstGeom>
           <a:solidFill>
@@ -27696,104 +27597,131 @@
           </a:solidFill>
           <a:ln w="12700">
             <a:solidFill>
-              <a:srgbClr val="0D9488"/>
-            </a:solidFill>
-            <a:prstDash val="solid"/>
-          </a:ln>
-        </p:spPr>
-      </p:sp>
-      <p:sp>
-        <p:nvSpPr>
-          <p:cNvPr id="29" name="Text 27"/>
-          <p:cNvSpPr/>
-          <p:nvPr/>
-        </p:nvSpPr>
-        <p:spPr>
-          <a:xfrm>
-            <a:off x="1975104" y="3364992"/>
-            <a:ext cx="1554480" cy="475488"/>
-          </a:xfrm>
-          <a:prstGeom prst="rect">
-            <a:avLst/>
-          </a:prstGeom>
-          <a:noFill/>
-          <a:ln/>
-        </p:spPr>
-        <p:txBody>
-          <a:bodyPr wrap="square" lIns="0" tIns="0" rIns="0" bIns="0" rtlCol="0" anchor="ctr"/>
-          <a:lstStyle/>
-          <a:p>
-            <a:pPr algn="ctr" indent="0" marL="0">
-              <a:buNone/>
-            </a:pPr>
-            <a:r>
-              <a:rPr lang="en-US" sz="1400" b="1" dirty="0">
-                <a:solidFill>
-                  <a:srgbClr val="0D9488"/>
+              <a:srgbClr val="DB2777"/>
+            </a:solidFill>
+            <a:prstDash val="solid"/>
+          </a:ln>
+        </p:spPr>
+      </p:sp>
+      <p:sp>
+        <p:nvSpPr>
+          <p:cNvPr id="37" name="Text 35"/>
+          <p:cNvSpPr/>
+          <p:nvPr/>
+        </p:nvSpPr>
+        <p:spPr>
+          <a:xfrm>
+            <a:off x="1951330" y="4169664"/>
+            <a:ext cx="676656" cy="475488"/>
+          </a:xfrm>
+          <a:prstGeom prst="rect">
+            <a:avLst/>
+          </a:prstGeom>
+          <a:noFill/>
+          <a:ln/>
+        </p:spPr>
+        <p:txBody>
+          <a:bodyPr wrap="square" lIns="0" tIns="0" rIns="0" bIns="0" rtlCol="0" anchor="ctr"/>
+          <a:lstStyle/>
+          <a:p>
+            <a:pPr algn="ctr" indent="0" marL="0">
+              <a:buNone/>
+            </a:pPr>
+            <a:r>
+              <a:rPr lang="en-US" sz="900" b="1" dirty="0">
+                <a:solidFill>
+                  <a:srgbClr val="9D174D"/>
                 </a:solidFill>
                 <a:latin typeface="Trebuchet MS" pitchFamily="34" charset="0"/>
                 <a:ea typeface="Trebuchet MS" pitchFamily="34" charset="-122"/>
                 <a:cs typeface="Trebuchet MS" pitchFamily="34" charset="-120"/>
               </a:rPr>
-              <a:t>mis</a:t>
-            </a:r>
-            <a:endParaRPr lang="en-US" sz="1400" dirty="0"/>
-          </a:p>
-        </p:txBody>
-      </p:sp>
-      <p:sp>
-        <p:nvSpPr>
-          <p:cNvPr id="30" name="Text 28"/>
-          <p:cNvSpPr/>
-          <p:nvPr/>
-        </p:nvSpPr>
-        <p:spPr>
-          <a:xfrm>
-            <a:off x="3529584" y="3364992"/>
-            <a:ext cx="73152" cy="475488"/>
-          </a:xfrm>
-          <a:prstGeom prst="rect">
-            <a:avLst/>
-          </a:prstGeom>
-          <a:noFill/>
-          <a:ln/>
-        </p:spPr>
-        <p:txBody>
-          <a:bodyPr wrap="square" lIns="0" tIns="0" rIns="0" bIns="0" rtlCol="0" anchor="ctr"/>
-          <a:lstStyle/>
-          <a:p>
-            <a:pPr algn="ctr" indent="0" marL="0">
-              <a:buNone/>
-            </a:pPr>
-            <a:r>
-              <a:rPr lang="en-US" sz="1600" b="1" dirty="0">
-                <a:solidFill>
-                  <a:srgbClr val="0D9488"/>
+              <a:t>g</a:t>
+            </a:r>
+            <a:endParaRPr lang="en-US" sz="900" dirty="0"/>
+          </a:p>
+        </p:txBody>
+      </p:sp>
+      <p:sp>
+        <p:nvSpPr>
+          <p:cNvPr id="38" name="Shape 36"/>
+          <p:cNvSpPr/>
+          <p:nvPr/>
+        </p:nvSpPr>
+        <p:spPr>
+          <a:xfrm>
+            <a:off x="2677363" y="4169664"/>
+            <a:ext cx="676656" cy="475488"/>
+          </a:xfrm>
+          <a:prstGeom prst="rect">
+            <a:avLst>
+              <a:gd name="adj" fmla="val 7692"/>
+            </a:avLst>
+          </a:prstGeom>
+          <a:solidFill>
+            <a:srgbClr val="FFFFFF"/>
+          </a:solidFill>
+          <a:ln w="12700">
+            <a:solidFill>
+              <a:srgbClr val="DB2777"/>
+            </a:solidFill>
+            <a:prstDash val="solid"/>
+          </a:ln>
+        </p:spPr>
+      </p:sp>
+      <p:sp>
+        <p:nvSpPr>
+          <p:cNvPr id="39" name="Text 37"/>
+          <p:cNvSpPr/>
+          <p:nvPr/>
+        </p:nvSpPr>
+        <p:spPr>
+          <a:xfrm>
+            <a:off x="2677363" y="4169664"/>
+            <a:ext cx="676656" cy="475488"/>
+          </a:xfrm>
+          <a:prstGeom prst="rect">
+            <a:avLst/>
+          </a:prstGeom>
+          <a:noFill/>
+          <a:ln/>
+        </p:spPr>
+        <p:txBody>
+          <a:bodyPr wrap="square" lIns="0" tIns="0" rIns="0" bIns="0" rtlCol="0" anchor="ctr"/>
+          <a:lstStyle/>
+          <a:p>
+            <a:pPr algn="ctr" indent="0" marL="0">
+              <a:buNone/>
+            </a:pPr>
+            <a:r>
+              <a:rPr lang="en-US" sz="900" b="1" dirty="0">
+                <a:solidFill>
+                  <a:srgbClr val="9D174D"/>
                 </a:solidFill>
                 <a:latin typeface="Trebuchet MS" pitchFamily="34" charset="0"/>
                 <a:ea typeface="Trebuchet MS" pitchFamily="34" charset="-122"/>
                 <a:cs typeface="Trebuchet MS" pitchFamily="34" charset="-120"/>
               </a:rPr>
-              <a:t>·</a:t>
-            </a:r>
-            <a:endParaRPr lang="en-US" sz="1600" dirty="0"/>
-          </a:p>
-        </p:txBody>
-      </p:sp>
-      <p:sp>
-        <p:nvSpPr>
-          <p:cNvPr id="31" name="Shape 29"/>
-          <p:cNvSpPr/>
-          <p:nvPr/>
-        </p:nvSpPr>
-        <p:spPr>
-          <a:xfrm>
-            <a:off x="3602736" y="3364992"/>
-            <a:ext cx="1554480" cy="475488"/>
+              <a:t>o</a:t>
+            </a:r>
+            <a:endParaRPr lang="en-US" sz="900" dirty="0"/>
+          </a:p>
+        </p:txBody>
+      </p:sp>
+      <p:sp>
+        <p:nvSpPr>
+          <p:cNvPr id="40" name="Shape 38"/>
+          <p:cNvSpPr/>
+          <p:nvPr/>
+        </p:nvSpPr>
+        <p:spPr>
+          <a:xfrm>
+            <a:off x="3403397" y="4169664"/>
+            <a:ext cx="676656" cy="475488"/>
           </a:xfrm>
           <a:prstGeom prst="rect">
             <a:avLst>
-              <a:gd name="adj" fmla="val 9615"/>
+              <a:gd name="adj" fmla="val 7692"/>
             </a:avLst>
           </a:prstGeom>
           <a:solidFill>
@@ -27801,104 +27729,131 @@
           </a:solidFill>
           <a:ln w="12700">
             <a:solidFill>
-              <a:srgbClr val="0D9488"/>
-            </a:solidFill>
-            <a:prstDash val="solid"/>
-          </a:ln>
-        </p:spPr>
-      </p:sp>
-      <p:sp>
-        <p:nvSpPr>
-          <p:cNvPr id="32" name="Text 30"/>
-          <p:cNvSpPr/>
-          <p:nvPr/>
-        </p:nvSpPr>
-        <p:spPr>
-          <a:xfrm>
-            <a:off x="3602736" y="3364992"/>
-            <a:ext cx="1554480" cy="475488"/>
-          </a:xfrm>
-          <a:prstGeom prst="rect">
-            <a:avLst/>
-          </a:prstGeom>
-          <a:noFill/>
-          <a:ln/>
-        </p:spPr>
-        <p:txBody>
-          <a:bodyPr wrap="square" lIns="0" tIns="0" rIns="0" bIns="0" rtlCol="0" anchor="ctr"/>
-          <a:lstStyle/>
-          <a:p>
-            <a:pPr algn="ctr" indent="0" marL="0">
-              <a:buNone/>
-            </a:pPr>
-            <a:r>
-              <a:rPr lang="en-US" sz="1400" b="1" dirty="0">
-                <a:solidFill>
-                  <a:srgbClr val="0D9488"/>
+              <a:srgbClr val="DB2777"/>
+            </a:solidFill>
+            <a:prstDash val="solid"/>
+          </a:ln>
+        </p:spPr>
+      </p:sp>
+      <p:sp>
+        <p:nvSpPr>
+          <p:cNvPr id="41" name="Text 39"/>
+          <p:cNvSpPr/>
+          <p:nvPr/>
+        </p:nvSpPr>
+        <p:spPr>
+          <a:xfrm>
+            <a:off x="3403397" y="4169664"/>
+            <a:ext cx="676656" cy="475488"/>
+          </a:xfrm>
+          <a:prstGeom prst="rect">
+            <a:avLst/>
+          </a:prstGeom>
+          <a:noFill/>
+          <a:ln/>
+        </p:spPr>
+        <p:txBody>
+          <a:bodyPr wrap="square" lIns="0" tIns="0" rIns="0" bIns="0" rtlCol="0" anchor="ctr"/>
+          <a:lstStyle/>
+          <a:p>
+            <a:pPr algn="ctr" indent="0" marL="0">
+              <a:buNone/>
+            </a:pPr>
+            <a:r>
+              <a:rPr lang="en-US" sz="900" b="1" dirty="0">
+                <a:solidFill>
+                  <a:srgbClr val="9D174D"/>
                 </a:solidFill>
                 <a:latin typeface="Trebuchet MS" pitchFamily="34" charset="0"/>
                 <a:ea typeface="Trebuchet MS" pitchFamily="34" charset="-122"/>
                 <a:cs typeface="Trebuchet MS" pitchFamily="34" charset="-120"/>
               </a:rPr>
-              <a:t>gov</a:t>
-            </a:r>
-            <a:endParaRPr lang="en-US" sz="1400" dirty="0"/>
-          </a:p>
-        </p:txBody>
-      </p:sp>
-      <p:sp>
-        <p:nvSpPr>
-          <p:cNvPr id="33" name="Text 31"/>
-          <p:cNvSpPr/>
-          <p:nvPr/>
-        </p:nvSpPr>
-        <p:spPr>
-          <a:xfrm>
-            <a:off x="5157216" y="3364992"/>
-            <a:ext cx="73152" cy="475488"/>
-          </a:xfrm>
-          <a:prstGeom prst="rect">
-            <a:avLst/>
-          </a:prstGeom>
-          <a:noFill/>
-          <a:ln/>
-        </p:spPr>
-        <p:txBody>
-          <a:bodyPr wrap="square" lIns="0" tIns="0" rIns="0" bIns="0" rtlCol="0" anchor="ctr"/>
-          <a:lstStyle/>
-          <a:p>
-            <a:pPr algn="ctr" indent="0" marL="0">
-              <a:buNone/>
-            </a:pPr>
-            <a:r>
-              <a:rPr lang="en-US" sz="1600" b="1" dirty="0">
-                <a:solidFill>
-                  <a:srgbClr val="0D9488"/>
+              <a:t>v</a:t>
+            </a:r>
+            <a:endParaRPr lang="en-US" sz="900" dirty="0"/>
+          </a:p>
+        </p:txBody>
+      </p:sp>
+      <p:sp>
+        <p:nvSpPr>
+          <p:cNvPr id="42" name="Shape 40"/>
+          <p:cNvSpPr/>
+          <p:nvPr/>
+        </p:nvSpPr>
+        <p:spPr>
+          <a:xfrm>
+            <a:off x="4129430" y="4169664"/>
+            <a:ext cx="676656" cy="475488"/>
+          </a:xfrm>
+          <a:prstGeom prst="rect">
+            <a:avLst>
+              <a:gd name="adj" fmla="val 7692"/>
+            </a:avLst>
+          </a:prstGeom>
+          <a:solidFill>
+            <a:srgbClr val="FFFFFF"/>
+          </a:solidFill>
+          <a:ln w="12700">
+            <a:solidFill>
+              <a:srgbClr val="DB2777"/>
+            </a:solidFill>
+            <a:prstDash val="solid"/>
+          </a:ln>
+        </p:spPr>
+      </p:sp>
+      <p:sp>
+        <p:nvSpPr>
+          <p:cNvPr id="43" name="Text 41"/>
+          <p:cNvSpPr/>
+          <p:nvPr/>
+        </p:nvSpPr>
+        <p:spPr>
+          <a:xfrm>
+            <a:off x="4129430" y="4169664"/>
+            <a:ext cx="676656" cy="475488"/>
+          </a:xfrm>
+          <a:prstGeom prst="rect">
+            <a:avLst/>
+          </a:prstGeom>
+          <a:noFill/>
+          <a:ln/>
+        </p:spPr>
+        <p:txBody>
+          <a:bodyPr wrap="square" lIns="0" tIns="0" rIns="0" bIns="0" rtlCol="0" anchor="ctr"/>
+          <a:lstStyle/>
+          <a:p>
+            <a:pPr algn="ctr" indent="0" marL="0">
+              <a:buNone/>
+            </a:pPr>
+            <a:r>
+              <a:rPr lang="en-US" sz="900" b="1" dirty="0">
+                <a:solidFill>
+                  <a:srgbClr val="9D174D"/>
                 </a:solidFill>
                 <a:latin typeface="Trebuchet MS" pitchFamily="34" charset="0"/>
                 <a:ea typeface="Trebuchet MS" pitchFamily="34" charset="-122"/>
                 <a:cs typeface="Trebuchet MS" pitchFamily="34" charset="-120"/>
               </a:rPr>
-              <a:t>·</a:t>
-            </a:r>
-            <a:endParaRPr lang="en-US" sz="1600" dirty="0"/>
-          </a:p>
-        </p:txBody>
-      </p:sp>
-      <p:sp>
-        <p:nvSpPr>
-          <p:cNvPr id="34" name="Shape 32"/>
-          <p:cNvSpPr/>
-          <p:nvPr/>
-        </p:nvSpPr>
-        <p:spPr>
-          <a:xfrm>
-            <a:off x="5230368" y="3364992"/>
-            <a:ext cx="1554480" cy="475488"/>
+              <a:t>er</a:t>
+            </a:r>
+            <a:endParaRPr lang="en-US" sz="900" dirty="0"/>
+          </a:p>
+        </p:txBody>
+      </p:sp>
+      <p:sp>
+        <p:nvSpPr>
+          <p:cNvPr id="44" name="Shape 42"/>
+          <p:cNvSpPr/>
+          <p:nvPr/>
+        </p:nvSpPr>
+        <p:spPr>
+          <a:xfrm>
+            <a:off x="4855464" y="4169664"/>
+            <a:ext cx="676656" cy="475488"/>
           </a:xfrm>
           <a:prstGeom prst="rect">
             <a:avLst>
-              <a:gd name="adj" fmla="val 9615"/>
+              <a:gd name="adj" fmla="val 7692"/>
             </a:avLst>
           </a:prstGeom>
           <a:solidFill>
@@ -27906,104 +27861,131 @@
           </a:solidFill>
           <a:ln w="12700">
             <a:solidFill>
-              <a:srgbClr val="0D9488"/>
-            </a:solidFill>
-            <a:prstDash val="solid"/>
-          </a:ln>
-        </p:spPr>
-      </p:sp>
-      <p:sp>
-        <p:nvSpPr>
-          <p:cNvPr id="35" name="Text 33"/>
-          <p:cNvSpPr/>
-          <p:nvPr/>
-        </p:nvSpPr>
-        <p:spPr>
-          <a:xfrm>
-            <a:off x="5230368" y="3364992"/>
-            <a:ext cx="1554480" cy="475488"/>
-          </a:xfrm>
-          <a:prstGeom prst="rect">
-            <a:avLst/>
-          </a:prstGeom>
-          <a:noFill/>
-          <a:ln/>
-        </p:spPr>
-        <p:txBody>
-          <a:bodyPr wrap="square" lIns="0" tIns="0" rIns="0" bIns="0" rtlCol="0" anchor="ctr"/>
-          <a:lstStyle/>
-          <a:p>
-            <a:pPr algn="ctr" indent="0" marL="0">
-              <a:buNone/>
-            </a:pPr>
-            <a:r>
-              <a:rPr lang="en-US" sz="1400" b="1" dirty="0">
-                <a:solidFill>
-                  <a:srgbClr val="0D9488"/>
+              <a:srgbClr val="DB2777"/>
+            </a:solidFill>
+            <a:prstDash val="solid"/>
+          </a:ln>
+        </p:spPr>
+      </p:sp>
+      <p:sp>
+        <p:nvSpPr>
+          <p:cNvPr id="45" name="Text 43"/>
+          <p:cNvSpPr/>
+          <p:nvPr/>
+        </p:nvSpPr>
+        <p:spPr>
+          <a:xfrm>
+            <a:off x="4855464" y="4169664"/>
+            <a:ext cx="676656" cy="475488"/>
+          </a:xfrm>
+          <a:prstGeom prst="rect">
+            <a:avLst/>
+          </a:prstGeom>
+          <a:noFill/>
+          <a:ln/>
+        </p:spPr>
+        <p:txBody>
+          <a:bodyPr wrap="square" lIns="0" tIns="0" rIns="0" bIns="0" rtlCol="0" anchor="ctr"/>
+          <a:lstStyle/>
+          <a:p>
+            <a:pPr algn="ctr" indent="0" marL="0">
+              <a:buNone/>
+            </a:pPr>
+            <a:r>
+              <a:rPr lang="en-US" sz="900" b="1" dirty="0">
+                <a:solidFill>
+                  <a:srgbClr val="9D174D"/>
                 </a:solidFill>
                 <a:latin typeface="Trebuchet MS" pitchFamily="34" charset="0"/>
                 <a:ea typeface="Trebuchet MS" pitchFamily="34" charset="-122"/>
                 <a:cs typeface="Trebuchet MS" pitchFamily="34" charset="-120"/>
               </a:rPr>
-              <a:t>ern</a:t>
-            </a:r>
-            <a:endParaRPr lang="en-US" sz="1400" dirty="0"/>
-          </a:p>
-        </p:txBody>
-      </p:sp>
-      <p:sp>
-        <p:nvSpPr>
-          <p:cNvPr id="36" name="Text 34"/>
-          <p:cNvSpPr/>
-          <p:nvPr/>
-        </p:nvSpPr>
-        <p:spPr>
-          <a:xfrm>
-            <a:off x="6784848" y="3364992"/>
-            <a:ext cx="73152" cy="475488"/>
-          </a:xfrm>
-          <a:prstGeom prst="rect">
-            <a:avLst/>
-          </a:prstGeom>
-          <a:noFill/>
-          <a:ln/>
-        </p:spPr>
-        <p:txBody>
-          <a:bodyPr wrap="square" lIns="0" tIns="0" rIns="0" bIns="0" rtlCol="0" anchor="ctr"/>
-          <a:lstStyle/>
-          <a:p>
-            <a:pPr algn="ctr" indent="0" marL="0">
-              <a:buNone/>
-            </a:pPr>
-            <a:r>
-              <a:rPr lang="en-US" sz="1600" b="1" dirty="0">
-                <a:solidFill>
-                  <a:srgbClr val="0D9488"/>
+              <a:t>n</a:t>
+            </a:r>
+            <a:endParaRPr lang="en-US" sz="900" dirty="0"/>
+          </a:p>
+        </p:txBody>
+      </p:sp>
+      <p:sp>
+        <p:nvSpPr>
+          <p:cNvPr id="46" name="Shape 44"/>
+          <p:cNvSpPr/>
+          <p:nvPr/>
+        </p:nvSpPr>
+        <p:spPr>
+          <a:xfrm>
+            <a:off x="5581498" y="4169664"/>
+            <a:ext cx="676656" cy="475488"/>
+          </a:xfrm>
+          <a:prstGeom prst="rect">
+            <a:avLst>
+              <a:gd name="adj" fmla="val 7692"/>
+            </a:avLst>
+          </a:prstGeom>
+          <a:solidFill>
+            <a:srgbClr val="FFFFFF"/>
+          </a:solidFill>
+          <a:ln w="12700">
+            <a:solidFill>
+              <a:srgbClr val="DB2777"/>
+            </a:solidFill>
+            <a:prstDash val="solid"/>
+          </a:ln>
+        </p:spPr>
+      </p:sp>
+      <p:sp>
+        <p:nvSpPr>
+          <p:cNvPr id="47" name="Text 45"/>
+          <p:cNvSpPr/>
+          <p:nvPr/>
+        </p:nvSpPr>
+        <p:spPr>
+          <a:xfrm>
+            <a:off x="5581498" y="4169664"/>
+            <a:ext cx="676656" cy="475488"/>
+          </a:xfrm>
+          <a:prstGeom prst="rect">
+            <a:avLst/>
+          </a:prstGeom>
+          <a:noFill/>
+          <a:ln/>
+        </p:spPr>
+        <p:txBody>
+          <a:bodyPr wrap="square" lIns="0" tIns="0" rIns="0" bIns="0" rtlCol="0" anchor="ctr"/>
+          <a:lstStyle/>
+          <a:p>
+            <a:pPr algn="ctr" indent="0" marL="0">
+              <a:buNone/>
+            </a:pPr>
+            <a:r>
+              <a:rPr lang="en-US" sz="900" b="1" dirty="0">
+                <a:solidFill>
+                  <a:srgbClr val="9D174D"/>
                 </a:solidFill>
                 <a:latin typeface="Trebuchet MS" pitchFamily="34" charset="0"/>
                 <a:ea typeface="Trebuchet MS" pitchFamily="34" charset="-122"/>
                 <a:cs typeface="Trebuchet MS" pitchFamily="34" charset="-120"/>
               </a:rPr>
-              <a:t>·</a:t>
-            </a:r>
-            <a:endParaRPr lang="en-US" sz="1600" dirty="0"/>
-          </a:p>
-        </p:txBody>
-      </p:sp>
-      <p:sp>
-        <p:nvSpPr>
-          <p:cNvPr id="37" name="Shape 35"/>
-          <p:cNvSpPr/>
-          <p:nvPr/>
-        </p:nvSpPr>
-        <p:spPr>
-          <a:xfrm>
-            <a:off x="6858000" y="3364992"/>
-            <a:ext cx="1554480" cy="475488"/>
+              <a:t>m</a:t>
+            </a:r>
+            <a:endParaRPr lang="en-US" sz="900" dirty="0"/>
+          </a:p>
+        </p:txBody>
+      </p:sp>
+      <p:sp>
+        <p:nvSpPr>
+          <p:cNvPr id="48" name="Shape 46"/>
+          <p:cNvSpPr/>
+          <p:nvPr/>
+        </p:nvSpPr>
+        <p:spPr>
+          <a:xfrm>
+            <a:off x="6307531" y="4169664"/>
+            <a:ext cx="676656" cy="475488"/>
           </a:xfrm>
           <a:prstGeom prst="rect">
             <a:avLst>
-              <a:gd name="adj" fmla="val 9615"/>
+              <a:gd name="adj" fmla="val 7692"/>
             </a:avLst>
           </a:prstGeom>
           <a:solidFill>
@@ -28011,154 +27993,127 @@
           </a:solidFill>
           <a:ln w="12700">
             <a:solidFill>
-              <a:srgbClr val="0D9488"/>
-            </a:solidFill>
-            <a:prstDash val="solid"/>
-          </a:ln>
-        </p:spPr>
-      </p:sp>
-      <p:sp>
-        <p:nvSpPr>
-          <p:cNvPr id="38" name="Text 36"/>
-          <p:cNvSpPr/>
-          <p:nvPr/>
-        </p:nvSpPr>
-        <p:spPr>
-          <a:xfrm>
-            <a:off x="6858000" y="3364992"/>
-            <a:ext cx="1554480" cy="475488"/>
-          </a:xfrm>
-          <a:prstGeom prst="rect">
-            <a:avLst/>
-          </a:prstGeom>
-          <a:noFill/>
-          <a:ln/>
-        </p:spPr>
-        <p:txBody>
-          <a:bodyPr wrap="square" lIns="0" tIns="0" rIns="0" bIns="0" rtlCol="0" anchor="ctr"/>
-          <a:lstStyle/>
-          <a:p>
-            <a:pPr algn="ctr" indent="0" marL="0">
-              <a:buNone/>
-            </a:pPr>
-            <a:r>
-              <a:rPr lang="en-US" sz="1400" b="1" dirty="0">
-                <a:solidFill>
-                  <a:srgbClr val="0D9488"/>
+              <a:srgbClr val="DB2777"/>
+            </a:solidFill>
+            <a:prstDash val="solid"/>
+          </a:ln>
+        </p:spPr>
+      </p:sp>
+      <p:sp>
+        <p:nvSpPr>
+          <p:cNvPr id="49" name="Text 47"/>
+          <p:cNvSpPr/>
+          <p:nvPr/>
+        </p:nvSpPr>
+        <p:spPr>
+          <a:xfrm>
+            <a:off x="6307531" y="4169664"/>
+            <a:ext cx="676656" cy="475488"/>
+          </a:xfrm>
+          <a:prstGeom prst="rect">
+            <a:avLst/>
+          </a:prstGeom>
+          <a:noFill/>
+          <a:ln/>
+        </p:spPr>
+        <p:txBody>
+          <a:bodyPr wrap="square" lIns="0" tIns="0" rIns="0" bIns="0" rtlCol="0" anchor="ctr"/>
+          <a:lstStyle/>
+          <a:p>
+            <a:pPr algn="ctr" indent="0" marL="0">
+              <a:buNone/>
+            </a:pPr>
+            <a:r>
+              <a:rPr lang="en-US" sz="900" b="1" dirty="0">
+                <a:solidFill>
+                  <a:srgbClr val="9D174D"/>
                 </a:solidFill>
                 <a:latin typeface="Trebuchet MS" pitchFamily="34" charset="0"/>
                 <a:ea typeface="Trebuchet MS" pitchFamily="34" charset="-122"/>
                 <a:cs typeface="Trebuchet MS" pitchFamily="34" charset="-120"/>
               </a:rPr>
-              <a:t>ment</a:t>
-            </a:r>
-            <a:endParaRPr lang="en-US" sz="1400" dirty="0"/>
-          </a:p>
-        </p:txBody>
-      </p:sp>
-      <p:sp>
-        <p:nvSpPr>
-          <p:cNvPr id="39" name="Shape 37"/>
-          <p:cNvSpPr/>
-          <p:nvPr/>
-        </p:nvSpPr>
-        <p:spPr>
-          <a:xfrm>
-            <a:off x="365760" y="4096512"/>
-            <a:ext cx="1371600" cy="804672"/>
+              <a:t>e</a:t>
+            </a:r>
+            <a:endParaRPr lang="en-US" sz="900" dirty="0"/>
+          </a:p>
+        </p:txBody>
+      </p:sp>
+      <p:sp>
+        <p:nvSpPr>
+          <p:cNvPr id="50" name="Shape 48"/>
+          <p:cNvSpPr/>
+          <p:nvPr/>
+        </p:nvSpPr>
+        <p:spPr>
+          <a:xfrm>
+            <a:off x="7033565" y="4169664"/>
+            <a:ext cx="676656" cy="475488"/>
           </a:xfrm>
           <a:prstGeom prst="rect">
             <a:avLst>
-              <a:gd name="adj" fmla="val 6818"/>
+              <a:gd name="adj" fmla="val 7692"/>
             </a:avLst>
           </a:prstGeom>
           <a:solidFill>
-            <a:srgbClr val="E2E8F0"/>
-          </a:solidFill>
-          <a:ln w="12700">
-            <a:solidFill>
-              <a:srgbClr val="E2E8F0"/>
-            </a:solidFill>
-            <a:prstDash val="solid"/>
-          </a:ln>
-        </p:spPr>
-      </p:sp>
-      <p:sp>
-        <p:nvSpPr>
-          <p:cNvPr id="40" name="Text 38"/>
-          <p:cNvSpPr/>
-          <p:nvPr/>
-        </p:nvSpPr>
-        <p:spPr>
-          <a:xfrm>
-            <a:off x="365760" y="4096512"/>
-            <a:ext cx="1371600" cy="804672"/>
-          </a:xfrm>
-          <a:prstGeom prst="rect">
-            <a:avLst/>
-          </a:prstGeom>
-          <a:noFill/>
-          <a:ln/>
-        </p:spPr>
-        <p:txBody>
-          <a:bodyPr wrap="square" lIns="0" tIns="0" rIns="0" bIns="0" rtlCol="0" anchor="ctr"/>
-          <a:lstStyle/>
-          <a:p>
-            <a:pPr algn="ctr" indent="0" marL="0">
-              <a:buNone/>
-            </a:pPr>
-            <a:r>
-              <a:rPr lang="en-US" sz="1100" b="1" dirty="0">
-                <a:solidFill>
-                  <a:srgbClr val="475569"/>
+            <a:srgbClr val="FFFFFF"/>
+          </a:solidFill>
+          <a:ln w="12700">
+            <a:solidFill>
+              <a:srgbClr val="DB2777"/>
+            </a:solidFill>
+            <a:prstDash val="solid"/>
+          </a:ln>
+        </p:spPr>
+      </p:sp>
+      <p:sp>
+        <p:nvSpPr>
+          <p:cNvPr id="51" name="Text 49"/>
+          <p:cNvSpPr/>
+          <p:nvPr/>
+        </p:nvSpPr>
+        <p:spPr>
+          <a:xfrm>
+            <a:off x="7033565" y="4169664"/>
+            <a:ext cx="676656" cy="475488"/>
+          </a:xfrm>
+          <a:prstGeom prst="rect">
+            <a:avLst/>
+          </a:prstGeom>
+          <a:noFill/>
+          <a:ln/>
+        </p:spPr>
+        <p:txBody>
+          <a:bodyPr wrap="square" lIns="0" tIns="0" rIns="0" bIns="0" rtlCol="0" anchor="ctr"/>
+          <a:lstStyle/>
+          <a:p>
+            <a:pPr algn="ctr" indent="0" marL="0">
+              <a:buNone/>
+            </a:pPr>
+            <a:r>
+              <a:rPr lang="en-US" sz="900" b="1" dirty="0">
+                <a:solidFill>
+                  <a:srgbClr val="9D174D"/>
                 </a:solidFill>
                 <a:latin typeface="Trebuchet MS" pitchFamily="34" charset="0"/>
                 <a:ea typeface="Trebuchet MS" pitchFamily="34" charset="-122"/>
                 <a:cs typeface="Trebuchet MS" pitchFamily="34" charset="-120"/>
               </a:rPr>
-              <a:t>Phonemes</a:t>
-            </a:r>
-            <a:endParaRPr lang="en-US" sz="1100" dirty="0"/>
-          </a:p>
-        </p:txBody>
-      </p:sp>
-      <p:sp>
-        <p:nvSpPr>
-          <p:cNvPr id="41" name="Shape 39"/>
-          <p:cNvSpPr/>
-          <p:nvPr/>
-        </p:nvSpPr>
-        <p:spPr>
-          <a:xfrm>
-            <a:off x="1874520" y="4096512"/>
-            <a:ext cx="6903720" cy="658368"/>
-          </a:xfrm>
-          <a:prstGeom prst="rect">
-            <a:avLst>
-              <a:gd name="adj" fmla="val 8333"/>
-            </a:avLst>
-          </a:prstGeom>
-          <a:solidFill>
-            <a:srgbClr val="FCE7F3"/>
-          </a:solidFill>
-          <a:ln w="12700">
-            <a:solidFill>
-              <a:srgbClr val="DB2777"/>
-            </a:solidFill>
-            <a:prstDash val="solid"/>
-          </a:ln>
-        </p:spPr>
-      </p:sp>
-      <p:sp>
-        <p:nvSpPr>
-          <p:cNvPr id="42" name="Shape 40"/>
-          <p:cNvSpPr/>
-          <p:nvPr/>
-        </p:nvSpPr>
-        <p:spPr>
-          <a:xfrm>
-            <a:off x="1952596" y="4169664"/>
-            <a:ext cx="493776" cy="475488"/>
+              <a:t>n</a:t>
+            </a:r>
+            <a:endParaRPr lang="en-US" sz="900" dirty="0"/>
+          </a:p>
+        </p:txBody>
+      </p:sp>
+      <p:sp>
+        <p:nvSpPr>
+          <p:cNvPr id="52" name="Shape 50"/>
+          <p:cNvSpPr/>
+          <p:nvPr/>
+        </p:nvSpPr>
+        <p:spPr>
+          <a:xfrm>
+            <a:off x="7759598" y="4169664"/>
+            <a:ext cx="676656" cy="475488"/>
           </a:xfrm>
           <a:prstGeom prst="rect">
             <a:avLst>
@@ -28178,740 +28133,14 @@
       </p:sp>
       <p:sp>
         <p:nvSpPr>
-          <p:cNvPr id="43" name="Text 41"/>
-          <p:cNvSpPr/>
-          <p:nvPr/>
-        </p:nvSpPr>
-        <p:spPr>
-          <a:xfrm>
-            <a:off x="1952596" y="4169664"/>
-            <a:ext cx="493776" cy="475488"/>
-          </a:xfrm>
-          <a:prstGeom prst="rect">
-            <a:avLst/>
-          </a:prstGeom>
-          <a:noFill/>
-          <a:ln/>
-        </p:spPr>
-        <p:txBody>
-          <a:bodyPr wrap="square" lIns="0" tIns="0" rIns="0" bIns="0" rtlCol="0" anchor="ctr"/>
-          <a:lstStyle/>
-          <a:p>
-            <a:pPr algn="ctr" indent="0" marL="0">
-              <a:buNone/>
-            </a:pPr>
-            <a:r>
-              <a:rPr lang="en-US" sz="900" b="1" dirty="0">
-                <a:solidFill>
-                  <a:srgbClr val="9D174D"/>
-                </a:solidFill>
-                <a:latin typeface="Trebuchet MS" pitchFamily="34" charset="0"/>
-                <a:ea typeface="Trebuchet MS" pitchFamily="34" charset="-122"/>
-                <a:cs typeface="Trebuchet MS" pitchFamily="34" charset="-120"/>
-              </a:rPr>
-              <a:t>m</a:t>
-            </a:r>
-            <a:endParaRPr lang="en-US" sz="900" dirty="0"/>
-          </a:p>
-        </p:txBody>
-      </p:sp>
-      <p:sp>
-        <p:nvSpPr>
-          <p:cNvPr id="44" name="Shape 42"/>
-          <p:cNvSpPr/>
-          <p:nvPr/>
-        </p:nvSpPr>
-        <p:spPr>
-          <a:xfrm>
-            <a:off x="2497015" y="4169664"/>
-            <a:ext cx="493776" cy="475488"/>
-          </a:xfrm>
-          <a:prstGeom prst="rect">
-            <a:avLst>
-              <a:gd name="adj" fmla="val 7692"/>
-            </a:avLst>
-          </a:prstGeom>
-          <a:solidFill>
-            <a:srgbClr val="FFFFFF"/>
-          </a:solidFill>
-          <a:ln w="12700">
-            <a:solidFill>
-              <a:srgbClr val="DB2777"/>
-            </a:solidFill>
-            <a:prstDash val="solid"/>
-          </a:ln>
-        </p:spPr>
-      </p:sp>
-      <p:sp>
-        <p:nvSpPr>
-          <p:cNvPr id="45" name="Text 43"/>
-          <p:cNvSpPr/>
-          <p:nvPr/>
-        </p:nvSpPr>
-        <p:spPr>
-          <a:xfrm>
-            <a:off x="2497015" y="4169664"/>
-            <a:ext cx="493776" cy="475488"/>
-          </a:xfrm>
-          <a:prstGeom prst="rect">
-            <a:avLst/>
-          </a:prstGeom>
-          <a:noFill/>
-          <a:ln/>
-        </p:spPr>
-        <p:txBody>
-          <a:bodyPr wrap="square" lIns="0" tIns="0" rIns="0" bIns="0" rtlCol="0" anchor="ctr"/>
-          <a:lstStyle/>
-          <a:p>
-            <a:pPr algn="ctr" indent="0" marL="0">
-              <a:buNone/>
-            </a:pPr>
-            <a:r>
-              <a:rPr lang="en-US" sz="900" b="1" dirty="0">
-                <a:solidFill>
-                  <a:srgbClr val="9D174D"/>
-                </a:solidFill>
-                <a:latin typeface="Trebuchet MS" pitchFamily="34" charset="0"/>
-                <a:ea typeface="Trebuchet MS" pitchFamily="34" charset="-122"/>
-                <a:cs typeface="Trebuchet MS" pitchFamily="34" charset="-120"/>
-              </a:rPr>
-              <a:t>i</a:t>
-            </a:r>
-            <a:endParaRPr lang="en-US" sz="900" dirty="0"/>
-          </a:p>
-        </p:txBody>
-      </p:sp>
-      <p:sp>
-        <p:nvSpPr>
-          <p:cNvPr id="46" name="Shape 44"/>
-          <p:cNvSpPr/>
-          <p:nvPr/>
-        </p:nvSpPr>
-        <p:spPr>
-          <a:xfrm>
-            <a:off x="3041435" y="4169664"/>
-            <a:ext cx="493776" cy="475488"/>
-          </a:xfrm>
-          <a:prstGeom prst="rect">
-            <a:avLst>
-              <a:gd name="adj" fmla="val 7692"/>
-            </a:avLst>
-          </a:prstGeom>
-          <a:solidFill>
-            <a:srgbClr val="FFFFFF"/>
-          </a:solidFill>
-          <a:ln w="12700">
-            <a:solidFill>
-              <a:srgbClr val="DB2777"/>
-            </a:solidFill>
-            <a:prstDash val="solid"/>
-          </a:ln>
-        </p:spPr>
-      </p:sp>
-      <p:sp>
-        <p:nvSpPr>
-          <p:cNvPr id="47" name="Text 45"/>
-          <p:cNvSpPr/>
-          <p:nvPr/>
-        </p:nvSpPr>
-        <p:spPr>
-          <a:xfrm>
-            <a:off x="3041435" y="4169664"/>
-            <a:ext cx="493776" cy="475488"/>
-          </a:xfrm>
-          <a:prstGeom prst="rect">
-            <a:avLst/>
-          </a:prstGeom>
-          <a:noFill/>
-          <a:ln/>
-        </p:spPr>
-        <p:txBody>
-          <a:bodyPr wrap="square" lIns="0" tIns="0" rIns="0" bIns="0" rtlCol="0" anchor="ctr"/>
-          <a:lstStyle/>
-          <a:p>
-            <a:pPr algn="ctr" indent="0" marL="0">
-              <a:buNone/>
-            </a:pPr>
-            <a:r>
-              <a:rPr lang="en-US" sz="900" b="1" dirty="0">
-                <a:solidFill>
-                  <a:srgbClr val="9D174D"/>
-                </a:solidFill>
-                <a:latin typeface="Trebuchet MS" pitchFamily="34" charset="0"/>
-                <a:ea typeface="Trebuchet MS" pitchFamily="34" charset="-122"/>
-                <a:cs typeface="Trebuchet MS" pitchFamily="34" charset="-120"/>
-              </a:rPr>
-              <a:t>s</a:t>
-            </a:r>
-            <a:endParaRPr lang="en-US" sz="900" dirty="0"/>
-          </a:p>
-        </p:txBody>
-      </p:sp>
-      <p:sp>
-        <p:nvSpPr>
-          <p:cNvPr id="48" name="Shape 46"/>
-          <p:cNvSpPr/>
-          <p:nvPr/>
-        </p:nvSpPr>
-        <p:spPr>
-          <a:xfrm>
-            <a:off x="3585855" y="4169664"/>
-            <a:ext cx="493776" cy="475488"/>
-          </a:xfrm>
-          <a:prstGeom prst="rect">
-            <a:avLst>
-              <a:gd name="adj" fmla="val 7692"/>
-            </a:avLst>
-          </a:prstGeom>
-          <a:solidFill>
-            <a:srgbClr val="FFFFFF"/>
-          </a:solidFill>
-          <a:ln w="12700">
-            <a:solidFill>
-              <a:srgbClr val="DB2777"/>
-            </a:solidFill>
-            <a:prstDash val="solid"/>
-          </a:ln>
-        </p:spPr>
-      </p:sp>
-      <p:sp>
-        <p:nvSpPr>
-          <p:cNvPr id="49" name="Text 47"/>
-          <p:cNvSpPr/>
-          <p:nvPr/>
-        </p:nvSpPr>
-        <p:spPr>
-          <a:xfrm>
-            <a:off x="3585855" y="4169664"/>
-            <a:ext cx="493776" cy="475488"/>
-          </a:xfrm>
-          <a:prstGeom prst="rect">
-            <a:avLst/>
-          </a:prstGeom>
-          <a:noFill/>
-          <a:ln/>
-        </p:spPr>
-        <p:txBody>
-          <a:bodyPr wrap="square" lIns="0" tIns="0" rIns="0" bIns="0" rtlCol="0" anchor="ctr"/>
-          <a:lstStyle/>
-          <a:p>
-            <a:pPr algn="ctr" indent="0" marL="0">
-              <a:buNone/>
-            </a:pPr>
-            <a:r>
-              <a:rPr lang="en-US" sz="900" b="1" dirty="0">
-                <a:solidFill>
-                  <a:srgbClr val="9D174D"/>
-                </a:solidFill>
-                <a:latin typeface="Trebuchet MS" pitchFamily="34" charset="0"/>
-                <a:ea typeface="Trebuchet MS" pitchFamily="34" charset="-122"/>
-                <a:cs typeface="Trebuchet MS" pitchFamily="34" charset="-120"/>
-              </a:rPr>
-              <a:t>g</a:t>
-            </a:r>
-            <a:endParaRPr lang="en-US" sz="900" dirty="0"/>
-          </a:p>
-        </p:txBody>
-      </p:sp>
-      <p:sp>
-        <p:nvSpPr>
-          <p:cNvPr id="50" name="Shape 48"/>
-          <p:cNvSpPr/>
-          <p:nvPr/>
-        </p:nvSpPr>
-        <p:spPr>
-          <a:xfrm>
-            <a:off x="4130274" y="4169664"/>
-            <a:ext cx="493776" cy="475488"/>
-          </a:xfrm>
-          <a:prstGeom prst="rect">
-            <a:avLst>
-              <a:gd name="adj" fmla="val 7692"/>
-            </a:avLst>
-          </a:prstGeom>
-          <a:solidFill>
-            <a:srgbClr val="FFFFFF"/>
-          </a:solidFill>
-          <a:ln w="12700">
-            <a:solidFill>
-              <a:srgbClr val="DB2777"/>
-            </a:solidFill>
-            <a:prstDash val="solid"/>
-          </a:ln>
-        </p:spPr>
-      </p:sp>
-      <p:sp>
-        <p:nvSpPr>
-          <p:cNvPr id="51" name="Text 49"/>
-          <p:cNvSpPr/>
-          <p:nvPr/>
-        </p:nvSpPr>
-        <p:spPr>
-          <a:xfrm>
-            <a:off x="4130274" y="4169664"/>
-            <a:ext cx="493776" cy="475488"/>
-          </a:xfrm>
-          <a:prstGeom prst="rect">
-            <a:avLst/>
-          </a:prstGeom>
-          <a:noFill/>
-          <a:ln/>
-        </p:spPr>
-        <p:txBody>
-          <a:bodyPr wrap="square" lIns="0" tIns="0" rIns="0" bIns="0" rtlCol="0" anchor="ctr"/>
-          <a:lstStyle/>
-          <a:p>
-            <a:pPr algn="ctr" indent="0" marL="0">
-              <a:buNone/>
-            </a:pPr>
-            <a:r>
-              <a:rPr lang="en-US" sz="900" b="1" dirty="0">
-                <a:solidFill>
-                  <a:srgbClr val="9D174D"/>
-                </a:solidFill>
-                <a:latin typeface="Trebuchet MS" pitchFamily="34" charset="0"/>
-                <a:ea typeface="Trebuchet MS" pitchFamily="34" charset="-122"/>
-                <a:cs typeface="Trebuchet MS" pitchFamily="34" charset="-120"/>
-              </a:rPr>
-              <a:t>o</a:t>
-            </a:r>
-            <a:endParaRPr lang="en-US" sz="900" dirty="0"/>
-          </a:p>
-        </p:txBody>
-      </p:sp>
-      <p:sp>
-        <p:nvSpPr>
-          <p:cNvPr id="52" name="Shape 50"/>
-          <p:cNvSpPr/>
-          <p:nvPr/>
-        </p:nvSpPr>
-        <p:spPr>
-          <a:xfrm>
-            <a:off x="4674694" y="4169664"/>
-            <a:ext cx="493776" cy="475488"/>
-          </a:xfrm>
-          <a:prstGeom prst="rect">
-            <a:avLst>
-              <a:gd name="adj" fmla="val 7692"/>
-            </a:avLst>
-          </a:prstGeom>
-          <a:solidFill>
-            <a:srgbClr val="FFFFFF"/>
-          </a:solidFill>
-          <a:ln w="12700">
-            <a:solidFill>
-              <a:srgbClr val="DB2777"/>
-            </a:solidFill>
-            <a:prstDash val="solid"/>
-          </a:ln>
-        </p:spPr>
-      </p:sp>
-      <p:sp>
-        <p:nvSpPr>
           <p:cNvPr id="53" name="Text 51"/>
           <p:cNvSpPr/>
           <p:nvPr/>
         </p:nvSpPr>
         <p:spPr>
           <a:xfrm>
-            <a:off x="4674694" y="4169664"/>
-            <a:ext cx="493776" cy="475488"/>
-          </a:xfrm>
-          <a:prstGeom prst="rect">
-            <a:avLst/>
-          </a:prstGeom>
-          <a:noFill/>
-          <a:ln/>
-        </p:spPr>
-        <p:txBody>
-          <a:bodyPr wrap="square" lIns="0" tIns="0" rIns="0" bIns="0" rtlCol="0" anchor="ctr"/>
-          <a:lstStyle/>
-          <a:p>
-            <a:pPr algn="ctr" indent="0" marL="0">
-              <a:buNone/>
-            </a:pPr>
-            <a:r>
-              <a:rPr lang="en-US" sz="900" b="1" dirty="0">
-                <a:solidFill>
-                  <a:srgbClr val="9D174D"/>
-                </a:solidFill>
-                <a:latin typeface="Trebuchet MS" pitchFamily="34" charset="0"/>
-                <a:ea typeface="Trebuchet MS" pitchFamily="34" charset="-122"/>
-                <a:cs typeface="Trebuchet MS" pitchFamily="34" charset="-120"/>
-              </a:rPr>
-              <a:t>v</a:t>
-            </a:r>
-            <a:endParaRPr lang="en-US" sz="900" dirty="0"/>
-          </a:p>
-        </p:txBody>
-      </p:sp>
-      <p:sp>
-        <p:nvSpPr>
-          <p:cNvPr id="54" name="Shape 52"/>
-          <p:cNvSpPr/>
-          <p:nvPr/>
-        </p:nvSpPr>
-        <p:spPr>
-          <a:xfrm>
-            <a:off x="5219114" y="4169664"/>
-            <a:ext cx="493776" cy="475488"/>
-          </a:xfrm>
-          <a:prstGeom prst="rect">
-            <a:avLst>
-              <a:gd name="adj" fmla="val 7692"/>
-            </a:avLst>
-          </a:prstGeom>
-          <a:solidFill>
-            <a:srgbClr val="FFFFFF"/>
-          </a:solidFill>
-          <a:ln w="12700">
-            <a:solidFill>
-              <a:srgbClr val="DB2777"/>
-            </a:solidFill>
-            <a:prstDash val="solid"/>
-          </a:ln>
-        </p:spPr>
-      </p:sp>
-      <p:sp>
-        <p:nvSpPr>
-          <p:cNvPr id="55" name="Text 53"/>
-          <p:cNvSpPr/>
-          <p:nvPr/>
-        </p:nvSpPr>
-        <p:spPr>
-          <a:xfrm>
-            <a:off x="5219114" y="4169664"/>
-            <a:ext cx="493776" cy="475488"/>
-          </a:xfrm>
-          <a:prstGeom prst="rect">
-            <a:avLst/>
-          </a:prstGeom>
-          <a:noFill/>
-          <a:ln/>
-        </p:spPr>
-        <p:txBody>
-          <a:bodyPr wrap="square" lIns="0" tIns="0" rIns="0" bIns="0" rtlCol="0" anchor="ctr"/>
-          <a:lstStyle/>
-          <a:p>
-            <a:pPr algn="ctr" indent="0" marL="0">
-              <a:buNone/>
-            </a:pPr>
-            <a:r>
-              <a:rPr lang="en-US" sz="900" b="1" dirty="0">
-                <a:solidFill>
-                  <a:srgbClr val="9D174D"/>
-                </a:solidFill>
-                <a:latin typeface="Trebuchet MS" pitchFamily="34" charset="0"/>
-                <a:ea typeface="Trebuchet MS" pitchFamily="34" charset="-122"/>
-                <a:cs typeface="Trebuchet MS" pitchFamily="34" charset="-120"/>
-              </a:rPr>
-              <a:t>er</a:t>
-            </a:r>
-            <a:endParaRPr lang="en-US" sz="900" dirty="0"/>
-          </a:p>
-        </p:txBody>
-      </p:sp>
-      <p:sp>
-        <p:nvSpPr>
-          <p:cNvPr id="56" name="Shape 54"/>
-          <p:cNvSpPr/>
-          <p:nvPr/>
-        </p:nvSpPr>
-        <p:spPr>
-          <a:xfrm>
-            <a:off x="5763534" y="4169664"/>
-            <a:ext cx="493776" cy="475488"/>
-          </a:xfrm>
-          <a:prstGeom prst="rect">
-            <a:avLst>
-              <a:gd name="adj" fmla="val 7692"/>
-            </a:avLst>
-          </a:prstGeom>
-          <a:solidFill>
-            <a:srgbClr val="FFFFFF"/>
-          </a:solidFill>
-          <a:ln w="12700">
-            <a:solidFill>
-              <a:srgbClr val="DB2777"/>
-            </a:solidFill>
-            <a:prstDash val="solid"/>
-          </a:ln>
-        </p:spPr>
-      </p:sp>
-      <p:sp>
-        <p:nvSpPr>
-          <p:cNvPr id="57" name="Text 55"/>
-          <p:cNvSpPr/>
-          <p:nvPr/>
-        </p:nvSpPr>
-        <p:spPr>
-          <a:xfrm>
-            <a:off x="5763534" y="4169664"/>
-            <a:ext cx="493776" cy="475488"/>
-          </a:xfrm>
-          <a:prstGeom prst="rect">
-            <a:avLst/>
-          </a:prstGeom>
-          <a:noFill/>
-          <a:ln/>
-        </p:spPr>
-        <p:txBody>
-          <a:bodyPr wrap="square" lIns="0" tIns="0" rIns="0" bIns="0" rtlCol="0" anchor="ctr"/>
-          <a:lstStyle/>
-          <a:p>
-            <a:pPr algn="ctr" indent="0" marL="0">
-              <a:buNone/>
-            </a:pPr>
-            <a:r>
-              <a:rPr lang="en-US" sz="900" b="1" dirty="0">
-                <a:solidFill>
-                  <a:srgbClr val="9D174D"/>
-                </a:solidFill>
-                <a:latin typeface="Trebuchet MS" pitchFamily="34" charset="0"/>
-                <a:ea typeface="Trebuchet MS" pitchFamily="34" charset="-122"/>
-                <a:cs typeface="Trebuchet MS" pitchFamily="34" charset="-120"/>
-              </a:rPr>
-              <a:t>n</a:t>
-            </a:r>
-            <a:endParaRPr lang="en-US" sz="900" dirty="0"/>
-          </a:p>
-        </p:txBody>
-      </p:sp>
-      <p:sp>
-        <p:nvSpPr>
-          <p:cNvPr id="58" name="Shape 56"/>
-          <p:cNvSpPr/>
-          <p:nvPr/>
-        </p:nvSpPr>
-        <p:spPr>
-          <a:xfrm>
-            <a:off x="6307953" y="4169664"/>
-            <a:ext cx="493776" cy="475488"/>
-          </a:xfrm>
-          <a:prstGeom prst="rect">
-            <a:avLst>
-              <a:gd name="adj" fmla="val 7692"/>
-            </a:avLst>
-          </a:prstGeom>
-          <a:solidFill>
-            <a:srgbClr val="FFFFFF"/>
-          </a:solidFill>
-          <a:ln w="12700">
-            <a:solidFill>
-              <a:srgbClr val="DB2777"/>
-            </a:solidFill>
-            <a:prstDash val="solid"/>
-          </a:ln>
-        </p:spPr>
-      </p:sp>
-      <p:sp>
-        <p:nvSpPr>
-          <p:cNvPr id="59" name="Text 57"/>
-          <p:cNvSpPr/>
-          <p:nvPr/>
-        </p:nvSpPr>
-        <p:spPr>
-          <a:xfrm>
-            <a:off x="6307953" y="4169664"/>
-            <a:ext cx="493776" cy="475488"/>
-          </a:xfrm>
-          <a:prstGeom prst="rect">
-            <a:avLst/>
-          </a:prstGeom>
-          <a:noFill/>
-          <a:ln/>
-        </p:spPr>
-        <p:txBody>
-          <a:bodyPr wrap="square" lIns="0" tIns="0" rIns="0" bIns="0" rtlCol="0" anchor="ctr"/>
-          <a:lstStyle/>
-          <a:p>
-            <a:pPr algn="ctr" indent="0" marL="0">
-              <a:buNone/>
-            </a:pPr>
-            <a:r>
-              <a:rPr lang="en-US" sz="900" b="1" dirty="0">
-                <a:solidFill>
-                  <a:srgbClr val="9D174D"/>
-                </a:solidFill>
-                <a:latin typeface="Trebuchet MS" pitchFamily="34" charset="0"/>
-                <a:ea typeface="Trebuchet MS" pitchFamily="34" charset="-122"/>
-                <a:cs typeface="Trebuchet MS" pitchFamily="34" charset="-120"/>
-              </a:rPr>
-              <a:t>m</a:t>
-            </a:r>
-            <a:endParaRPr lang="en-US" sz="900" dirty="0"/>
-          </a:p>
-        </p:txBody>
-      </p:sp>
-      <p:sp>
-        <p:nvSpPr>
-          <p:cNvPr id="60" name="Shape 58"/>
-          <p:cNvSpPr/>
-          <p:nvPr/>
-        </p:nvSpPr>
-        <p:spPr>
-          <a:xfrm>
-            <a:off x="6852373" y="4169664"/>
-            <a:ext cx="493776" cy="475488"/>
-          </a:xfrm>
-          <a:prstGeom prst="rect">
-            <a:avLst>
-              <a:gd name="adj" fmla="val 7692"/>
-            </a:avLst>
-          </a:prstGeom>
-          <a:solidFill>
-            <a:srgbClr val="FFFFFF"/>
-          </a:solidFill>
-          <a:ln w="12700">
-            <a:solidFill>
-              <a:srgbClr val="DB2777"/>
-            </a:solidFill>
-            <a:prstDash val="solid"/>
-          </a:ln>
-        </p:spPr>
-      </p:sp>
-      <p:sp>
-        <p:nvSpPr>
-          <p:cNvPr id="61" name="Text 59"/>
-          <p:cNvSpPr/>
-          <p:nvPr/>
-        </p:nvSpPr>
-        <p:spPr>
-          <a:xfrm>
-            <a:off x="6852373" y="4169664"/>
-            <a:ext cx="493776" cy="475488"/>
-          </a:xfrm>
-          <a:prstGeom prst="rect">
-            <a:avLst/>
-          </a:prstGeom>
-          <a:noFill/>
-          <a:ln/>
-        </p:spPr>
-        <p:txBody>
-          <a:bodyPr wrap="square" lIns="0" tIns="0" rIns="0" bIns="0" rtlCol="0" anchor="ctr"/>
-          <a:lstStyle/>
-          <a:p>
-            <a:pPr algn="ctr" indent="0" marL="0">
-              <a:buNone/>
-            </a:pPr>
-            <a:r>
-              <a:rPr lang="en-US" sz="900" b="1" dirty="0">
-                <a:solidFill>
-                  <a:srgbClr val="9D174D"/>
-                </a:solidFill>
-                <a:latin typeface="Trebuchet MS" pitchFamily="34" charset="0"/>
-                <a:ea typeface="Trebuchet MS" pitchFamily="34" charset="-122"/>
-                <a:cs typeface="Trebuchet MS" pitchFamily="34" charset="-120"/>
-              </a:rPr>
-              <a:t>e</a:t>
-            </a:r>
-            <a:endParaRPr lang="en-US" sz="900" dirty="0"/>
-          </a:p>
-        </p:txBody>
-      </p:sp>
-      <p:sp>
-        <p:nvSpPr>
-          <p:cNvPr id="62" name="Shape 60"/>
-          <p:cNvSpPr/>
-          <p:nvPr/>
-        </p:nvSpPr>
-        <p:spPr>
-          <a:xfrm>
-            <a:off x="7396793" y="4169664"/>
-            <a:ext cx="493776" cy="475488"/>
-          </a:xfrm>
-          <a:prstGeom prst="rect">
-            <a:avLst>
-              <a:gd name="adj" fmla="val 7692"/>
-            </a:avLst>
-          </a:prstGeom>
-          <a:solidFill>
-            <a:srgbClr val="FFFFFF"/>
-          </a:solidFill>
-          <a:ln w="12700">
-            <a:solidFill>
-              <a:srgbClr val="DB2777"/>
-            </a:solidFill>
-            <a:prstDash val="solid"/>
-          </a:ln>
-        </p:spPr>
-      </p:sp>
-      <p:sp>
-        <p:nvSpPr>
-          <p:cNvPr id="63" name="Text 61"/>
-          <p:cNvSpPr/>
-          <p:nvPr/>
-        </p:nvSpPr>
-        <p:spPr>
-          <a:xfrm>
-            <a:off x="7396793" y="4169664"/>
-            <a:ext cx="493776" cy="475488"/>
-          </a:xfrm>
-          <a:prstGeom prst="rect">
-            <a:avLst/>
-          </a:prstGeom>
-          <a:noFill/>
-          <a:ln/>
-        </p:spPr>
-        <p:txBody>
-          <a:bodyPr wrap="square" lIns="0" tIns="0" rIns="0" bIns="0" rtlCol="0" anchor="ctr"/>
-          <a:lstStyle/>
-          <a:p>
-            <a:pPr algn="ctr" indent="0" marL="0">
-              <a:buNone/>
-            </a:pPr>
-            <a:r>
-              <a:rPr lang="en-US" sz="900" b="1" dirty="0">
-                <a:solidFill>
-                  <a:srgbClr val="9D174D"/>
-                </a:solidFill>
-                <a:latin typeface="Trebuchet MS" pitchFamily="34" charset="0"/>
-                <a:ea typeface="Trebuchet MS" pitchFamily="34" charset="-122"/>
-                <a:cs typeface="Trebuchet MS" pitchFamily="34" charset="-120"/>
-              </a:rPr>
-              <a:t>n</a:t>
-            </a:r>
-            <a:endParaRPr lang="en-US" sz="900" dirty="0"/>
-          </a:p>
-        </p:txBody>
-      </p:sp>
-      <p:sp>
-        <p:nvSpPr>
-          <p:cNvPr id="64" name="Shape 62"/>
-          <p:cNvSpPr/>
-          <p:nvPr/>
-        </p:nvSpPr>
-        <p:spPr>
-          <a:xfrm>
-            <a:off x="7941212" y="4169664"/>
-            <a:ext cx="493776" cy="475488"/>
-          </a:xfrm>
-          <a:prstGeom prst="rect">
-            <a:avLst>
-              <a:gd name="adj" fmla="val 7692"/>
-            </a:avLst>
-          </a:prstGeom>
-          <a:solidFill>
-            <a:srgbClr val="FFFFFF"/>
-          </a:solidFill>
-          <a:ln w="12700">
-            <a:solidFill>
-              <a:srgbClr val="DB2777"/>
-            </a:solidFill>
-            <a:prstDash val="solid"/>
-          </a:ln>
-        </p:spPr>
-      </p:sp>
-      <p:sp>
-        <p:nvSpPr>
-          <p:cNvPr id="65" name="Text 63"/>
-          <p:cNvSpPr/>
-          <p:nvPr/>
-        </p:nvSpPr>
-        <p:spPr>
-          <a:xfrm>
-            <a:off x="7941212" y="4169664"/>
-            <a:ext cx="493776" cy="475488"/>
+            <a:off x="7759598" y="4169664"/>
+            <a:ext cx="676656" cy="475488"/>
           </a:xfrm>
           <a:prstGeom prst="rect">
             <a:avLst/>
@@ -29366,7 +28595,7 @@
                 <a:ea typeface="Trebuchet MS" pitchFamily="34" charset="-122"/>
                 <a:cs typeface="Trebuchet MS" pitchFamily="34" charset="-120"/>
               </a:rPr>
-              <a:t>governance</a:t>
+              <a:t>misgovern</a:t>
             </a:r>
             <a:endParaRPr lang="en-US" sz="2800" dirty="0"/>
           </a:p>
@@ -30193,7 +29422,7 @@
                 <a:ea typeface="Trebuchet MS" pitchFamily="34" charset="-122"/>
                 <a:cs typeface="Trebuchet MS" pitchFamily="34" charset="-120"/>
               </a:rPr>
-              <a:t>governance</a:t>
+              <a:t>misgovern</a:t>
             </a:r>
             <a:endParaRPr lang="en-US" sz="2800" dirty="0"/>
           </a:p>
@@ -30282,11 +29511,11 @@
             </a:avLst>
           </a:prstGeom>
           <a:solidFill>
-            <a:srgbClr val="CCFBF1"/>
+            <a:srgbClr val="DDD6FE"/>
           </a:solidFill>
           <a:ln w="19050">
             <a:solidFill>
-              <a:srgbClr val="0D9488"/>
+              <a:srgbClr val="7C3AED"/>
             </a:solidFill>
             <a:prstDash val="solid"/>
           </a:ln>
@@ -30326,13 +29555,13 @@
             <a:r>
               <a:rPr lang="en-US" sz="1300" b="1" dirty="0">
                 <a:solidFill>
-                  <a:srgbClr val="0F766E"/>
+                  <a:srgbClr val="4C1D95"/>
                 </a:solidFill>
                 <a:latin typeface="Trebuchet MS" pitchFamily="34" charset="0"/>
                 <a:ea typeface="Trebuchet MS" pitchFamily="34" charset="-122"/>
                 <a:cs typeface="Trebuchet MS" pitchFamily="34" charset="-120"/>
               </a:rPr>
-              <a:t>govern</a:t>
+              <a:t>mis</a:t>
             </a:r>
             <a:endParaRPr lang="en-US" sz="1300" dirty="0"/>
           </a:p>
@@ -30371,7 +29600,7 @@
                 <a:ea typeface="Calibri" pitchFamily="34" charset="-122"/>
                 <a:cs typeface="Calibri" pitchFamily="34" charset="-120"/>
               </a:rPr>
-              <a:t>to rule or control</a:t>
+              <a:t>badly or wrongly</a:t>
             </a:r>
             <a:endParaRPr lang="en-US" sz="850" dirty="0"/>
           </a:p>
@@ -30394,11 +29623,11 @@
             </a:avLst>
           </a:prstGeom>
           <a:solidFill>
-            <a:srgbClr val="FCE7F3"/>
+            <a:srgbClr val="CCFBF1"/>
           </a:solidFill>
           <a:ln w="19050">
             <a:solidFill>
-              <a:srgbClr val="DB2777"/>
+              <a:srgbClr val="0D9488"/>
             </a:solidFill>
             <a:prstDash val="solid"/>
           </a:ln>
@@ -30438,13 +29667,13 @@
             <a:r>
               <a:rPr lang="en-US" sz="1300" b="1" dirty="0">
                 <a:solidFill>
-                  <a:srgbClr val="9D174D"/>
+                  <a:srgbClr val="0F766E"/>
                 </a:solidFill>
                 <a:latin typeface="Trebuchet MS" pitchFamily="34" charset="0"/>
                 <a:ea typeface="Trebuchet MS" pitchFamily="34" charset="-122"/>
                 <a:cs typeface="Trebuchet MS" pitchFamily="34" charset="-120"/>
               </a:rPr>
-              <a:t>ance</a:t>
+              <a:t>govern</a:t>
             </a:r>
             <a:endParaRPr lang="en-US" sz="1300" dirty="0"/>
           </a:p>
@@ -30483,7 +29712,7 @@
                 <a:ea typeface="Calibri" pitchFamily="34" charset="-122"/>
                 <a:cs typeface="Calibri" pitchFamily="34" charset="-120"/>
               </a:rPr>
-              <a:t>state or quality of</a:t>
+              <a:t>to rule or control</a:t>
             </a:r>
             <a:endParaRPr lang="en-US" sz="850" dirty="0"/>
           </a:p>
@@ -31178,7 +30407,7 @@
                 <a:ea typeface="Trebuchet MS" pitchFamily="34" charset="-122"/>
                 <a:cs typeface="Trebuchet MS" pitchFamily="34" charset="-120"/>
               </a:rPr>
-              <a:t>governance</a:t>
+              <a:t>misgovern</a:t>
             </a:r>
             <a:endParaRPr lang="en-US" sz="2800" dirty="0"/>
           </a:p>
@@ -31267,11 +30496,11 @@
             </a:avLst>
           </a:prstGeom>
           <a:solidFill>
-            <a:srgbClr val="CCFBF1"/>
+            <a:srgbClr val="DDD6FE"/>
           </a:solidFill>
           <a:ln w="19050">
             <a:solidFill>
-              <a:srgbClr val="0D9488"/>
+              <a:srgbClr val="7C3AED"/>
             </a:solidFill>
             <a:prstDash val="solid"/>
           </a:ln>
@@ -31311,13 +30540,13 @@
             <a:r>
               <a:rPr lang="en-US" sz="1300" b="1" dirty="0">
                 <a:solidFill>
-                  <a:srgbClr val="0F766E"/>
+                  <a:srgbClr val="4C1D95"/>
                 </a:solidFill>
                 <a:latin typeface="Trebuchet MS" pitchFamily="34" charset="0"/>
                 <a:ea typeface="Trebuchet MS" pitchFamily="34" charset="-122"/>
                 <a:cs typeface="Trebuchet MS" pitchFamily="34" charset="-120"/>
               </a:rPr>
-              <a:t>govern</a:t>
+              <a:t>mis</a:t>
             </a:r>
             <a:endParaRPr lang="en-US" sz="1300" dirty="0"/>
           </a:p>
@@ -31356,7 +30585,7 @@
                 <a:ea typeface="Calibri" pitchFamily="34" charset="-122"/>
                 <a:cs typeface="Calibri" pitchFamily="34" charset="-120"/>
               </a:rPr>
-              <a:t>to rule or control</a:t>
+              <a:t>badly or wrongly</a:t>
             </a:r>
             <a:endParaRPr lang="en-US" sz="850" dirty="0"/>
           </a:p>
@@ -31379,11 +30608,11 @@
             </a:avLst>
           </a:prstGeom>
           <a:solidFill>
-            <a:srgbClr val="FCE7F3"/>
+            <a:srgbClr val="CCFBF1"/>
           </a:solidFill>
           <a:ln w="19050">
             <a:solidFill>
-              <a:srgbClr val="DB2777"/>
+              <a:srgbClr val="0D9488"/>
             </a:solidFill>
             <a:prstDash val="solid"/>
           </a:ln>
@@ -31423,13 +30652,13 @@
             <a:r>
               <a:rPr lang="en-US" sz="1300" b="1" dirty="0">
                 <a:solidFill>
-                  <a:srgbClr val="9D174D"/>
+                  <a:srgbClr val="0F766E"/>
                 </a:solidFill>
                 <a:latin typeface="Trebuchet MS" pitchFamily="34" charset="0"/>
                 <a:ea typeface="Trebuchet MS" pitchFamily="34" charset="-122"/>
                 <a:cs typeface="Trebuchet MS" pitchFamily="34" charset="-120"/>
               </a:rPr>
-              <a:t>ance</a:t>
+              <a:t>govern</a:t>
             </a:r>
             <a:endParaRPr lang="en-US" sz="1300" dirty="0"/>
           </a:p>
@@ -31468,7 +30697,7 @@
                 <a:ea typeface="Calibri" pitchFamily="34" charset="-122"/>
                 <a:cs typeface="Calibri" pitchFamily="34" charset="-120"/>
               </a:rPr>
-              <a:t>state or quality of</a:t>
+              <a:t>to rule or control</a:t>
             </a:r>
             <a:endParaRPr lang="en-US" sz="850" dirty="0"/>
           </a:p>
@@ -31627,7 +30856,7 @@
                 <a:ea typeface="Trebuchet MS" pitchFamily="34" charset="-122"/>
                 <a:cs typeface="Trebuchet MS" pitchFamily="34" charset="-120"/>
               </a:rPr>
-              <a:t>gov</a:t>
+              <a:t>mis</a:t>
             </a:r>
             <a:endParaRPr lang="en-US" sz="1400" dirty="0"/>
           </a:p>
@@ -31732,7 +30961,7 @@
                 <a:ea typeface="Trebuchet MS" pitchFamily="34" charset="-122"/>
                 <a:cs typeface="Trebuchet MS" pitchFamily="34" charset="-120"/>
               </a:rPr>
-              <a:t>ern</a:t>
+              <a:t>gov</a:t>
             </a:r>
             <a:endParaRPr lang="en-US" sz="1400" dirty="0"/>
           </a:p>
@@ -31837,7 +31066,7 @@
                 <a:ea typeface="Trebuchet MS" pitchFamily="34" charset="-122"/>
                 <a:cs typeface="Trebuchet MS" pitchFamily="34" charset="-120"/>
               </a:rPr>
-              <a:t>ance</a:t>
+              <a:t>ern</a:t>
             </a:r>
             <a:endParaRPr lang="en-US" sz="1400" dirty="0"/>
           </a:p>
@@ -32400,7 +31629,7 @@
                 <a:ea typeface="Trebuchet MS" pitchFamily="34" charset="-122"/>
                 <a:cs typeface="Trebuchet MS" pitchFamily="34" charset="-120"/>
               </a:rPr>
-              <a:t>governance</a:t>
+              <a:t>misgovern</a:t>
             </a:r>
             <a:endParaRPr lang="en-US" sz="2800" dirty="0"/>
           </a:p>
@@ -32489,11 +31718,11 @@
             </a:avLst>
           </a:prstGeom>
           <a:solidFill>
-            <a:srgbClr val="CCFBF1"/>
+            <a:srgbClr val="DDD6FE"/>
           </a:solidFill>
           <a:ln w="19050">
             <a:solidFill>
-              <a:srgbClr val="0D9488"/>
+              <a:srgbClr val="7C3AED"/>
             </a:solidFill>
             <a:prstDash val="solid"/>
           </a:ln>
@@ -32533,13 +31762,13 @@
             <a:r>
               <a:rPr lang="en-US" sz="1300" b="1" dirty="0">
                 <a:solidFill>
-                  <a:srgbClr val="0F766E"/>
+                  <a:srgbClr val="4C1D95"/>
                 </a:solidFill>
                 <a:latin typeface="Trebuchet MS" pitchFamily="34" charset="0"/>
                 <a:ea typeface="Trebuchet MS" pitchFamily="34" charset="-122"/>
                 <a:cs typeface="Trebuchet MS" pitchFamily="34" charset="-120"/>
               </a:rPr>
-              <a:t>govern</a:t>
+              <a:t>mis</a:t>
             </a:r>
             <a:endParaRPr lang="en-US" sz="1300" dirty="0"/>
           </a:p>
@@ -32578,7 +31807,7 @@
                 <a:ea typeface="Calibri" pitchFamily="34" charset="-122"/>
                 <a:cs typeface="Calibri" pitchFamily="34" charset="-120"/>
               </a:rPr>
-              <a:t>to rule or control</a:t>
+              <a:t>badly or wrongly</a:t>
             </a:r>
             <a:endParaRPr lang="en-US" sz="850" dirty="0"/>
           </a:p>
@@ -32601,11 +31830,11 @@
             </a:avLst>
           </a:prstGeom>
           <a:solidFill>
-            <a:srgbClr val="FCE7F3"/>
+            <a:srgbClr val="CCFBF1"/>
           </a:solidFill>
           <a:ln w="19050">
             <a:solidFill>
-              <a:srgbClr val="DB2777"/>
+              <a:srgbClr val="0D9488"/>
             </a:solidFill>
             <a:prstDash val="solid"/>
           </a:ln>
@@ -32645,13 +31874,13 @@
             <a:r>
               <a:rPr lang="en-US" sz="1300" b="1" dirty="0">
                 <a:solidFill>
-                  <a:srgbClr val="9D174D"/>
+                  <a:srgbClr val="0F766E"/>
                 </a:solidFill>
                 <a:latin typeface="Trebuchet MS" pitchFamily="34" charset="0"/>
                 <a:ea typeface="Trebuchet MS" pitchFamily="34" charset="-122"/>
                 <a:cs typeface="Trebuchet MS" pitchFamily="34" charset="-120"/>
               </a:rPr>
-              <a:t>ance</a:t>
+              <a:t>govern</a:t>
             </a:r>
             <a:endParaRPr lang="en-US" sz="1300" dirty="0"/>
           </a:p>
@@ -32690,7 +31919,7 @@
                 <a:ea typeface="Calibri" pitchFamily="34" charset="-122"/>
                 <a:cs typeface="Calibri" pitchFamily="34" charset="-120"/>
               </a:rPr>
-              <a:t>state or quality of</a:t>
+              <a:t>to rule or control</a:t>
             </a:r>
             <a:endParaRPr lang="en-US" sz="850" dirty="0"/>
           </a:p>
@@ -32849,7 +32078,7 @@
                 <a:ea typeface="Trebuchet MS" pitchFamily="34" charset="-122"/>
                 <a:cs typeface="Trebuchet MS" pitchFamily="34" charset="-120"/>
               </a:rPr>
-              <a:t>gov</a:t>
+              <a:t>mis</a:t>
             </a:r>
             <a:endParaRPr lang="en-US" sz="1400" dirty="0"/>
           </a:p>
@@ -32954,7 +32183,7 @@
                 <a:ea typeface="Trebuchet MS" pitchFamily="34" charset="-122"/>
                 <a:cs typeface="Trebuchet MS" pitchFamily="34" charset="-120"/>
               </a:rPr>
-              <a:t>ern</a:t>
+              <a:t>gov</a:t>
             </a:r>
             <a:endParaRPr lang="en-US" sz="1400" dirty="0"/>
           </a:p>
@@ -33059,7 +32288,7 @@
                 <a:ea typeface="Trebuchet MS" pitchFamily="34" charset="-122"/>
                 <a:cs typeface="Trebuchet MS" pitchFamily="34" charset="-120"/>
               </a:rPr>
-              <a:t>ance</a:t>
+              <a:t>ern</a:t>
             </a:r>
             <a:endParaRPr lang="en-US" sz="1400" dirty="0"/>
           </a:p>
@@ -33140,11 +32369,11 @@
         <p:spPr>
           <a:xfrm>
             <a:off x="1874520" y="4096512"/>
-            <a:ext cx="6903720" cy="804672"/>
+            <a:ext cx="6903720" cy="658368"/>
           </a:xfrm>
           <a:prstGeom prst="rect">
             <a:avLst>
-              <a:gd name="adj" fmla="val 6818"/>
+              <a:gd name="adj" fmla="val 8333"/>
             </a:avLst>
           </a:prstGeom>
           <a:solidFill>
@@ -33167,11 +32396,11 @@
         <p:spPr>
           <a:xfrm>
             <a:off x="2023872" y="4169664"/>
-            <a:ext cx="685800" cy="384048"/>
+            <a:ext cx="685800" cy="475488"/>
           </a:xfrm>
           <a:prstGeom prst="rect">
             <a:avLst>
-              <a:gd name="adj" fmla="val 9524"/>
+              <a:gd name="adj" fmla="val 7692"/>
             </a:avLst>
           </a:prstGeom>
           <a:solidFill>
@@ -33194,7 +32423,7 @@
         <p:spPr>
           <a:xfrm>
             <a:off x="2023872" y="4169664"/>
-            <a:ext cx="685800" cy="384048"/>
+            <a:ext cx="685800" cy="475488"/>
           </a:xfrm>
           <a:prstGeom prst="rect">
             <a:avLst/>
@@ -33218,7 +32447,7 @@
                 <a:ea typeface="Trebuchet MS" pitchFamily="34" charset="-122"/>
                 <a:cs typeface="Trebuchet MS" pitchFamily="34" charset="-120"/>
               </a:rPr>
-              <a:t>g</a:t>
+              <a:t>m</a:t>
             </a:r>
             <a:endParaRPr lang="en-US" sz="900" dirty="0"/>
           </a:p>
@@ -33233,11 +32462,11 @@
         <p:spPr>
           <a:xfrm>
             <a:off x="2831592" y="4169664"/>
-            <a:ext cx="685800" cy="384048"/>
+            <a:ext cx="685800" cy="475488"/>
           </a:xfrm>
           <a:prstGeom prst="rect">
             <a:avLst>
-              <a:gd name="adj" fmla="val 9524"/>
+              <a:gd name="adj" fmla="val 7692"/>
             </a:avLst>
           </a:prstGeom>
           <a:solidFill>
@@ -33260,7 +32489,7 @@
         <p:spPr>
           <a:xfrm>
             <a:off x="2831592" y="4169664"/>
-            <a:ext cx="685800" cy="384048"/>
+            <a:ext cx="685800" cy="475488"/>
           </a:xfrm>
           <a:prstGeom prst="rect">
             <a:avLst/>
@@ -33284,7 +32513,7 @@
                 <a:ea typeface="Trebuchet MS" pitchFamily="34" charset="-122"/>
                 <a:cs typeface="Trebuchet MS" pitchFamily="34" charset="-120"/>
               </a:rPr>
-              <a:t>o</a:t>
+              <a:t>i</a:t>
             </a:r>
             <a:endParaRPr lang="en-US" sz="900" dirty="0"/>
           </a:p>
@@ -33299,11 +32528,11 @@
         <p:spPr>
           <a:xfrm>
             <a:off x="3639312" y="4169664"/>
-            <a:ext cx="685800" cy="384048"/>
+            <a:ext cx="685800" cy="475488"/>
           </a:xfrm>
           <a:prstGeom prst="rect">
             <a:avLst>
-              <a:gd name="adj" fmla="val 9524"/>
+              <a:gd name="adj" fmla="val 7692"/>
             </a:avLst>
           </a:prstGeom>
           <a:solidFill>
@@ -33326,7 +32555,7 @@
         <p:spPr>
           <a:xfrm>
             <a:off x="3639312" y="4169664"/>
-            <a:ext cx="685800" cy="384048"/>
+            <a:ext cx="685800" cy="475488"/>
           </a:xfrm>
           <a:prstGeom prst="rect">
             <a:avLst/>
@@ -33350,7 +32579,7 @@
                 <a:ea typeface="Trebuchet MS" pitchFamily="34" charset="-122"/>
                 <a:cs typeface="Trebuchet MS" pitchFamily="34" charset="-120"/>
               </a:rPr>
-              <a:t>v</a:t>
+              <a:t>s</a:t>
             </a:r>
             <a:endParaRPr lang="en-US" sz="900" dirty="0"/>
           </a:p>
@@ -33365,11 +32594,11 @@
         <p:spPr>
           <a:xfrm>
             <a:off x="4447032" y="4169664"/>
-            <a:ext cx="685800" cy="384048"/>
+            <a:ext cx="685800" cy="475488"/>
           </a:xfrm>
           <a:prstGeom prst="rect">
             <a:avLst>
-              <a:gd name="adj" fmla="val 9524"/>
+              <a:gd name="adj" fmla="val 7692"/>
             </a:avLst>
           </a:prstGeom>
           <a:solidFill>
@@ -33392,7 +32621,7 @@
         <p:spPr>
           <a:xfrm>
             <a:off x="4447032" y="4169664"/>
-            <a:ext cx="685800" cy="384048"/>
+            <a:ext cx="685800" cy="475488"/>
           </a:xfrm>
           <a:prstGeom prst="rect">
             <a:avLst/>
@@ -33416,7 +32645,7 @@
                 <a:ea typeface="Trebuchet MS" pitchFamily="34" charset="-122"/>
                 <a:cs typeface="Trebuchet MS" pitchFamily="34" charset="-120"/>
               </a:rPr>
-              <a:t>er</a:t>
+              <a:t>g</a:t>
             </a:r>
             <a:endParaRPr lang="en-US" sz="900" dirty="0"/>
           </a:p>
@@ -33431,11 +32660,11 @@
         <p:spPr>
           <a:xfrm>
             <a:off x="5254752" y="4169664"/>
-            <a:ext cx="685800" cy="384048"/>
+            <a:ext cx="685800" cy="475488"/>
           </a:xfrm>
           <a:prstGeom prst="rect">
             <a:avLst>
-              <a:gd name="adj" fmla="val 9524"/>
+              <a:gd name="adj" fmla="val 7692"/>
             </a:avLst>
           </a:prstGeom>
           <a:solidFill>
@@ -33458,7 +32687,7 @@
         <p:spPr>
           <a:xfrm>
             <a:off x="5254752" y="4169664"/>
-            <a:ext cx="685800" cy="384048"/>
+            <a:ext cx="685800" cy="475488"/>
           </a:xfrm>
           <a:prstGeom prst="rect">
             <a:avLst/>
@@ -33482,7 +32711,7 @@
                 <a:ea typeface="Trebuchet MS" pitchFamily="34" charset="-122"/>
                 <a:cs typeface="Trebuchet MS" pitchFamily="34" charset="-120"/>
               </a:rPr>
-              <a:t>n</a:t>
+              <a:t>o</a:t>
             </a:r>
             <a:endParaRPr lang="en-US" sz="900" dirty="0"/>
           </a:p>
@@ -33497,11 +32726,11 @@
         <p:spPr>
           <a:xfrm>
             <a:off x="6062472" y="4169664"/>
-            <a:ext cx="685800" cy="384048"/>
+            <a:ext cx="685800" cy="475488"/>
           </a:xfrm>
           <a:prstGeom prst="rect">
             <a:avLst>
-              <a:gd name="adj" fmla="val 9524"/>
+              <a:gd name="adj" fmla="val 7692"/>
             </a:avLst>
           </a:prstGeom>
           <a:solidFill>
@@ -33524,7 +32753,7 @@
         <p:spPr>
           <a:xfrm>
             <a:off x="6062472" y="4169664"/>
-            <a:ext cx="685800" cy="384048"/>
+            <a:ext cx="685800" cy="475488"/>
           </a:xfrm>
           <a:prstGeom prst="rect">
             <a:avLst/>
@@ -33548,7 +32777,7 @@
                 <a:ea typeface="Trebuchet MS" pitchFamily="34" charset="-122"/>
                 <a:cs typeface="Trebuchet MS" pitchFamily="34" charset="-120"/>
               </a:rPr>
-              <a:t>a</a:t>
+              <a:t>v</a:t>
             </a:r>
             <a:endParaRPr lang="en-US" sz="900" dirty="0"/>
           </a:p>
@@ -33563,11 +32792,11 @@
         <p:spPr>
           <a:xfrm>
             <a:off x="6870192" y="4169664"/>
-            <a:ext cx="685800" cy="384048"/>
+            <a:ext cx="685800" cy="475488"/>
           </a:xfrm>
           <a:prstGeom prst="rect">
             <a:avLst>
-              <a:gd name="adj" fmla="val 9524"/>
+              <a:gd name="adj" fmla="val 7692"/>
             </a:avLst>
           </a:prstGeom>
           <a:solidFill>
@@ -33590,7 +32819,7 @@
         <p:spPr>
           <a:xfrm>
             <a:off x="6870192" y="4169664"/>
-            <a:ext cx="685800" cy="384048"/>
+            <a:ext cx="685800" cy="475488"/>
           </a:xfrm>
           <a:prstGeom prst="rect">
             <a:avLst/>
@@ -33614,7 +32843,7 @@
                 <a:ea typeface="Trebuchet MS" pitchFamily="34" charset="-122"/>
                 <a:cs typeface="Trebuchet MS" pitchFamily="34" charset="-120"/>
               </a:rPr>
-              <a:t>n</a:t>
+              <a:t>er</a:t>
             </a:r>
             <a:endParaRPr lang="en-US" sz="900" dirty="0"/>
           </a:p>
@@ -33629,11 +32858,11 @@
         <p:spPr>
           <a:xfrm>
             <a:off x="7677912" y="4169664"/>
-            <a:ext cx="685800" cy="384048"/>
+            <a:ext cx="685800" cy="475488"/>
           </a:xfrm>
           <a:prstGeom prst="rect">
             <a:avLst>
-              <a:gd name="adj" fmla="val 9524"/>
+              <a:gd name="adj" fmla="val 7692"/>
             </a:avLst>
           </a:prstGeom>
           <a:solidFill>
@@ -33656,7 +32885,7 @@
         <p:spPr>
           <a:xfrm>
             <a:off x="7677912" y="4169664"/>
-            <a:ext cx="685800" cy="384048"/>
+            <a:ext cx="685800" cy="475488"/>
           </a:xfrm>
           <a:prstGeom prst="rect">
             <a:avLst/>
@@ -33680,48 +32909,9 @@
                 <a:ea typeface="Trebuchet MS" pitchFamily="34" charset="-122"/>
                 <a:cs typeface="Trebuchet MS" pitchFamily="34" charset="-120"/>
               </a:rPr>
-              <a:t>ce</a:t>
+              <a:t>n</a:t>
             </a:r>
             <a:endParaRPr lang="en-US" sz="900" dirty="0"/>
-          </a:p>
-        </p:txBody>
-      </p:sp>
-      <p:sp>
-        <p:nvSpPr>
-          <p:cNvPr id="52" name="Text 50"/>
-          <p:cNvSpPr/>
-          <p:nvPr/>
-        </p:nvSpPr>
-        <p:spPr>
-          <a:xfrm>
-            <a:off x="7677912" y="4572000"/>
-            <a:ext cx="685800" cy="219456"/>
-          </a:xfrm>
-          <a:prstGeom prst="rect">
-            <a:avLst/>
-          </a:prstGeom>
-          <a:noFill/>
-          <a:ln/>
-        </p:spPr>
-        <p:txBody>
-          <a:bodyPr wrap="square" lIns="0" tIns="0" rIns="0" bIns="0" rtlCol="0" anchor="t"/>
-          <a:lstStyle/>
-          <a:p>
-            <a:pPr algn="ctr" indent="0" marL="0">
-              <a:buNone/>
-            </a:pPr>
-            <a:r>
-              <a:rPr lang="en-US" sz="750" i="1" dirty="0">
-                <a:solidFill>
-                  <a:srgbClr val="94A3B8"/>
-                </a:solidFill>
-                <a:latin typeface="Calibri" pitchFamily="34" charset="0"/>
-                <a:ea typeface="Calibri" pitchFamily="34" charset="-122"/>
-                <a:cs typeface="Calibri" pitchFamily="34" charset="-120"/>
-              </a:rPr>
-              <a:t>/s/</a:t>
-            </a:r>
-            <a:endParaRPr lang="en-US" sz="750" dirty="0"/>
           </a:p>
         </p:txBody>
       </p:sp>
@@ -36132,7 +35322,7 @@
                 <a:ea typeface="Trebuchet MS" pitchFamily="34" charset="-122"/>
                 <a:cs typeface="Trebuchet MS" pitchFamily="34" charset="-120"/>
               </a:rPr>
-              <a:t>co-</a:t>
+              <a:t>over-</a:t>
             </a:r>
             <a:endParaRPr lang="en-US" sz="1300" dirty="0"/>
           </a:p>
@@ -36524,7 +35714,7 @@
                 <a:ea typeface="Trebuchet MS" pitchFamily="34" charset="-122"/>
                 <a:cs typeface="Trebuchet MS" pitchFamily="34" charset="-120"/>
               </a:rPr>
-              <a:t>governance</a:t>
+              <a:t>governess</a:t>
             </a:r>
             <a:endParaRPr lang="en-US" sz="1200" dirty="0"/>
           </a:p>
@@ -36590,7 +35780,7 @@
                 <a:ea typeface="Trebuchet MS" pitchFamily="34" charset="-122"/>
                 <a:cs typeface="Trebuchet MS" pitchFamily="34" charset="-120"/>
               </a:rPr>
-              <a:t>governing</a:t>
+              <a:t>governance</a:t>
             </a:r>
             <a:endParaRPr lang="en-US" sz="1200" dirty="0"/>
           </a:p>
@@ -36656,7 +35846,7 @@
                 <a:ea typeface="Trebuchet MS" pitchFamily="34" charset="-122"/>
                 <a:cs typeface="Trebuchet MS" pitchFamily="34" charset="-120"/>
               </a:rPr>
-              <a:t>governess</a:t>
+              <a:t>governing</a:t>
             </a:r>
             <a:endParaRPr lang="en-US" sz="1200" dirty="0"/>
           </a:p>
@@ -37976,7 +37166,7 @@
                 <a:ea typeface="Calibri" pitchFamily="34" charset="-122"/>
                 <a:cs typeface="Calibri" pitchFamily="34" charset="-120"/>
               </a:rPr>
-              <a:t>1.  The root 'govern' comes from a Latin word meaning to rule or steer.</a:t>
+              <a:t>1.  The prefix 'mis-' in 'misgovern' means to govern badly or wrongly.</a:t>
             </a:r>
             <a:endParaRPr lang="en-US" sz="1300" dirty="0"/>
           </a:p>
@@ -38115,7 +37305,7 @@
                 <a:ea typeface="Calibri" pitchFamily="34" charset="-122"/>
                 <a:cs typeface="Calibri" pitchFamily="34" charset="-120"/>
               </a:rPr>
-              <a:t>2.  A governor is someone who has no power or authority over others.</a:t>
+              <a:t>2.  The suffix '-ment' in 'government' means a person who governs.</a:t>
             </a:r>
             <a:endParaRPr lang="en-US" sz="1300" dirty="0"/>
           </a:p>
@@ -38254,7 +37444,7 @@
                 <a:ea typeface="Calibri" pitchFamily="34" charset="-122"/>
                 <a:cs typeface="Calibri" pitchFamily="34" charset="-120"/>
               </a:rPr>
-              <a:t>3.  The word 'government' contains the root 'govern' plus the suffix '-ment'.</a:t>
+              <a:t>3.  The word 'government' does not contain the root 'govern'.</a:t>
             </a:r>
             <a:endParaRPr lang="en-US" sz="1300" dirty="0"/>
           </a:p>
@@ -38277,11 +37467,11 @@
             </a:avLst>
           </a:prstGeom>
           <a:solidFill>
-            <a:srgbClr val="DCFCE7"/>
-          </a:solidFill>
-          <a:ln w="12700">
-            <a:solidFill>
-              <a:srgbClr val="16A34A"/>
+            <a:srgbClr val="FEE2E2"/>
+          </a:solidFill>
+          <a:ln w="12700">
+            <a:solidFill>
+              <a:srgbClr val="DC2626"/>
             </a:solidFill>
             <a:prstDash val="solid"/>
           </a:ln>
@@ -38314,13 +37504,13 @@
             <a:r>
               <a:rPr lang="en-US" sz="1100" b="1" dirty="0">
                 <a:solidFill>
-                  <a:srgbClr val="16A34A"/>
+                  <a:srgbClr val="DC2626"/>
                 </a:solidFill>
                 <a:latin typeface="Trebuchet MS" pitchFamily="34" charset="0"/>
                 <a:ea typeface="Trebuchet MS" pitchFamily="34" charset="-122"/>
                 <a:cs typeface="Trebuchet MS" pitchFamily="34" charset="-120"/>
               </a:rPr>
-              <a:t>TRUE</a:t>
+              <a:t>FALSE</a:t>
             </a:r>
             <a:endParaRPr lang="en-US" sz="1100" dirty="0"/>
           </a:p>
@@ -38393,7 +37583,7 @@
                 <a:ea typeface="Calibri" pitchFamily="34" charset="-122"/>
                 <a:cs typeface="Calibri" pitchFamily="34" charset="-120"/>
               </a:rPr>
-              <a:t>4.  Adding the prefix 'mis-' to 'govern' makes a word that means to govern badly.</a:t>
+              <a:t>4.  The root 'govern' comes from a Latin word meaning to rule or steer.</a:t>
             </a:r>
             <a:endParaRPr lang="en-US" sz="1300" dirty="0"/>
           </a:p>
@@ -38532,7 +37722,7 @@
                 <a:ea typeface="Calibri" pitchFamily="34" charset="-122"/>
                 <a:cs typeface="Calibri" pitchFamily="34" charset="-120"/>
               </a:rPr>
-              <a:t>5.  The suffix '-ment' in 'government' means a person who does something.</a:t>
+              <a:t>5.  A governor is a person who is in charge of governing a place.</a:t>
             </a:r>
             <a:endParaRPr lang="en-US" sz="1300" dirty="0"/>
           </a:p>
@@ -38555,11 +37745,11 @@
             </a:avLst>
           </a:prstGeom>
           <a:solidFill>
-            <a:srgbClr val="FEE2E2"/>
-          </a:solidFill>
-          <a:ln w="12700">
-            <a:solidFill>
-              <a:srgbClr val="DC2626"/>
+            <a:srgbClr val="DCFCE7"/>
+          </a:solidFill>
+          <a:ln w="12700">
+            <a:solidFill>
+              <a:srgbClr val="16A34A"/>
             </a:solidFill>
             <a:prstDash val="solid"/>
           </a:ln>
@@ -38592,13 +37782,13 @@
             <a:r>
               <a:rPr lang="en-US" sz="1100" b="1" dirty="0">
                 <a:solidFill>
-                  <a:srgbClr val="DC2626"/>
+                  <a:srgbClr val="16A34A"/>
                 </a:solidFill>
                 <a:latin typeface="Trebuchet MS" pitchFamily="34" charset="0"/>
                 <a:ea typeface="Trebuchet MS" pitchFamily="34" charset="-122"/>
                 <a:cs typeface="Trebuchet MS" pitchFamily="34" charset="-120"/>
               </a:rPr>
-              <a:t>FALSE</a:t>
+              <a:t>TRUE</a:t>
             </a:r>
             <a:endParaRPr lang="en-US" sz="1100" dirty="0"/>
           </a:p>
@@ -39369,7 +38559,7 @@
                 <a:ea typeface="Trebuchet MS" pitchFamily="34" charset="-122"/>
                 <a:cs typeface="Trebuchet MS" pitchFamily="34" charset="-120"/>
               </a:rPr>
-              <a:t>governance</a:t>
+              <a:t>governess</a:t>
             </a:r>
             <a:endParaRPr lang="en-US" sz="1300" dirty="0"/>
           </a:p>
@@ -39435,7 +38625,7 @@
                 <a:ea typeface="Trebuchet MS" pitchFamily="34" charset="-122"/>
                 <a:cs typeface="Trebuchet MS" pitchFamily="34" charset="-120"/>
               </a:rPr>
-              <a:t>governing</a:t>
+              <a:t>governance</a:t>
             </a:r>
             <a:endParaRPr lang="en-US" sz="1300" dirty="0"/>
           </a:p>
@@ -39501,7 +38691,7 @@
                 <a:ea typeface="Trebuchet MS" pitchFamily="34" charset="-122"/>
                 <a:cs typeface="Trebuchet MS" pitchFamily="34" charset="-120"/>
               </a:rPr>
-              <a:t>governess</a:t>
+              <a:t>governing</a:t>
             </a:r>
             <a:endParaRPr lang="en-US" sz="1300" dirty="0"/>
           </a:p>
@@ -40811,7 +40001,7 @@
                 <a:ea typeface="Trebuchet MS" pitchFamily="34" charset="-122"/>
                 <a:cs typeface="Trebuchet MS" pitchFamily="34" charset="-120"/>
               </a:rPr>
-              <a:t>co-</a:t>
+              <a:t>over-</a:t>
             </a:r>
             <a:endParaRPr lang="en-US" sz="1300" dirty="0"/>
           </a:p>
@@ -41811,7 +41001,7 @@
                 <a:ea typeface="Calibri" pitchFamily="34" charset="-122"/>
                 <a:cs typeface="Calibri" pitchFamily="34" charset="-120"/>
               </a:rPr>
-              <a:t>To govern a country or group badly or unfairly.</a:t>
+              <a:t>To rule or manage a country or organisation badly or unfairly.</a:t>
             </a:r>
             <a:endParaRPr lang="en-US" sz="1200" dirty="0"/>
           </a:p>
@@ -41950,7 +41140,7 @@
                 <a:ea typeface="Calibri" pitchFamily="34" charset="-122"/>
                 <a:cs typeface="Calibri" pitchFamily="34" charset="-120"/>
               </a:rPr>
-              <a:t>A person who is in charge of governing a state or region.</a:t>
+              <a:t>A person who is officially in charge of a state or region.</a:t>
             </a:r>
             <a:endParaRPr lang="en-US" sz="1200" dirty="0"/>
           </a:p>
@@ -42089,7 +41279,7 @@
                 <a:ea typeface="Calibri" pitchFamily="34" charset="-122"/>
                 <a:cs typeface="Calibri" pitchFamily="34" charset="-120"/>
               </a:rPr>
-              <a:t>Currently being in charge of making rules and decisions for a place or group.</a:t>
+              <a:t>The way in which something is controlled and managed, especially a country or organisation.</a:t>
             </a:r>
             <a:endParaRPr lang="en-US" sz="1200" dirty="0"/>
           </a:p>
@@ -42162,7 +41352,7 @@
                 <a:ea typeface="Trebuchet MS" pitchFamily="34" charset="-122"/>
                 <a:cs typeface="Trebuchet MS" pitchFamily="34" charset="-120"/>
               </a:rPr>
-              <a:t>governance</a:t>
+              <a:t>governess</a:t>
             </a:r>
             <a:endParaRPr lang="en-US" sz="1200" dirty="0"/>
           </a:p>
@@ -42228,7 +41418,7 @@
                 <a:ea typeface="Calibri" pitchFamily="34" charset="-122"/>
                 <a:cs typeface="Calibri" pitchFamily="34" charset="-120"/>
               </a:rPr>
-              <a:t>A woman who was hired to live with a family and teach and look after the children.</a:t>
+              <a:t>Controlling or being in charge of a country, school, or organisation.</a:t>
             </a:r>
             <a:endParaRPr lang="en-US" sz="1200" dirty="0"/>
           </a:p>
@@ -42301,7 +41491,7 @@
                 <a:ea typeface="Trebuchet MS" pitchFamily="34" charset="-122"/>
                 <a:cs typeface="Trebuchet MS" pitchFamily="34" charset="-120"/>
               </a:rPr>
-              <a:t>governing</a:t>
+              <a:t>governance</a:t>
             </a:r>
             <a:endParaRPr lang="en-US" sz="1200" dirty="0"/>
           </a:p>
@@ -42367,7 +41557,7 @@
                 <a:ea typeface="Calibri" pitchFamily="34" charset="-122"/>
                 <a:cs typeface="Calibri" pitchFamily="34" charset="-120"/>
               </a:rPr>
-              <a:t>The way in which a country, organisation, or group is controlled and managed.</a:t>
+              <a:t>A woman who is employed to teach and look after children in their home.</a:t>
             </a:r>
             <a:endParaRPr lang="en-US" sz="1200" dirty="0"/>
           </a:p>
@@ -42440,7 +41630,7 @@
                 <a:ea typeface="Trebuchet MS" pitchFamily="34" charset="-122"/>
                 <a:cs typeface="Trebuchet MS" pitchFamily="34" charset="-120"/>
               </a:rPr>
-              <a:t>governess</a:t>
+              <a:t>governing</a:t>
             </a:r>
             <a:endParaRPr lang="en-US" sz="1200" dirty="0"/>
           </a:p>
@@ -42506,7 +41696,7 @@
                 <a:ea typeface="Calibri" pitchFamily="34" charset="-122"/>
                 <a:cs typeface="Calibri" pitchFamily="34" charset="-120"/>
               </a:rPr>
-              <a:t>To be in charge of a country, state, or group and make important decisions for it.</a:t>
+              <a:t>To make rules and be in charge of a country, state, or group of people.</a:t>
             </a:r>
             <a:endParaRPr lang="en-US" sz="1200" dirty="0"/>
           </a:p>
@@ -43140,7 +42330,7 @@
                 <a:ea typeface="Calibri" pitchFamily="34" charset="-122"/>
                 <a:cs typeface="Calibri" pitchFamily="34" charset="-120"/>
               </a:rPr>
-              <a:t>The government made a new law to help keep our rivers clean.</a:t>
+              <a:t>The government decided to build new schools in our region to help more children get a good education.</a:t>
             </a:r>
             <a:endParaRPr lang="en-US" sz="1500" dirty="0"/>
           </a:p>
@@ -43304,7 +42494,7 @@
                 <a:ea typeface="Calibri" pitchFamily="34" charset="-122"/>
                 <a:cs typeface="Calibri" pitchFamily="34" charset="-120"/>
               </a:rPr>
-              <a:t>Our school council is practising governance by making decisions about the school fair.</a:t>
+              <a:t>Our school council is a great example of students learning about governing and making decisions together.</a:t>
             </a:r>
             <a:endParaRPr lang="en-US" sz="1500" dirty="0"/>
           </a:p>
@@ -43468,7 +42658,7 @@
                 <a:ea typeface="Calibri" pitchFamily="34" charset="-122"/>
                 <a:cs typeface="Calibri" pitchFamily="34" charset="-120"/>
               </a:rPr>
-              <a:t>The governor visited our town to speak about plans for building a new hospital.</a:t>
+              <a:t>The governor visited the local community to listen to people's ideas about improving the town.</a:t>
             </a:r>
             <a:endParaRPr lang="en-US" sz="1500" dirty="0"/>
           </a:p>
